--- a/docs/slides/eng/20261020_Meeting_en.pptx
+++ b/docs/slides/eng/20261020_Meeting_en.pptx
@@ -12,6 +12,7 @@
     <p:sldId id="260" r:id="rId12"/>
     <p:sldId id="261" r:id="rId13"/>
     <p:sldId id="262" r:id="rId14"/>
+    <p:sldId id="263" r:id="rId15"/>
   </p:sldIdLst>
   <p:sldSz cx="12191999" cy="6858000" type="screen4x3"/>
   <p:notesSz cx="6858000" cy="9144000"/>
@@ -508,7 +509,7 @@
           <a:lstStyle/>
           <a:p>
             <a:r>
-              <a:t>Problem before dataset. A labelled flow is a tabular network record with an assigned class. Labels are assumed available after investigation; their acquisition is not evaluated here. XGBoost full refitting is the chosen comparator, not a claim that all tree updates require retraining. Class arrival is not a claim of zero-label novelty detection or cross-network robustness.</a:t>
+              <a:t>IDS is a classifier of flow records, not a name for the dataset. Begin with the operational gap: only some attack labels are available initially; investigation later supplies a few examples of another attack. The research question is how much newly labelled data and update computation each method needs, while tracking existing-class quality. Do not infer a universal need for retraining from a weekday collection schedule. Full cumulative XGB refitting is our chosen baseline. This experiment evaluates adaptation after labelling, not unknown-attack detection before labelling or generalization across networks.</a:t>
             </a:r>
           </a:p>
         </p:txBody>
@@ -578,7 +579,7 @@
           <a:lstStyle/>
           <a:p>
             <a:r>
-              <a:t>https://arxiv.org/html/2605.13986v1 Sections 1, 2.2, 2.5. Synthetic tasks refer to model pretraining, not the IDS evaluation data. Context is a supplied labelled dataset, not information stored inside fixed pretrained weights. Fine-tuning is optional weight optimization and is not used in the supplied result pages. FT interface: https://github.com/PriorLabs/TabPFN/blob/main/src/tabpfn/finetuning/finetuned_base.py</a:t>
+              <a:t>https://arxiv.org/html/2605.13986v1 Sections 1, 2.2, 2.5. Synthetic tasks concern pretraining, not our IDS evaluation rows. Context lives outside the weights. Updating a context does not write its rows into the model parameters. IDS fine-tuning would optimize the model using losses on labelled queries, but the displayed no-FT comparisons do not do this.</a:t>
             </a:r>
           </a:p>
         </p:txBody>
@@ -648,7 +649,7 @@
           <a:lstStyle/>
           <a:p>
             <a:r>
-              <a:t>https://arxiv.org/html/2605.13986v1 Figure 5, Section 2.1. Original figure on the left, without a visible caption per user instruction. Steps 1–3 follow cell embedding, column-wise feature embedding, and row-wise feature aggregation. The labelled context is external input; the diagram does not depict IDS weight fine-tuning.</a:t>
+              <a:t>https://arxiv.org/html/2605.13986v1 Figure 5, Section 2.1. Original model diagram without a visible caption as requested. These are inference representations; they are not a sequence of IDS weight-training stages.</a:t>
             </a:r>
           </a:p>
         </p:txBody>
@@ -718,7 +719,7 @@
           <a:lstStyle/>
           <a:p>
             <a:r>
-              <a:t>https://arxiv.org/html/2605.13986v1 Sections 2.2 and 2.4.2. The decoder averages one-hot context labels with learned attention weights. Cached prediction can reuse prepared context states; changing context may require recomputation. No claim that a context update is free, or universally faster than XGBoost refitting.</a:t>
+              <a:t>https://arxiv.org/html/2605.13986v1 Sections 2.2 and 2.4.2. The many-class decoder uses attention-weighted context labels. Updating the context may require rebuilding preprocessing and cache states. Frozen weights do not imply a free update.</a:t>
             </a:r>
           </a:p>
         </p:txBody>
@@ -788,7 +789,7 @@
           <a:lstStyle/>
           <a:p>
             <a:r>
-              <a:t>Unchanged supplied 26S_Meeting.pdf page 4. PDF source only: original content is a page image in PPTX. The companion PDF preserves the original vector page. Experiment redesign is separately documented and has not been applied here.</a:t>
+              <a:t>Data trace: EXP77 data manifests -&gt; EXP71 cumulative run data -&gt; conflict-free fixed-split manifests. The stored suite may contain multiple benchmark keys, but the experiment selects one dataset independently; no CIC attacks are injected into ToN or vice versa. The 100-row example explains the old setting; the next page explicitly states it has no operational or optimality justification. Original row IDs are disjoint across train/test, but duplicate feature vectors can exist; this is not a claim of feature-disjoint holdout. Stages control which labels become available and how many; the researcher does not synthesize the network-feature rows.</a:t>
             </a:r>
           </a:p>
         </p:txBody>
@@ -858,7 +859,7 @@
           <a:lstStyle/>
           <a:p>
             <a:r>
-              <a:t>Unchanged supplied 26S_Meeting.pdf page 5. PDF source only: original content is a page image in PPTX. The companion PDF preserves the original vector page. Experiment redesign is separately documented and has not been applied here.</a:t>
+              <a:t>Counts and class arrival order from EXP77/EXP71 manifests. Initial total 750+125+125=1000. The n rows are real labelled training examples, not daily attack frequencies or test counts. Both methods receive the same IDs. Cumulative final sizes: CIC 1000+4n, ToN 1000+7n. Old displayed results sweep n=10/20/50/100/200/400, and the old cost snapshot uses n=100. 100 is an illustrative setting, not a statistical midpoint, optimum, or measured operational frequency. The revised n=5/10/20/30/50 buffer plan is design-only and has no results yet.</a:t>
             </a:r>
           </a:p>
         </p:txBody>
@@ -928,7 +929,77 @@
           <a:lstStyle/>
           <a:p>
             <a:r>
-              <a:t>Unchanged supplied 26S_Meeting.pdf page 6. PDF source only: original content is a page image in PPTX. The companion PDF preserves the original vector page. Experiment redesign is separately documented and has not been applied here.</a:t>
+              <a:t>The graph is an unchanged crop of supplied PDF page 5; every plotted value is preserved. Only the framing changed: removed the 400-row winner callout and distinguished overall F1 from evidence of retention. This is completed 10–400 cumulative evidence, not the new 5–50 fixed-buffer experiment.</a:t>
+            </a:r>
+          </a:p>
+        </p:txBody>
+      </p:sp>
+      <p:sp>
+        <p:nvSpPr>
+          <p:cNvPr id="4" name="Slide Number Placeholder 3"/>
+          <p:cNvSpPr>
+            <a:spLocks noGrp="1"/>
+          </p:cNvSpPr>
+          <p:nvPr>
+            <p:ph type="sldNum" idx="5" sz="quarter"/>
+          </p:nvPr>
+        </p:nvSpPr>
+        <p:spPr/>
+      </p:sp>
+    </p:spTree>
+  </p:cSld>
+  <p:clrMapOvr>
+    <a:masterClrMapping/>
+  </p:clrMapOvr>
+</p:notes>
+</file>
+
+<file path=ppt/notesSlides/notesSlide8.xml><?xml version="1.0" encoding="utf-8"?>
+<p:notes xmlns:a="http://schemas.openxmlformats.org/drawingml/2006/main" xmlns:p="http://schemas.openxmlformats.org/presentationml/2006/main" xmlns:r="http://schemas.openxmlformats.org/officeDocument/2006/relationships">
+  <p:cSld>
+    <p:spTree>
+      <p:nvGrpSpPr>
+        <p:cNvPr id="1" name=""/>
+        <p:cNvGrpSpPr/>
+        <p:nvPr/>
+      </p:nvGrpSpPr>
+      <p:grpSpPr>
+        <a:xfrm>
+          <a:off x="0" y="0"/>
+          <a:ext cx="0" cy="0"/>
+          <a:chOff x="0" y="0"/>
+          <a:chExt cx="0" cy="0"/>
+        </a:xfrm>
+      </p:grpSpPr>
+      <p:sp>
+        <p:nvSpPr>
+          <p:cNvPr id="2" name="Slide Image Placeholder 1"/>
+          <p:cNvSpPr>
+            <a:spLocks noGrp="1"/>
+          </p:cNvSpPr>
+          <p:nvPr>
+            <p:ph type="sldImg" idx="2"/>
+          </p:nvPr>
+        </p:nvSpPr>
+        <p:spPr/>
+      </p:sp>
+      <p:sp>
+        <p:nvSpPr>
+          <p:cNvPr id="3" name="Notes Placeholder 2"/>
+          <p:cNvSpPr>
+            <a:spLocks noGrp="1"/>
+          </p:cNvSpPr>
+          <p:nvPr>
+            <p:ph type="body" idx="3" sz="quarter"/>
+          </p:nvPr>
+        </p:nvSpPr>
+        <p:spPr/>
+        <p:txBody>
+          <a:bodyPr/>
+          <a:lstStyle/>
+          <a:p>
+            <a:r>
+              <a:t>Unchanged graph crop from supplied PDF page 6. At n=100 final cumulative size is CIC 1400 / ToN 1700. Existing update times include model/context preparation after the initial stage, and exclude inference. These values do not establish fixed-buffer retention, minimum sufficient labels, or an end-to-end deployment cost advantage. Next experiment measures final new-class quality, paired existing-class changes and later update cost at n=5/10/20/30/50.</a:t>
             </a:r>
           </a:p>
         </p:txBody>
@@ -3956,7 +4027,7 @@
           </a:bodyPr>
           <a:lstStyle/>
           <a:p>
-            <a:pPr>
+            <a:pPr algn="l">
               <a:lnSpc>
                 <a:spcPct val="114000"/>
               </a:lnSpc>
@@ -3976,7 +4047,7 @@
                 <a:ea typeface="Pretendard"/>
                 <a:cs typeface="Pretendard"/>
               </a:rPr>
-              <a:t>Adapting IDS to newly labelled attacks</a:t>
+              <a:t>Adapting IDS with few newly labelled attacks</a:t>
             </a:r>
           </a:p>
         </p:txBody>
@@ -3989,8 +4060,8 @@
         </p:nvSpPr>
         <p:spPr>
           <a:xfrm>
-            <a:off x="566928" y="1024128"/>
-            <a:ext cx="10972800" cy="475488"/>
+            <a:off x="566928" y="1005840"/>
+            <a:ext cx="10972800" cy="322280"/>
           </a:xfrm>
           <a:prstGeom prst="rect">
             <a:avLst/>
@@ -4003,19 +4074,19 @@
           </a:bodyPr>
           <a:lstStyle/>
           <a:p>
-            <a:pPr>
-              <a:lnSpc>
-                <a:spcPct val="114000"/>
-              </a:lnSpc>
-              <a:spcBef>
-                <a:spcPts val="0"/>
-              </a:spcBef>
-              <a:spcAft>
-                <a:spcPts val="0"/>
-              </a:spcAft>
-            </a:pPr>
-            <a:r>
-              <a:rPr sz="2200" b="0" lang="en-US">
+            <a:pPr algn="l">
+              <a:lnSpc>
+                <a:spcPct val="114000"/>
+              </a:lnSpc>
+              <a:spcBef>
+                <a:spcPts val="0"/>
+              </a:spcBef>
+              <a:spcAft>
+                <a:spcPts val="0"/>
+              </a:spcAft>
+            </a:pPr>
+            <a:r>
+              <a:rPr sz="2100" b="0" lang="en-US">
                 <a:solidFill>
                   <a:srgbClr val="20262E"/>
                 </a:solidFill>
@@ -4023,21 +4094,92 @@
                 <a:ea typeface="Pretendard"/>
                 <a:cs typeface="Pretendard"/>
               </a:rPr>
-              <a:t>IDS · Classifying network flows as benign or attack types</a:t>
-            </a:r>
-          </a:p>
-        </p:txBody>
-      </p:sp>
-      <p:sp>
-        <p:nvSpPr>
-          <p:cNvPr id="4" name="Rectangle 3"/>
+              <a:t>Intrusion detection system (IDS) · Classify network flows as benign or attack types</a:t>
+            </a:r>
+          </a:p>
+        </p:txBody>
+      </p:sp>
+      <p:sp>
+        <p:nvSpPr>
+          <p:cNvPr id="4" name="TextBox 3"/>
+          <p:cNvSpPr txBox="1"/>
+          <p:nvPr/>
+        </p:nvSpPr>
+        <p:spPr>
+          <a:xfrm>
+            <a:off x="566928" y="1572768"/>
+            <a:ext cx="10972800" cy="644560"/>
+          </a:xfrm>
+          <a:prstGeom prst="rect">
+            <a:avLst/>
+          </a:prstGeom>
+          <a:noFill/>
+        </p:spPr>
+        <p:txBody>
+          <a:bodyPr wrap="none" anchor="t" lIns="0" rIns="0" tIns="0" bIns="0">
+            <a:noAutofit/>
+          </a:bodyPr>
+          <a:lstStyle/>
+          <a:p>
+            <a:pPr algn="l">
+              <a:lnSpc>
+                <a:spcPct val="114000"/>
+              </a:lnSpc>
+              <a:spcBef>
+                <a:spcPts val="0"/>
+              </a:spcBef>
+              <a:spcAft>
+                <a:spcPts val="0"/>
+              </a:spcAft>
+            </a:pPr>
+            <a:r>
+              <a:rPr sz="2100" b="1" lang="en-US">
+                <a:solidFill>
+                  <a:srgbClr val="00306C"/>
+                </a:solidFill>
+                <a:latin typeface="Pretendard"/>
+                <a:ea typeface="Pretendard"/>
+                <a:cs typeface="Pretendard"/>
+              </a:rPr>
+              <a:t>An attack absent from the initial labelled data may appear later</a:t>
+            </a:r>
+          </a:p>
+          <a:p>
+            <a:pPr algn="l">
+              <a:lnSpc>
+                <a:spcPct val="114000"/>
+              </a:lnSpc>
+              <a:spcBef>
+                <a:spcPts val="0"/>
+              </a:spcBef>
+              <a:spcAft>
+                <a:spcPts val="0"/>
+              </a:spcAft>
+            </a:pPr>
+            <a:r>
+              <a:rPr sz="2100" b="1" lang="en-US">
+                <a:solidFill>
+                  <a:srgbClr val="00306C"/>
+                </a:solidFill>
+                <a:latin typeface="Pretendard"/>
+                <a:ea typeface="Pretendard"/>
+                <a:cs typeface="Pretendard"/>
+              </a:rPr>
+              <a:t>A fixed test score alone does not show how well a detector can adapt</a:t>
+            </a:r>
+          </a:p>
+        </p:txBody>
+      </p:sp>
+      <p:sp>
+        <p:nvSpPr>
+          <p:cNvPr id="5" name="Rectangle 4"/>
           <p:cNvSpPr/>
           <p:nvPr/>
         </p:nvSpPr>
         <p:spPr>
           <a:xfrm>
-            <a:off x="566928" y="1810512"/>
-            <a:ext cx="3337560" cy="1600200"/>
+            <a:off x="566928" y="2596896"/>
+            <a:ext cx="3337560" cy="1444752"/>
           </a:xfrm>
           <a:prstGeom prst="rect">
             <a:avLst/>
@@ -4073,14 +4215,14 @@
       </p:sp>
       <p:sp>
         <p:nvSpPr>
-          <p:cNvPr id="5" name="TextBox 4"/>
+          <p:cNvPr id="6" name="TextBox 5"/>
           <p:cNvSpPr txBox="1"/>
           <p:nvPr/>
         </p:nvSpPr>
         <p:spPr>
           <a:xfrm>
-            <a:off x="749808" y="1965960"/>
-            <a:ext cx="2971800" cy="384048"/>
+            <a:off x="731520" y="2761488"/>
+            <a:ext cx="3008376" cy="322280"/>
           </a:xfrm>
           <a:prstGeom prst="rect">
             <a:avLst/>
@@ -4093,19 +4235,19 @@
           </a:bodyPr>
           <a:lstStyle/>
           <a:p>
-            <a:pPr>
-              <a:lnSpc>
-                <a:spcPct val="114000"/>
-              </a:lnSpc>
-              <a:spcBef>
-                <a:spcPts val="0"/>
-              </a:spcBef>
-              <a:spcAft>
-                <a:spcPts val="0"/>
-              </a:spcAft>
-            </a:pPr>
-            <a:r>
-              <a:rPr sz="2200" b="1" lang="en-US">
+            <a:pPr algn="l">
+              <a:lnSpc>
+                <a:spcPct val="114000"/>
+              </a:lnSpc>
+              <a:spcBef>
+                <a:spcPts val="0"/>
+              </a:spcBef>
+              <a:spcAft>
+                <a:spcPts val="0"/>
+              </a:spcAft>
+            </a:pPr>
+            <a:r>
+              <a:rPr sz="2100" b="1" lang="en-US">
                 <a:solidFill>
                   <a:srgbClr val="007BC6"/>
                 </a:solidFill>
@@ -4113,21 +4255,21 @@
                 <a:ea typeface="Pretendard"/>
                 <a:cs typeface="Pretendard"/>
               </a:rPr>
-              <a:t>Initial deployment</a:t>
-            </a:r>
-          </a:p>
-        </p:txBody>
-      </p:sp>
-      <p:sp>
-        <p:nvSpPr>
-          <p:cNvPr id="6" name="TextBox 5"/>
+              <a:t>At deployment</a:t>
+            </a:r>
+          </a:p>
+        </p:txBody>
+      </p:sp>
+      <p:sp>
+        <p:nvSpPr>
+          <p:cNvPr id="7" name="TextBox 6"/>
           <p:cNvSpPr txBox="1"/>
           <p:nvPr/>
         </p:nvSpPr>
         <p:spPr>
           <a:xfrm>
-            <a:off x="749808" y="2560320"/>
-            <a:ext cx="2980944" cy="621792"/>
+            <a:off x="731520" y="3319272"/>
+            <a:ext cx="3008376" cy="521787"/>
           </a:xfrm>
           <a:prstGeom prst="rect">
             <a:avLst/>
@@ -4140,19 +4282,19 @@
           </a:bodyPr>
           <a:lstStyle/>
           <a:p>
-            <a:pPr>
-              <a:lnSpc>
-                <a:spcPct val="114000"/>
-              </a:lnSpc>
-              <a:spcBef>
-                <a:spcPts val="0"/>
-              </a:spcBef>
-              <a:spcAft>
-                <a:spcPts val="0"/>
-              </a:spcAft>
-            </a:pPr>
-            <a:r>
-              <a:rPr sz="1900" b="0" lang="en-US">
+            <a:pPr algn="l">
+              <a:lnSpc>
+                <a:spcPct val="114000"/>
+              </a:lnSpc>
+              <a:spcBef>
+                <a:spcPts val="0"/>
+              </a:spcBef>
+              <a:spcAft>
+                <a:spcPts val="0"/>
+              </a:spcAft>
+            </a:pPr>
+            <a:r>
+              <a:rPr sz="1700" b="0" lang="en-US">
                 <a:solidFill>
                   <a:srgbClr val="20262E"/>
                 </a:solidFill>
@@ -4160,23 +4302,23 @@
                 <a:ea typeface="Pretendard"/>
                 <a:cs typeface="Pretendard"/>
               </a:rPr>
-              <a:t>Labelled benign traffic</a:t>
-            </a:r>
-          </a:p>
-          <a:p>
-            <a:pPr>
-              <a:lnSpc>
-                <a:spcPct val="114000"/>
-              </a:lnSpc>
-              <a:spcBef>
-                <a:spcPts val="0"/>
-              </a:spcBef>
-              <a:spcAft>
-                <a:spcPts val="0"/>
-              </a:spcAft>
-            </a:pPr>
-            <a:r>
-              <a:rPr sz="1900" b="0" lang="en-US">
+              <a:t>Benign + attacks A and B</a:t>
+            </a:r>
+          </a:p>
+          <a:p>
+            <a:pPr algn="l">
+              <a:lnSpc>
+                <a:spcPct val="114000"/>
+              </a:lnSpc>
+              <a:spcBef>
+                <a:spcPts val="0"/>
+              </a:spcBef>
+              <a:spcAft>
+                <a:spcPts val="0"/>
+              </a:spcAft>
+            </a:pPr>
+            <a:r>
+              <a:rPr sz="1700" b="0" lang="en-US">
                 <a:solidFill>
                   <a:srgbClr val="20262E"/>
                 </a:solidFill>
@@ -4184,20 +4326,20 @@
                 <a:ea typeface="Pretendard"/>
                 <a:cs typeface="Pretendard"/>
               </a:rPr>
-              <a:t>and known attacks</a:t>
-            </a:r>
-          </a:p>
-        </p:txBody>
-      </p:sp>
-      <p:sp>
-        <p:nvSpPr>
-          <p:cNvPr id="7" name="Right Arrow 6"/>
+              <a:t>Labels for a limited set of types</a:t>
+            </a:r>
+          </a:p>
+        </p:txBody>
+      </p:sp>
+      <p:sp>
+        <p:nvSpPr>
+          <p:cNvPr id="8" name="Right Arrow 7"/>
           <p:cNvSpPr/>
           <p:nvPr/>
         </p:nvSpPr>
         <p:spPr>
           <a:xfrm>
-            <a:off x="4050791" y="2468880"/>
+            <a:off x="4050791" y="3182112"/>
             <a:ext cx="320040" cy="256032"/>
           </a:xfrm>
           <a:prstGeom prst="rightArrow">
@@ -4234,14 +4376,14 @@
       </p:sp>
       <p:sp>
         <p:nvSpPr>
-          <p:cNvPr id="8" name="Rectangle 7"/>
+          <p:cNvPr id="9" name="Rectangle 8"/>
           <p:cNvSpPr/>
           <p:nvPr/>
         </p:nvSpPr>
         <p:spPr>
           <a:xfrm>
-            <a:off x="4425696" y="1810512"/>
-            <a:ext cx="3337560" cy="1600200"/>
+            <a:off x="4425696" y="2596896"/>
+            <a:ext cx="3337560" cy="1444752"/>
           </a:xfrm>
           <a:prstGeom prst="rect">
             <a:avLst/>
@@ -4277,14 +4419,14 @@
       </p:sp>
       <p:sp>
         <p:nvSpPr>
-          <p:cNvPr id="9" name="TextBox 8"/>
+          <p:cNvPr id="10" name="TextBox 9"/>
           <p:cNvSpPr txBox="1"/>
           <p:nvPr/>
         </p:nvSpPr>
         <p:spPr>
           <a:xfrm>
-            <a:off x="4608576" y="1965960"/>
-            <a:ext cx="2971800" cy="384048"/>
+            <a:off x="4590288" y="2761488"/>
+            <a:ext cx="3008376" cy="322280"/>
           </a:xfrm>
           <a:prstGeom prst="rect">
             <a:avLst/>
@@ -4297,19 +4439,19 @@
           </a:bodyPr>
           <a:lstStyle/>
           <a:p>
-            <a:pPr>
-              <a:lnSpc>
-                <a:spcPct val="114000"/>
-              </a:lnSpc>
-              <a:spcBef>
-                <a:spcPts val="0"/>
-              </a:spcBef>
-              <a:spcAft>
-                <a:spcPts val="0"/>
-              </a:spcAft>
-            </a:pPr>
-            <a:r>
-              <a:rPr sz="2200" b="1" lang="en-US">
+            <a:pPr algn="l">
+              <a:lnSpc>
+                <a:spcPct val="114000"/>
+              </a:lnSpc>
+              <a:spcBef>
+                <a:spcPts val="0"/>
+              </a:spcBef>
+              <a:spcAft>
+                <a:spcPts val="0"/>
+              </a:spcAft>
+            </a:pPr>
+            <a:r>
+              <a:rPr sz="2100" b="1" lang="en-US">
                 <a:solidFill>
                   <a:srgbClr val="007BC6"/>
                 </a:solidFill>
@@ -4317,21 +4459,21 @@
                 <a:ea typeface="Pretendard"/>
                 <a:cs typeface="Pretendard"/>
               </a:rPr>
-              <a:t>Newly labelled attack</a:t>
-            </a:r>
-          </a:p>
-        </p:txBody>
-      </p:sp>
-      <p:sp>
-        <p:nvSpPr>
-          <p:cNvPr id="10" name="TextBox 9"/>
+              <a:t>After investigation</a:t>
+            </a:r>
+          </a:p>
+        </p:txBody>
+      </p:sp>
+      <p:sp>
+        <p:nvSpPr>
+          <p:cNvPr id="11" name="TextBox 10"/>
           <p:cNvSpPr txBox="1"/>
           <p:nvPr/>
         </p:nvSpPr>
         <p:spPr>
           <a:xfrm>
-            <a:off x="4608576" y="2560320"/>
-            <a:ext cx="2980944" cy="621792"/>
+            <a:off x="4590288" y="3319272"/>
+            <a:ext cx="3008376" cy="521787"/>
           </a:xfrm>
           <a:prstGeom prst="rect">
             <a:avLst/>
@@ -4344,19 +4486,19 @@
           </a:bodyPr>
           <a:lstStyle/>
           <a:p>
-            <a:pPr>
-              <a:lnSpc>
-                <a:spcPct val="114000"/>
-              </a:lnSpc>
-              <a:spcBef>
-                <a:spcPts val="0"/>
-              </a:spcBef>
-              <a:spcAft>
-                <a:spcPts val="0"/>
-              </a:spcAft>
-            </a:pPr>
-            <a:r>
-              <a:rPr sz="1900" b="0" lang="en-US">
+            <a:pPr algn="l">
+              <a:lnSpc>
+                <a:spcPct val="114000"/>
+              </a:lnSpc>
+              <a:spcBef>
+                <a:spcPts val="0"/>
+              </a:spcBef>
+              <a:spcAft>
+                <a:spcPts val="0"/>
+              </a:spcAft>
+            </a:pPr>
+            <a:r>
+              <a:rPr sz="1700" b="0" lang="en-US">
                 <a:solidFill>
                   <a:srgbClr val="20262E"/>
                 </a:solidFill>
@@ -4364,23 +4506,23 @@
                 <a:ea typeface="Pretendard"/>
                 <a:cs typeface="Pretendard"/>
               </a:rPr>
-              <a:t>A small labelled sample</a:t>
-            </a:r>
-          </a:p>
-          <a:p>
-            <a:pPr>
-              <a:lnSpc>
-                <a:spcPct val="114000"/>
-              </a:lnSpc>
-              <a:spcBef>
-                <a:spcPts val="0"/>
-              </a:spcBef>
-              <a:spcAft>
-                <a:spcPts val="0"/>
-              </a:spcAft>
-            </a:pPr>
-            <a:r>
-              <a:rPr sz="1900" b="0" lang="en-US">
+              <a:t>A few labelled cases of C</a:t>
+            </a:r>
+          </a:p>
+          <a:p>
+            <a:pPr algn="l">
+              <a:lnSpc>
+                <a:spcPct val="114000"/>
+              </a:lnSpc>
+              <a:spcBef>
+                <a:spcPts val="0"/>
+              </a:spcBef>
+              <a:spcAft>
+                <a:spcPts val="0"/>
+              </a:spcAft>
+            </a:pPr>
+            <a:r>
+              <a:rPr sz="1700" b="0" lang="en-US">
                 <a:solidFill>
                   <a:srgbClr val="20262E"/>
                 </a:solidFill>
@@ -4388,20 +4530,20 @@
                 <a:ea typeface="Pretendard"/>
                 <a:cs typeface="Pretendard"/>
               </a:rPr>
-              <a:t>of a newly observed attack</a:t>
-            </a:r>
-          </a:p>
-        </p:txBody>
-      </p:sp>
-      <p:sp>
-        <p:nvSpPr>
-          <p:cNvPr id="11" name="Right Arrow 10"/>
+              <a:t>New labels for the detector</a:t>
+            </a:r>
+          </a:p>
+        </p:txBody>
+      </p:sp>
+      <p:sp>
+        <p:nvSpPr>
+          <p:cNvPr id="12" name="Right Arrow 11"/>
           <p:cNvSpPr/>
           <p:nvPr/>
         </p:nvSpPr>
         <p:spPr>
           <a:xfrm>
-            <a:off x="7909560" y="2468880"/>
+            <a:off x="7909560" y="3182112"/>
             <a:ext cx="320040" cy="256032"/>
           </a:xfrm>
           <a:prstGeom prst="rightArrow">
@@ -4438,14 +4580,14 @@
       </p:sp>
       <p:sp>
         <p:nvSpPr>
-          <p:cNvPr id="12" name="Rectangle 11"/>
+          <p:cNvPr id="13" name="Rectangle 12"/>
           <p:cNvSpPr/>
           <p:nvPr/>
         </p:nvSpPr>
         <p:spPr>
           <a:xfrm>
-            <a:off x="8284463" y="1810512"/>
-            <a:ext cx="3337560" cy="1600200"/>
+            <a:off x="8284463" y="2596896"/>
+            <a:ext cx="3337560" cy="1444752"/>
           </a:xfrm>
           <a:prstGeom prst="rect">
             <a:avLst/>
@@ -4481,14 +4623,14 @@
       </p:sp>
       <p:sp>
         <p:nvSpPr>
-          <p:cNvPr id="13" name="TextBox 12"/>
+          <p:cNvPr id="14" name="TextBox 13"/>
           <p:cNvSpPr txBox="1"/>
           <p:nvPr/>
         </p:nvSpPr>
         <p:spPr>
           <a:xfrm>
-            <a:off x="8467343" y="1965960"/>
-            <a:ext cx="2971800" cy="384048"/>
+            <a:off x="8449055" y="2761488"/>
+            <a:ext cx="3008376" cy="322280"/>
           </a:xfrm>
           <a:prstGeom prst="rect">
             <a:avLst/>
@@ -4501,19 +4643,19 @@
           </a:bodyPr>
           <a:lstStyle/>
           <a:p>
-            <a:pPr>
-              <a:lnSpc>
-                <a:spcPct val="114000"/>
-              </a:lnSpc>
-              <a:spcBef>
-                <a:spcPts val="0"/>
-              </a:spcBef>
-              <a:spcAft>
-                <a:spcPts val="0"/>
-              </a:spcAft>
-            </a:pPr>
-            <a:r>
-              <a:rPr sz="2200" b="1" lang="en-US">
+            <a:pPr algn="l">
+              <a:lnSpc>
+                <a:spcPct val="114000"/>
+              </a:lnSpc>
+              <a:spcBef>
+                <a:spcPts val="0"/>
+              </a:spcBef>
+              <a:spcAft>
+                <a:spcPts val="0"/>
+              </a:spcAft>
+            </a:pPr>
+            <a:r>
+              <a:rPr sz="2100" b="1" lang="en-US">
                 <a:solidFill>
                   <a:srgbClr val="007BC6"/>
                 </a:solidFill>
@@ -4521,21 +4663,21 @@
                 <a:ea typeface="Pretendard"/>
                 <a:cs typeface="Pretendard"/>
               </a:rPr>
-              <a:t>Detector update</a:t>
-            </a:r>
-          </a:p>
-        </p:txBody>
-      </p:sp>
-      <p:sp>
-        <p:nvSpPr>
-          <p:cNvPr id="14" name="TextBox 13"/>
+              <a:t>After updating</a:t>
+            </a:r>
+          </a:p>
+        </p:txBody>
+      </p:sp>
+      <p:sp>
+        <p:nvSpPr>
+          <p:cNvPr id="15" name="TextBox 14"/>
           <p:cNvSpPr txBox="1"/>
           <p:nvPr/>
         </p:nvSpPr>
         <p:spPr>
           <a:xfrm>
-            <a:off x="8467343" y="2560320"/>
-            <a:ext cx="2980944" cy="621792"/>
+            <a:off x="8449055" y="3319272"/>
+            <a:ext cx="3008376" cy="521787"/>
           </a:xfrm>
           <a:prstGeom prst="rect">
             <a:avLst/>
@@ -4548,19 +4690,19 @@
           </a:bodyPr>
           <a:lstStyle/>
           <a:p>
-            <a:pPr>
-              <a:lnSpc>
-                <a:spcPct val="114000"/>
-              </a:lnSpc>
-              <a:spcBef>
-                <a:spcPts val="0"/>
-              </a:spcBef>
-              <a:spcAft>
-                <a:spcPts val="0"/>
-              </a:spcAft>
-            </a:pPr>
-            <a:r>
-              <a:rPr sz="1900" b="0" lang="en-US">
+            <a:pPr algn="l">
+              <a:lnSpc>
+                <a:spcPct val="114000"/>
+              </a:lnSpc>
+              <a:spcBef>
+                <a:spcPts val="0"/>
+              </a:spcBef>
+              <a:spcAft>
+                <a:spcPts val="0"/>
+              </a:spcAft>
+            </a:pPr>
+            <a:r>
+              <a:rPr sz="1700" b="0" lang="en-US">
                 <a:solidFill>
                   <a:srgbClr val="20262E"/>
                 </a:solidFill>
@@ -4568,23 +4710,23 @@
                 <a:ea typeface="Pretendard"/>
                 <a:cs typeface="Pretendard"/>
               </a:rPr>
-              <a:t>Recognize the new attack</a:t>
-            </a:r>
-          </a:p>
-          <a:p>
-            <a:pPr>
-              <a:lnSpc>
-                <a:spcPct val="114000"/>
-              </a:lnSpc>
-              <a:spcBef>
-                <a:spcPts val="0"/>
-              </a:spcBef>
-              <a:spcAft>
-                <a:spcPts val="0"/>
-              </a:spcAft>
-            </a:pPr>
-            <a:r>
-              <a:rPr sz="1900" b="0" lang="en-US">
+              <a:t>Detection of C and update cost</a:t>
+            </a:r>
+          </a:p>
+          <a:p>
+            <a:pPr algn="l">
+              <a:lnSpc>
+                <a:spcPct val="114000"/>
+              </a:lnSpc>
+              <a:spcBef>
+                <a:spcPts val="0"/>
+              </a:spcBef>
+              <a:spcAft>
+                <a:spcPts val="0"/>
+              </a:spcAft>
+            </a:pPr>
+            <a:r>
+              <a:rPr sz="1700" b="0" lang="en-US">
                 <a:solidFill>
                   <a:srgbClr val="20262E"/>
                 </a:solidFill>
@@ -4592,21 +4734,21 @@
                 <a:ea typeface="Pretendard"/>
                 <a:cs typeface="Pretendard"/>
               </a:rPr>
-              <a:t>and preserve earlier quality</a:t>
-            </a:r>
-          </a:p>
-        </p:txBody>
-      </p:sp>
-      <p:sp>
-        <p:nvSpPr>
-          <p:cNvPr id="15" name="TextBox 14"/>
+              <a:t>Quality on earlier classes</a:t>
+            </a:r>
+          </a:p>
+        </p:txBody>
+      </p:sp>
+      <p:sp>
+        <p:nvSpPr>
+          <p:cNvPr id="16" name="TextBox 15"/>
           <p:cNvSpPr txBox="1"/>
           <p:nvPr/>
         </p:nvSpPr>
         <p:spPr>
           <a:xfrm>
-            <a:off x="594360" y="3849624"/>
-            <a:ext cx="1874519" cy="365760"/>
+            <a:off x="594360" y="4480560"/>
+            <a:ext cx="1691640" cy="337626"/>
           </a:xfrm>
           <a:prstGeom prst="rect">
             <a:avLst/>
@@ -4619,19 +4761,19 @@
           </a:bodyPr>
           <a:lstStyle/>
           <a:p>
-            <a:pPr>
-              <a:lnSpc>
-                <a:spcPct val="114000"/>
-              </a:lnSpc>
-              <a:spcBef>
-                <a:spcPts val="0"/>
-              </a:spcBef>
-              <a:spcAft>
-                <a:spcPts val="0"/>
-              </a:spcAft>
-            </a:pPr>
-            <a:r>
-              <a:rPr sz="2300" b="1" lang="en-US">
+            <a:pPr algn="l">
+              <a:lnSpc>
+                <a:spcPct val="114000"/>
+              </a:lnSpc>
+              <a:spcBef>
+                <a:spcPts val="0"/>
+              </a:spcBef>
+              <a:spcAft>
+                <a:spcPts val="0"/>
+              </a:spcAft>
+            </a:pPr>
+            <a:r>
+              <a:rPr sz="2200" b="1" lang="en-US">
                 <a:solidFill>
                   <a:srgbClr val="20262E"/>
                 </a:solidFill>
@@ -4646,14 +4788,14 @@
       </p:sp>
       <p:sp>
         <p:nvSpPr>
-          <p:cNvPr id="16" name="TextBox 15"/>
+          <p:cNvPr id="17" name="TextBox 16"/>
           <p:cNvSpPr txBox="1"/>
           <p:nvPr/>
         </p:nvSpPr>
         <p:spPr>
           <a:xfrm>
-            <a:off x="2606040" y="3849624"/>
-            <a:ext cx="8961120" cy="420624"/>
+            <a:off x="2423160" y="4480560"/>
+            <a:ext cx="9052560" cy="384048"/>
           </a:xfrm>
           <a:prstGeom prst="rect">
             <a:avLst/>
@@ -4666,19 +4808,19 @@
           </a:bodyPr>
           <a:lstStyle/>
           <a:p>
-            <a:pPr>
-              <a:lnSpc>
-                <a:spcPct val="114000"/>
-              </a:lnSpc>
-              <a:spcBef>
-                <a:spcPts val="0"/>
-              </a:spcBef>
-              <a:spcAft>
-                <a:spcPts val="0"/>
-              </a:spcAft>
-            </a:pPr>
-            <a:r>
-              <a:rPr sz="2100" b="0" lang="en-US">
+            <a:pPr algn="l">
+              <a:lnSpc>
+                <a:spcPct val="114000"/>
+              </a:lnSpc>
+              <a:spcBef>
+                <a:spcPts val="0"/>
+              </a:spcBef>
+              <a:spcAft>
+                <a:spcPts val="0"/>
+              </a:spcAft>
+            </a:pPr>
+            <a:r>
+              <a:rPr sz="2000" b="0" lang="en-US">
                 <a:solidFill>
                   <a:srgbClr val="20262E"/>
                 </a:solidFill>
@@ -4686,21 +4828,21 @@
                 <a:ea typeface="Pretendard"/>
                 <a:cs typeface="Pretendard"/>
               </a:rPr>
-              <a:t>Comparator: refit on all labelled examples available so far</a:t>
-            </a:r>
-          </a:p>
-        </p:txBody>
-      </p:sp>
-      <p:sp>
-        <p:nvSpPr>
-          <p:cNvPr id="17" name="TextBox 16"/>
+              <a:t>Refit the model on all available labels, including the new cases</a:t>
+            </a:r>
+          </a:p>
+        </p:txBody>
+      </p:sp>
+      <p:sp>
+        <p:nvSpPr>
+          <p:cNvPr id="18" name="TextBox 17"/>
           <p:cNvSpPr txBox="1"/>
           <p:nvPr/>
         </p:nvSpPr>
         <p:spPr>
           <a:xfrm>
-            <a:off x="594360" y="4572000"/>
-            <a:ext cx="1874519" cy="365760"/>
+            <a:off x="594360" y="5093208"/>
+            <a:ext cx="1691640" cy="337626"/>
           </a:xfrm>
           <a:prstGeom prst="rect">
             <a:avLst/>
@@ -4713,19 +4855,19 @@
           </a:bodyPr>
           <a:lstStyle/>
           <a:p>
-            <a:pPr>
-              <a:lnSpc>
-                <a:spcPct val="114000"/>
-              </a:lnSpc>
-              <a:spcBef>
-                <a:spcPts val="0"/>
-              </a:spcBef>
-              <a:spcAft>
-                <a:spcPts val="0"/>
-              </a:spcAft>
-            </a:pPr>
-            <a:r>
-              <a:rPr sz="2300" b="1" lang="en-US">
+            <a:pPr algn="l">
+              <a:lnSpc>
+                <a:spcPct val="114000"/>
+              </a:lnSpc>
+              <a:spcBef>
+                <a:spcPts val="0"/>
+              </a:spcBef>
+              <a:spcAft>
+                <a:spcPts val="0"/>
+              </a:spcAft>
+            </a:pPr>
+            <a:r>
+              <a:rPr sz="2200" b="1" lang="en-US">
                 <a:solidFill>
                   <a:srgbClr val="007BC6"/>
                 </a:solidFill>
@@ -4740,14 +4882,14 @@
       </p:sp>
       <p:sp>
         <p:nvSpPr>
-          <p:cNvPr id="18" name="TextBox 17"/>
+          <p:cNvPr id="19" name="TextBox 18"/>
           <p:cNvSpPr txBox="1"/>
           <p:nvPr/>
         </p:nvSpPr>
         <p:spPr>
           <a:xfrm>
-            <a:off x="2606040" y="4572000"/>
-            <a:ext cx="8961120" cy="420624"/>
+            <a:off x="2423160" y="5093208"/>
+            <a:ext cx="9052560" cy="384048"/>
           </a:xfrm>
           <a:prstGeom prst="rect">
             <a:avLst/>
@@ -4760,19 +4902,19 @@
           </a:bodyPr>
           <a:lstStyle/>
           <a:p>
-            <a:pPr>
-              <a:lnSpc>
-                <a:spcPct val="114000"/>
-              </a:lnSpc>
-              <a:spcBef>
-                <a:spcPts val="0"/>
-              </a:spcBef>
-              <a:spcAft>
-                <a:spcPts val="0"/>
-              </a:spcAft>
-            </a:pPr>
-            <a:r>
-              <a:rPr sz="2100" b="0" lang="en-US">
+            <a:pPr algn="l">
+              <a:lnSpc>
+                <a:spcPct val="114000"/>
+              </a:lnSpc>
+              <a:spcBef>
+                <a:spcPts val="0"/>
+              </a:spcBef>
+              <a:spcAft>
+                <a:spcPts val="0"/>
+              </a:spcAft>
+            </a:pPr>
+            <a:r>
+              <a:rPr sz="2000" b="0" lang="en-US">
                 <a:solidFill>
                   <a:srgbClr val="20262E"/>
                 </a:solidFill>
@@ -4780,27 +4922,74 @@
                 <a:ea typeface="Pretendard"/>
                 <a:cs typeface="Pretendard"/>
               </a:rPr>
-              <a:t>Fixed pretrained weights; labelled examples supplied as context</a:t>
-            </a:r>
-          </a:p>
-        </p:txBody>
-      </p:sp>
-      <p:sp>
-        <p:nvSpPr>
-          <p:cNvPr id="19" name="Rectangle 18"/>
+              <a:t>Supply existing and new cases as context to the pretrained model</a:t>
+            </a:r>
+          </a:p>
+        </p:txBody>
+      </p:sp>
+      <p:sp>
+        <p:nvSpPr>
+          <p:cNvPr id="20" name="TextBox 19"/>
+          <p:cNvSpPr txBox="1"/>
+          <p:nvPr/>
+        </p:nvSpPr>
+        <p:spPr>
+          <a:xfrm>
+            <a:off x="594360" y="5815584"/>
+            <a:ext cx="10972800" cy="292608"/>
+          </a:xfrm>
+          <a:prstGeom prst="rect">
+            <a:avLst/>
+          </a:prstGeom>
+          <a:noFill/>
+        </p:spPr>
+        <p:txBody>
+          <a:bodyPr wrap="none" anchor="t" lIns="0" rIns="0" tIns="0" bIns="0">
+            <a:noAutofit/>
+          </a:bodyPr>
+          <a:lstStyle/>
+          <a:p>
+            <a:pPr algn="l">
+              <a:lnSpc>
+                <a:spcPct val="114000"/>
+              </a:lnSpc>
+              <a:spcBef>
+                <a:spcPts val="0"/>
+              </a:spcBef>
+              <a:spcAft>
+                <a:spcPts val="0"/>
+              </a:spcAft>
+            </a:pPr>
+            <a:r>
+              <a:rPr sz="1700" b="0" lang="en-US">
+                <a:solidFill>
+                  <a:srgbClr val="617080"/>
+                </a:solidFill>
+                <a:latin typeface="Pretendard"/>
+                <a:ea typeface="Pretendard"/>
+                <a:cs typeface="Pretendard"/>
+              </a:rPr>
+              <a:t>Evaluation scope · Adaptation after labels for a new attack become available</a:t>
+            </a:r>
+          </a:p>
+        </p:txBody>
+      </p:sp>
+      <p:sp>
+        <p:nvSpPr>
+          <p:cNvPr id="21" name="Rectangle 20"/>
           <p:cNvSpPr/>
           <p:nvPr/>
         </p:nvSpPr>
         <p:spPr>
           <a:xfrm>
-            <a:off x="566928" y="5596128"/>
-            <a:ext cx="11018520" cy="704088"/>
+            <a:off x="0" y="6446520"/>
+            <a:ext cx="12191999" cy="411480"/>
           </a:xfrm>
           <a:prstGeom prst="rect">
             <a:avLst/>
           </a:prstGeom>
           <a:solidFill>
-            <a:srgbClr val="F1F5F9"/>
+            <a:srgbClr val="00306C"/>
           </a:solidFill>
           <a:ln>
             <a:noFill/>
@@ -4830,14 +5019,14 @@
       </p:sp>
       <p:sp>
         <p:nvSpPr>
-          <p:cNvPr id="20" name="TextBox 19"/>
+          <p:cNvPr id="22" name="TextBox 21"/>
           <p:cNvSpPr txBox="1"/>
           <p:nvPr/>
         </p:nvSpPr>
         <p:spPr>
           <a:xfrm>
-            <a:off x="768096" y="5769864"/>
-            <a:ext cx="10607040" cy="365760"/>
+            <a:off x="566928" y="6528816"/>
+            <a:ext cx="9738360" cy="214853"/>
           </a:xfrm>
           <a:prstGeom prst="rect">
             <a:avLst/>
@@ -4850,27 +5039,74 @@
           </a:bodyPr>
           <a:lstStyle/>
           <a:p>
-            <a:pPr>
-              <a:lnSpc>
-                <a:spcPct val="114000"/>
-              </a:lnSpc>
-              <a:spcBef>
-                <a:spcPts val="0"/>
-              </a:spcBef>
-              <a:spcAft>
-                <a:spcPts val="0"/>
-              </a:spcAft>
-            </a:pPr>
-            <a:r>
-              <a:rPr sz="2000" b="1" lang="en-US">
-                <a:solidFill>
-                  <a:srgbClr val="00306C"/>
-                </a:solidFill>
-                <a:latin typeface="Pretendard"/>
-                <a:ea typeface="Pretendard"/>
-                <a:cs typeface="Pretendard"/>
-              </a:rPr>
-              <a:t>Comparison · New-attack detection · Retained quality · Update cost</a:t>
+            <a:pPr algn="l">
+              <a:lnSpc>
+                <a:spcPct val="114000"/>
+              </a:lnSpc>
+              <a:spcBef>
+                <a:spcPts val="0"/>
+              </a:spcBef>
+              <a:spcAft>
+                <a:spcPts val="0"/>
+              </a:spcAft>
+            </a:pPr>
+            <a:r>
+              <a:rPr sz="1400" b="0" lang="en-US">
+                <a:solidFill>
+                  <a:srgbClr val="FFFFFF"/>
+                </a:solidFill>
+                <a:latin typeface="Pretendard"/>
+                <a:ea typeface="Pretendard"/>
+                <a:cs typeface="Pretendard"/>
+              </a:rPr>
+              <a:t>Research question · Detection quality and update cost with few new labelled cases</a:t>
+            </a:r>
+          </a:p>
+        </p:txBody>
+      </p:sp>
+      <p:sp>
+        <p:nvSpPr>
+          <p:cNvPr id="23" name="TextBox 22"/>
+          <p:cNvSpPr txBox="1"/>
+          <p:nvPr/>
+        </p:nvSpPr>
+        <p:spPr>
+          <a:xfrm>
+            <a:off x="10469880" y="6537960"/>
+            <a:ext cx="1143000" cy="201168"/>
+          </a:xfrm>
+          <a:prstGeom prst="rect">
+            <a:avLst/>
+          </a:prstGeom>
+          <a:noFill/>
+        </p:spPr>
+        <p:txBody>
+          <a:bodyPr wrap="none" anchor="t" lIns="0" rIns="0" tIns="0" bIns="0">
+            <a:noAutofit/>
+          </a:bodyPr>
+          <a:lstStyle/>
+          <a:p>
+            <a:pPr algn="r">
+              <a:lnSpc>
+                <a:spcPct val="114000"/>
+              </a:lnSpc>
+              <a:spcBef>
+                <a:spcPts val="0"/>
+              </a:spcBef>
+              <a:spcAft>
+                <a:spcPts val="0"/>
+              </a:spcAft>
+            </a:pPr>
+            <a:r>
+              <a:rPr sz="1200" b="0" lang="en-US">
+                <a:solidFill>
+                  <a:srgbClr val="FFFFFF"/>
+                </a:solidFill>
+                <a:latin typeface="Pretendard"/>
+                <a:ea typeface="Pretendard"/>
+                <a:cs typeface="Pretendard"/>
+              </a:rPr>
+              <a:t>01   1</a:t>
             </a:r>
           </a:p>
         </p:txBody>
@@ -4915,7 +5151,7 @@
           </a:bodyPr>
           <a:lstStyle/>
           <a:p>
-            <a:pPr>
+            <a:pPr algn="l">
               <a:lnSpc>
                 <a:spcPct val="114000"/>
               </a:lnSpc>
@@ -4935,7 +5171,7 @@
                 <a:ea typeface="Pretendard"/>
                 <a:cs typeface="Pretendard"/>
               </a:rPr>
-              <a:t>TabPFN · Weights, context and query</a:t>
+              <a:t>TabPFN · Pretrained weights and supplied examples</a:t>
             </a:r>
           </a:p>
         </p:txBody>
@@ -4948,8 +5184,8 @@
         </p:nvSpPr>
         <p:spPr>
           <a:xfrm>
-            <a:off x="566928" y="960120"/>
-            <a:ext cx="10972800" cy="365760"/>
+            <a:off x="566928" y="1005840"/>
+            <a:ext cx="10972800" cy="310896"/>
           </a:xfrm>
           <a:prstGeom prst="rect">
             <a:avLst/>
@@ -4962,7 +5198,7 @@
           </a:bodyPr>
           <a:lstStyle/>
           <a:p>
-            <a:pPr>
+            <a:pPr algn="l">
               <a:lnSpc>
                 <a:spcPct val="114000"/>
               </a:lnSpc>
@@ -4989,13 +5225,84 @@
       </p:sp>
       <p:sp>
         <p:nvSpPr>
-          <p:cNvPr id="4" name="Rectangle 3"/>
+          <p:cNvPr id="4" name="TextBox 3"/>
+          <p:cNvSpPr txBox="1"/>
+          <p:nvPr/>
+        </p:nvSpPr>
+        <p:spPr>
+          <a:xfrm>
+            <a:off x="566928" y="1527048"/>
+            <a:ext cx="10972800" cy="675253"/>
+          </a:xfrm>
+          <a:prstGeom prst="rect">
+            <a:avLst/>
+          </a:prstGeom>
+          <a:noFill/>
+        </p:spPr>
+        <p:txBody>
+          <a:bodyPr wrap="none" anchor="t" lIns="0" rIns="0" tIns="0" bIns="0">
+            <a:noAutofit/>
+          </a:bodyPr>
+          <a:lstStyle/>
+          <a:p>
+            <a:pPr algn="l">
+              <a:lnSpc>
+                <a:spcPct val="114000"/>
+              </a:lnSpc>
+              <a:spcBef>
+                <a:spcPts val="0"/>
+              </a:spcBef>
+              <a:spcAft>
+                <a:spcPts val="0"/>
+              </a:spcAft>
+            </a:pPr>
+            <a:r>
+              <a:rPr sz="2200" b="1" lang="en-US">
+                <a:solidFill>
+                  <a:srgbClr val="00306C"/>
+                </a:solidFill>
+                <a:latin typeface="Pretendard"/>
+                <a:ea typeface="Pretendard"/>
+                <a:cs typeface="Pretendard"/>
+              </a:rPr>
+              <a:t>Pretraining learns how to predict from examples</a:t>
+            </a:r>
+          </a:p>
+          <a:p>
+            <a:pPr algn="l">
+              <a:lnSpc>
+                <a:spcPct val="114000"/>
+              </a:lnSpc>
+              <a:spcBef>
+                <a:spcPts val="0"/>
+              </a:spcBef>
+              <a:spcAft>
+                <a:spcPts val="0"/>
+              </a:spcAft>
+            </a:pPr>
+            <a:r>
+              <a:rPr sz="2200" b="1" lang="en-US">
+                <a:solidFill>
+                  <a:srgbClr val="00306C"/>
+                </a:solidFill>
+                <a:latin typeface="Pretendard"/>
+                <a:ea typeface="Pretendard"/>
+                <a:cs typeface="Pretendard"/>
+              </a:rPr>
+              <a:t>Examples defining the current IDS classes are supplied at prediction time</a:t>
+            </a:r>
+          </a:p>
+        </p:txBody>
+      </p:sp>
+      <p:sp>
+        <p:nvSpPr>
+          <p:cNvPr id="5" name="Rectangle 4"/>
           <p:cNvSpPr/>
           <p:nvPr/>
         </p:nvSpPr>
         <p:spPr>
           <a:xfrm>
-            <a:off x="566928" y="1709928"/>
+            <a:off x="566928" y="2395728"/>
             <a:ext cx="2953512" cy="914400"/>
           </a:xfrm>
           <a:prstGeom prst="rect">
@@ -5032,14 +5339,14 @@
       </p:sp>
       <p:sp>
         <p:nvSpPr>
-          <p:cNvPr id="5" name="TextBox 4"/>
+          <p:cNvPr id="6" name="TextBox 5"/>
           <p:cNvSpPr txBox="1"/>
           <p:nvPr/>
         </p:nvSpPr>
         <p:spPr>
           <a:xfrm>
-            <a:off x="749808" y="1865376"/>
-            <a:ext cx="2606040" cy="322280"/>
+            <a:off x="749808" y="2542032"/>
+            <a:ext cx="2606040" cy="306933"/>
           </a:xfrm>
           <a:prstGeom prst="rect">
             <a:avLst/>
@@ -5052,19 +5359,19 @@
           </a:bodyPr>
           <a:lstStyle/>
           <a:p>
-            <a:pPr>
-              <a:lnSpc>
-                <a:spcPct val="114000"/>
-              </a:lnSpc>
-              <a:spcBef>
-                <a:spcPts val="0"/>
-              </a:spcBef>
-              <a:spcAft>
-                <a:spcPts val="0"/>
-              </a:spcAft>
-            </a:pPr>
-            <a:r>
-              <a:rPr sz="2100" b="1" lang="en-US">
+            <a:pPr algn="l">
+              <a:lnSpc>
+                <a:spcPct val="114000"/>
+              </a:lnSpc>
+              <a:spcBef>
+                <a:spcPts val="0"/>
+              </a:spcBef>
+              <a:spcAft>
+                <a:spcPts val="0"/>
+              </a:spcAft>
+            </a:pPr>
+            <a:r>
+              <a:rPr sz="2000" b="1" lang="en-US">
                 <a:solidFill>
                   <a:srgbClr val="007BC6"/>
                 </a:solidFill>
@@ -5079,14 +5386,14 @@
       </p:sp>
       <p:sp>
         <p:nvSpPr>
-          <p:cNvPr id="6" name="TextBox 5"/>
+          <p:cNvPr id="7" name="TextBox 6"/>
           <p:cNvSpPr txBox="1"/>
           <p:nvPr/>
         </p:nvSpPr>
         <p:spPr>
           <a:xfrm>
-            <a:off x="749808" y="2267712"/>
-            <a:ext cx="2606040" cy="260893"/>
+            <a:off x="749808" y="2944368"/>
+            <a:ext cx="2606040" cy="245546"/>
           </a:xfrm>
           <a:prstGeom prst="rect">
             <a:avLst/>
@@ -5099,19 +5406,19 @@
           </a:bodyPr>
           <a:lstStyle/>
           <a:p>
-            <a:pPr>
-              <a:lnSpc>
-                <a:spcPct val="114000"/>
-              </a:lnSpc>
-              <a:spcBef>
-                <a:spcPts val="0"/>
-              </a:spcBef>
-              <a:spcAft>
-                <a:spcPts val="0"/>
-              </a:spcAft>
-            </a:pPr>
-            <a:r>
-              <a:rPr sz="1700" b="0" lang="en-US">
+            <a:pPr algn="l">
+              <a:lnSpc>
+                <a:spcPct val="114000"/>
+              </a:lnSpc>
+              <a:spcBef>
+                <a:spcPts val="0"/>
+              </a:spcBef>
+              <a:spcAft>
+                <a:spcPts val="0"/>
+              </a:spcAft>
+            </a:pPr>
+            <a:r>
+              <a:rPr sz="1600" b="0" lang="en-US">
                 <a:solidFill>
                   <a:srgbClr val="20262E"/>
                 </a:solidFill>
@@ -5119,21 +5426,21 @@
                 <a:ea typeface="Pretendard"/>
                 <a:cs typeface="Pretendard"/>
               </a:rPr>
-              <a:t>Flow features + labels</a:t>
-            </a:r>
-          </a:p>
-        </p:txBody>
-      </p:sp>
-      <p:sp>
-        <p:nvSpPr>
-          <p:cNvPr id="7" name="Rectangle 6"/>
+              <a:t>Existing/new flows + labels</a:t>
+            </a:r>
+          </a:p>
+        </p:txBody>
+      </p:sp>
+      <p:sp>
+        <p:nvSpPr>
+          <p:cNvPr id="8" name="Rectangle 7"/>
           <p:cNvSpPr/>
           <p:nvPr/>
         </p:nvSpPr>
         <p:spPr>
           <a:xfrm>
-            <a:off x="566928" y="2862072"/>
-            <a:ext cx="2953512" cy="914400"/>
+            <a:off x="566928" y="3538728"/>
+            <a:ext cx="2953512" cy="795528"/>
           </a:xfrm>
           <a:prstGeom prst="rect">
             <a:avLst/>
@@ -5169,14 +5476,14 @@
       </p:sp>
       <p:sp>
         <p:nvSpPr>
-          <p:cNvPr id="8" name="TextBox 7"/>
+          <p:cNvPr id="9" name="TextBox 8"/>
           <p:cNvSpPr txBox="1"/>
           <p:nvPr/>
         </p:nvSpPr>
         <p:spPr>
           <a:xfrm>
-            <a:off x="749808" y="3017520"/>
-            <a:ext cx="2606040" cy="322280"/>
+            <a:off x="749808" y="3657600"/>
+            <a:ext cx="2606040" cy="306933"/>
           </a:xfrm>
           <a:prstGeom prst="rect">
             <a:avLst/>
@@ -5189,19 +5496,19 @@
           </a:bodyPr>
           <a:lstStyle/>
           <a:p>
-            <a:pPr>
-              <a:lnSpc>
-                <a:spcPct val="114000"/>
-              </a:lnSpc>
-              <a:spcBef>
-                <a:spcPts val="0"/>
-              </a:spcBef>
-              <a:spcAft>
-                <a:spcPts val="0"/>
-              </a:spcAft>
-            </a:pPr>
-            <a:r>
-              <a:rPr sz="2100" b="1" lang="en-US">
+            <a:pPr algn="l">
+              <a:lnSpc>
+                <a:spcPct val="114000"/>
+              </a:lnSpc>
+              <a:spcBef>
+                <a:spcPts val="0"/>
+              </a:spcBef>
+              <a:spcAft>
+                <a:spcPts val="0"/>
+              </a:spcAft>
+            </a:pPr>
+            <a:r>
+              <a:rPr sz="2000" b="1" lang="en-US">
                 <a:solidFill>
                   <a:srgbClr val="007BC6"/>
                 </a:solidFill>
@@ -5216,14 +5523,14 @@
       </p:sp>
       <p:sp>
         <p:nvSpPr>
-          <p:cNvPr id="9" name="TextBox 8"/>
+          <p:cNvPr id="10" name="TextBox 9"/>
           <p:cNvSpPr txBox="1"/>
           <p:nvPr/>
         </p:nvSpPr>
         <p:spPr>
           <a:xfrm>
-            <a:off x="749808" y="3419856"/>
-            <a:ext cx="2606040" cy="260893"/>
+            <a:off x="749808" y="4023360"/>
+            <a:ext cx="2606040" cy="245546"/>
           </a:xfrm>
           <a:prstGeom prst="rect">
             <a:avLst/>
@@ -5236,19 +5543,19 @@
           </a:bodyPr>
           <a:lstStyle/>
           <a:p>
-            <a:pPr>
-              <a:lnSpc>
-                <a:spcPct val="114000"/>
-              </a:lnSpc>
-              <a:spcBef>
-                <a:spcPts val="0"/>
-              </a:spcBef>
-              <a:spcAft>
-                <a:spcPts val="0"/>
-              </a:spcAft>
-            </a:pPr>
-            <a:r>
-              <a:rPr sz="1700" b="0" lang="en-US">
+            <a:pPr algn="l">
+              <a:lnSpc>
+                <a:spcPct val="114000"/>
+              </a:lnSpc>
+              <a:spcBef>
+                <a:spcPts val="0"/>
+              </a:spcBef>
+              <a:spcAft>
+                <a:spcPts val="0"/>
+              </a:spcAft>
+            </a:pPr>
+            <a:r>
+              <a:rPr sz="1600" b="0" lang="en-US">
                 <a:solidFill>
                   <a:srgbClr val="20262E"/>
                 </a:solidFill>
@@ -5256,20 +5563,20 @@
                 <a:ea typeface="Pretendard"/>
                 <a:cs typeface="Pretendard"/>
               </a:rPr>
-              <a:t>Flow features to classify</a:t>
-            </a:r>
-          </a:p>
-        </p:txBody>
-      </p:sp>
-      <p:sp>
-        <p:nvSpPr>
-          <p:cNvPr id="10" name="Right Arrow 9"/>
+              <a:t>Unlabelled flow to classify</a:t>
+            </a:r>
+          </a:p>
+        </p:txBody>
+      </p:sp>
+      <p:sp>
+        <p:nvSpPr>
+          <p:cNvPr id="11" name="Right Arrow 10"/>
           <p:cNvSpPr/>
           <p:nvPr/>
         </p:nvSpPr>
         <p:spPr>
           <a:xfrm>
-            <a:off x="3721608" y="2167128"/>
+            <a:off x="3721608" y="2779776"/>
             <a:ext cx="429768" cy="292608"/>
           </a:xfrm>
           <a:prstGeom prst="rightArrow">
@@ -5306,13 +5613,13 @@
       </p:sp>
       <p:sp>
         <p:nvSpPr>
-          <p:cNvPr id="11" name="Right Arrow 10"/>
+          <p:cNvPr id="12" name="Right Arrow 11"/>
           <p:cNvSpPr/>
           <p:nvPr/>
         </p:nvSpPr>
         <p:spPr>
           <a:xfrm>
-            <a:off x="3721608" y="3310128"/>
+            <a:off x="3721608" y="3794760"/>
             <a:ext cx="429768" cy="292608"/>
           </a:xfrm>
           <a:prstGeom prst="rightArrow">
@@ -5349,13 +5656,13 @@
       </p:sp>
       <p:sp>
         <p:nvSpPr>
-          <p:cNvPr id="12" name="Rectangle 11"/>
+          <p:cNvPr id="13" name="Rectangle 12"/>
           <p:cNvSpPr/>
           <p:nvPr/>
         </p:nvSpPr>
         <p:spPr>
           <a:xfrm>
-            <a:off x="4389120" y="2075688"/>
+            <a:off x="4389120" y="2834640"/>
             <a:ext cx="3246120" cy="1335024"/>
           </a:xfrm>
           <a:prstGeom prst="rect">
@@ -5392,13 +5699,13 @@
       </p:sp>
       <p:sp>
         <p:nvSpPr>
-          <p:cNvPr id="13" name="TextBox 12"/>
+          <p:cNvPr id="14" name="TextBox 13"/>
           <p:cNvSpPr txBox="1"/>
           <p:nvPr/>
         </p:nvSpPr>
         <p:spPr>
           <a:xfrm>
-            <a:off x="4572000" y="2322576"/>
+            <a:off x="4572000" y="3063240"/>
             <a:ext cx="2880360" cy="399013"/>
           </a:xfrm>
           <a:prstGeom prst="rect">
@@ -5412,7 +5719,7 @@
           </a:bodyPr>
           <a:lstStyle/>
           <a:p>
-            <a:pPr>
+            <a:pPr algn="l">
               <a:lnSpc>
                 <a:spcPct val="114000"/>
               </a:lnSpc>
@@ -5439,13 +5746,13 @@
       </p:sp>
       <p:sp>
         <p:nvSpPr>
-          <p:cNvPr id="14" name="TextBox 13"/>
+          <p:cNvPr id="15" name="TextBox 14"/>
           <p:cNvSpPr txBox="1"/>
           <p:nvPr/>
         </p:nvSpPr>
         <p:spPr>
           <a:xfrm>
-            <a:off x="4572000" y="2889504"/>
+            <a:off x="4572000" y="3639312"/>
             <a:ext cx="2880360" cy="276240"/>
           </a:xfrm>
           <a:prstGeom prst="rect">
@@ -5459,7 +5766,7 @@
           </a:bodyPr>
           <a:lstStyle/>
           <a:p>
-            <a:pPr>
+            <a:pPr algn="l">
               <a:lnSpc>
                 <a:spcPct val="114000"/>
               </a:lnSpc>
@@ -5486,13 +5793,13 @@
       </p:sp>
       <p:sp>
         <p:nvSpPr>
-          <p:cNvPr id="15" name="Right Arrow 14"/>
+          <p:cNvPr id="16" name="Right Arrow 15"/>
           <p:cNvSpPr/>
           <p:nvPr/>
         </p:nvSpPr>
         <p:spPr>
           <a:xfrm>
-            <a:off x="7836408" y="2679192"/>
+            <a:off x="7836408" y="3346704"/>
             <a:ext cx="429768" cy="292608"/>
           </a:xfrm>
           <a:prstGeom prst="rightArrow">
@@ -5529,13 +5836,13 @@
       </p:sp>
       <p:sp>
         <p:nvSpPr>
-          <p:cNvPr id="16" name="Rectangle 15"/>
+          <p:cNvPr id="17" name="Rectangle 16"/>
           <p:cNvSpPr/>
           <p:nvPr/>
         </p:nvSpPr>
         <p:spPr>
           <a:xfrm>
-            <a:off x="8503920" y="2075688"/>
+            <a:off x="8503920" y="2834640"/>
             <a:ext cx="3090672" cy="1335024"/>
           </a:xfrm>
           <a:prstGeom prst="rect">
@@ -5572,13 +5879,13 @@
       </p:sp>
       <p:sp>
         <p:nvSpPr>
-          <p:cNvPr id="17" name="TextBox 16"/>
+          <p:cNvPr id="18" name="TextBox 17"/>
           <p:cNvSpPr txBox="1"/>
           <p:nvPr/>
         </p:nvSpPr>
         <p:spPr>
           <a:xfrm>
-            <a:off x="8686800" y="2350008"/>
+            <a:off x="8686800" y="3108960"/>
             <a:ext cx="2715768" cy="322280"/>
           </a:xfrm>
           <a:prstGeom prst="rect">
@@ -5592,7 +5899,7 @@
           </a:bodyPr>
           <a:lstStyle/>
           <a:p>
-            <a:pPr>
+            <a:pPr algn="l">
               <a:lnSpc>
                 <a:spcPct val="114000"/>
               </a:lnSpc>
@@ -5619,13 +5926,13 @@
       </p:sp>
       <p:sp>
         <p:nvSpPr>
-          <p:cNvPr id="18" name="TextBox 17"/>
+          <p:cNvPr id="19" name="TextBox 18"/>
           <p:cNvSpPr txBox="1"/>
           <p:nvPr/>
         </p:nvSpPr>
         <p:spPr>
           <a:xfrm>
-            <a:off x="8686800" y="2898648"/>
+            <a:off x="8686800" y="3657600"/>
             <a:ext cx="2715768" cy="274320"/>
           </a:xfrm>
           <a:prstGeom prst="rect">
@@ -5639,7 +5946,7 @@
           </a:bodyPr>
           <a:lstStyle/>
           <a:p>
-            <a:pPr>
+            <a:pPr algn="l">
               <a:lnSpc>
                 <a:spcPct val="114000"/>
               </a:lnSpc>
@@ -5659,21 +5966,21 @@
                 <a:ea typeface="Pretendard"/>
                 <a:cs typeface="Pretendard"/>
               </a:rPr>
-              <a:t>Benign · Attack A · Attack B …</a:t>
-            </a:r>
-          </a:p>
-        </p:txBody>
-      </p:sp>
-      <p:sp>
-        <p:nvSpPr>
-          <p:cNvPr id="19" name="TextBox 18"/>
+              <a:t>Benign · Attack A · Attack C …</a:t>
+            </a:r>
+          </a:p>
+        </p:txBody>
+      </p:sp>
+      <p:sp>
+        <p:nvSpPr>
+          <p:cNvPr id="20" name="TextBox 19"/>
           <p:cNvSpPr txBox="1"/>
           <p:nvPr/>
         </p:nvSpPr>
         <p:spPr>
           <a:xfrm>
-            <a:off x="594360" y="4242816"/>
-            <a:ext cx="2404872" cy="320040"/>
+            <a:off x="594360" y="4690872"/>
+            <a:ext cx="2423160" cy="320040"/>
           </a:xfrm>
           <a:prstGeom prst="rect">
             <a:avLst/>
@@ -5686,7 +5993,7 @@
           </a:bodyPr>
           <a:lstStyle/>
           <a:p>
-            <a:pPr>
+            <a:pPr algn="l">
               <a:lnSpc>
                 <a:spcPct val="114000"/>
               </a:lnSpc>
@@ -5713,13 +6020,13 @@
       </p:sp>
       <p:sp>
         <p:nvSpPr>
-          <p:cNvPr id="20" name="TextBox 19"/>
+          <p:cNvPr id="21" name="TextBox 20"/>
           <p:cNvSpPr txBox="1"/>
           <p:nvPr/>
         </p:nvSpPr>
         <p:spPr>
           <a:xfrm>
-            <a:off x="3154680" y="4242816"/>
+            <a:off x="3154680" y="4690872"/>
             <a:ext cx="8275320" cy="329184"/>
           </a:xfrm>
           <a:prstGeom prst="rect">
@@ -5733,7 +6040,7 @@
           </a:bodyPr>
           <a:lstStyle/>
           <a:p>
-            <a:pPr>
+            <a:pPr algn="l">
               <a:lnSpc>
                 <a:spcPct val="114000"/>
               </a:lnSpc>
@@ -5753,20 +6060,20 @@
                 <a:ea typeface="Pretendard"/>
                 <a:cs typeface="Pretendard"/>
               </a:rPr>
-              <a:t>Predict the query using its context, with no weight optimization</a:t>
-            </a:r>
-          </a:p>
-        </p:txBody>
-      </p:sp>
-      <p:sp>
-        <p:nvSpPr>
-          <p:cNvPr id="21" name="TextBox 20"/>
+              <a:t>Prediction conditioned on the supplied context; weights unchanged</a:t>
+            </a:r>
+          </a:p>
+        </p:txBody>
+      </p:sp>
+      <p:sp>
+        <p:nvSpPr>
+          <p:cNvPr id="22" name="TextBox 21"/>
           <p:cNvSpPr txBox="1"/>
           <p:nvPr/>
         </p:nvSpPr>
         <p:spPr>
           <a:xfrm>
-            <a:off x="594360" y="4892040"/>
+            <a:off x="594360" y="5340096"/>
             <a:ext cx="2194560" cy="320040"/>
           </a:xfrm>
           <a:prstGeom prst="rect">
@@ -5780,7 +6087,7 @@
           </a:bodyPr>
           <a:lstStyle/>
           <a:p>
-            <a:pPr>
+            <a:pPr algn="l">
               <a:lnSpc>
                 <a:spcPct val="114000"/>
               </a:lnSpc>
@@ -5807,14 +6114,14 @@
       </p:sp>
       <p:sp>
         <p:nvSpPr>
-          <p:cNvPr id="22" name="TextBox 21"/>
+          <p:cNvPr id="23" name="TextBox 22"/>
           <p:cNvSpPr txBox="1"/>
           <p:nvPr/>
         </p:nvSpPr>
         <p:spPr>
           <a:xfrm>
-            <a:off x="3154680" y="4892040"/>
-            <a:ext cx="8275320" cy="583173"/>
+            <a:off x="3154680" y="5340096"/>
+            <a:ext cx="8275320" cy="603504"/>
           </a:xfrm>
           <a:prstGeom prst="rect">
             <a:avLst/>
@@ -5827,19 +6134,19 @@
           </a:bodyPr>
           <a:lstStyle/>
           <a:p>
-            <a:pPr>
-              <a:lnSpc>
-                <a:spcPct val="114000"/>
-              </a:lnSpc>
-              <a:spcBef>
-                <a:spcPts val="0"/>
-              </a:spcBef>
-              <a:spcAft>
-                <a:spcPts val="0"/>
-              </a:spcAft>
-            </a:pPr>
-            <a:r>
-              <a:rPr sz="1900" b="0" lang="en-US">
+            <a:pPr algn="l">
+              <a:lnSpc>
+                <a:spcPct val="114000"/>
+              </a:lnSpc>
+              <a:spcBef>
+                <a:spcPts val="0"/>
+              </a:spcBef>
+              <a:spcAft>
+                <a:spcPts val="0"/>
+              </a:spcAft>
+            </a:pPr>
+            <a:r>
+              <a:rPr sz="1800" b="0" lang="en-US">
                 <a:solidFill>
                   <a:srgbClr val="20262E"/>
                 </a:solidFill>
@@ -5847,23 +6154,23 @@
                 <a:ea typeface="Pretendard"/>
                 <a:cs typeface="Pretendard"/>
               </a:rPr>
-              <a:t>Split IDS examples into context/query; update weights</a:t>
-            </a:r>
-          </a:p>
-          <a:p>
-            <a:pPr>
-              <a:lnSpc>
-                <a:spcPct val="114000"/>
-              </a:lnSpc>
-              <a:spcBef>
-                <a:spcPts val="0"/>
-              </a:spcBef>
-              <a:spcAft>
-                <a:spcPts val="0"/>
-              </a:spcAft>
-            </a:pPr>
-            <a:r>
-              <a:rPr sz="1900" b="0" lang="en-US">
+              <a:t>Split IDS examples into context/query and backpropagate query loss</a:t>
+            </a:r>
+          </a:p>
+          <a:p>
+            <a:pPr algn="l">
+              <a:lnSpc>
+                <a:spcPct val="114000"/>
+              </a:lnSpc>
+              <a:spcBef>
+                <a:spcPts val="0"/>
+              </a:spcBef>
+              <a:spcAft>
+                <a:spcPts val="0"/>
+              </a:spcAft>
+            </a:pPr>
+            <a:r>
+              <a:rPr sz="1800" b="0" lang="en-US">
                 <a:solidFill>
                   <a:srgbClr val="20262E"/>
                 </a:solidFill>
@@ -5871,27 +6178,27 @@
                 <a:ea typeface="Pretendard"/>
                 <a:cs typeface="Pretendard"/>
               </a:rPr>
-              <a:t>by backpropagating the labelled-query loss</a:t>
-            </a:r>
-          </a:p>
-        </p:txBody>
-      </p:sp>
-      <p:sp>
-        <p:nvSpPr>
-          <p:cNvPr id="23" name="Rectangle 22"/>
+              <a:t>Additional weight training; not performed in this comparison</a:t>
+            </a:r>
+          </a:p>
+        </p:txBody>
+      </p:sp>
+      <p:sp>
+        <p:nvSpPr>
+          <p:cNvPr id="24" name="Rectangle 23"/>
           <p:cNvSpPr/>
           <p:nvPr/>
         </p:nvSpPr>
         <p:spPr>
           <a:xfrm>
-            <a:off x="566928" y="5751576"/>
-            <a:ext cx="11018520" cy="557784"/>
+            <a:off x="0" y="6446520"/>
+            <a:ext cx="12191999" cy="411480"/>
           </a:xfrm>
           <a:prstGeom prst="rect">
             <a:avLst/>
           </a:prstGeom>
           <a:solidFill>
-            <a:srgbClr val="F1F5F9"/>
+            <a:srgbClr val="00306C"/>
           </a:solidFill>
           <a:ln>
             <a:noFill/>
@@ -5921,14 +6228,14 @@
       </p:sp>
       <p:sp>
         <p:nvSpPr>
-          <p:cNvPr id="24" name="TextBox 23"/>
+          <p:cNvPr id="25" name="TextBox 24"/>
           <p:cNvSpPr txBox="1"/>
           <p:nvPr/>
         </p:nvSpPr>
         <p:spPr>
           <a:xfrm>
-            <a:off x="768096" y="5888736"/>
-            <a:ext cx="10616184" cy="291586"/>
+            <a:off x="566928" y="6528816"/>
+            <a:ext cx="9738360" cy="214853"/>
           </a:xfrm>
           <a:prstGeom prst="rect">
             <a:avLst/>
@@ -5941,27 +6248,74 @@
           </a:bodyPr>
           <a:lstStyle/>
           <a:p>
-            <a:pPr>
-              <a:lnSpc>
-                <a:spcPct val="114000"/>
-              </a:lnSpc>
-              <a:spcBef>
-                <a:spcPts val="0"/>
-              </a:spcBef>
-              <a:spcAft>
-                <a:spcPts val="0"/>
-              </a:spcAft>
-            </a:pPr>
-            <a:r>
-              <a:rPr sz="1900" b="1" lang="en-US">
-                <a:solidFill>
-                  <a:srgbClr val="00306C"/>
-                </a:solidFill>
-                <a:latin typeface="Pretendard"/>
-                <a:ea typeface="Pretendard"/>
-                <a:cs typeface="Pretendard"/>
-              </a:rPr>
-              <a:t>Current comparison · Original pretrained weights, with no IDS fine-tuning</a:t>
+            <a:pPr algn="l">
+              <a:lnSpc>
+                <a:spcPct val="114000"/>
+              </a:lnSpc>
+              <a:spcBef>
+                <a:spcPts val="0"/>
+              </a:spcBef>
+              <a:spcAft>
+                <a:spcPts val="0"/>
+              </a:spcAft>
+            </a:pPr>
+            <a:r>
+              <a:rPr sz="1400" b="0" lang="en-US">
+                <a:solidFill>
+                  <a:srgbClr val="FFFFFF"/>
+                </a:solidFill>
+                <a:latin typeface="Pretendard"/>
+                <a:ea typeface="Pretendard"/>
+                <a:cs typeface="Pretendard"/>
+              </a:rPr>
+              <a:t>Context supplies the current classification task even when pretrained weights are fixed</a:t>
+            </a:r>
+          </a:p>
+        </p:txBody>
+      </p:sp>
+      <p:sp>
+        <p:nvSpPr>
+          <p:cNvPr id="26" name="TextBox 25"/>
+          <p:cNvSpPr txBox="1"/>
+          <p:nvPr/>
+        </p:nvSpPr>
+        <p:spPr>
+          <a:xfrm>
+            <a:off x="10469880" y="6537960"/>
+            <a:ext cx="1143000" cy="201168"/>
+          </a:xfrm>
+          <a:prstGeom prst="rect">
+            <a:avLst/>
+          </a:prstGeom>
+          <a:noFill/>
+        </p:spPr>
+        <p:txBody>
+          <a:bodyPr wrap="none" anchor="t" lIns="0" rIns="0" tIns="0" bIns="0">
+            <a:noAutofit/>
+          </a:bodyPr>
+          <a:lstStyle/>
+          <a:p>
+            <a:pPr algn="r">
+              <a:lnSpc>
+                <a:spcPct val="114000"/>
+              </a:lnSpc>
+              <a:spcBef>
+                <a:spcPts val="0"/>
+              </a:spcBef>
+              <a:spcAft>
+                <a:spcPts val="0"/>
+              </a:spcAft>
+            </a:pPr>
+            <a:r>
+              <a:rPr sz="1200" b="0" lang="en-US">
+                <a:solidFill>
+                  <a:srgbClr val="FFFFFF"/>
+                </a:solidFill>
+                <a:latin typeface="Pretendard"/>
+                <a:ea typeface="Pretendard"/>
+                <a:cs typeface="Pretendard"/>
+              </a:rPr>
+              <a:t>02   2</a:t>
             </a:r>
           </a:p>
         </p:txBody>
@@ -6006,7 +6360,7 @@
           </a:bodyPr>
           <a:lstStyle/>
           <a:p>
-            <a:pPr>
+            <a:pPr algn="l">
               <a:lnSpc>
                 <a:spcPct val="114000"/>
               </a:lnSpc>
@@ -6078,7 +6432,7 @@
           </a:bodyPr>
           <a:lstStyle/>
           <a:p>
-            <a:pPr>
+            <a:pPr algn="l">
               <a:lnSpc>
                 <a:spcPct val="114000"/>
               </a:lnSpc>
@@ -6125,7 +6479,7 @@
           </a:bodyPr>
           <a:lstStyle/>
           <a:p>
-            <a:pPr>
+            <a:pPr algn="l">
               <a:lnSpc>
                 <a:spcPct val="114000"/>
               </a:lnSpc>
@@ -6145,11 +6499,11 @@
                 <a:ea typeface="Pretendard"/>
                 <a:cs typeface="Pretendard"/>
               </a:rPr>
-              <a:t>Convert each value, such as packet length, into a vector</a:t>
-            </a:r>
-          </a:p>
-          <a:p>
-            <a:pPr>
+              <a:t>Encode each value, such as packet length</a:t>
+            </a:r>
+          </a:p>
+          <a:p>
+            <a:pPr algn="l">
               <a:lnSpc>
                 <a:spcPct val="114000"/>
               </a:lnSpc>
@@ -6169,7 +6523,7 @@
                 <a:ea typeface="Pretendard"/>
                 <a:cs typeface="Pretendard"/>
               </a:rPr>
-              <a:t>Include an indicator for missing values</a:t>
+              <a:t>Include missing-value indicators</a:t>
             </a:r>
           </a:p>
         </p:txBody>
@@ -6196,7 +6550,7 @@
           </a:bodyPr>
           <a:lstStyle/>
           <a:p>
-            <a:pPr>
+            <a:pPr algn="l">
               <a:lnSpc>
                 <a:spcPct val="114000"/>
               </a:lnSpc>
@@ -6243,7 +6597,7 @@
           </a:bodyPr>
           <a:lstStyle/>
           <a:p>
-            <a:pPr>
+            <a:pPr algn="l">
               <a:lnSpc>
                 <a:spcPct val="114000"/>
               </a:lnSpc>
@@ -6263,11 +6617,11 @@
                 <a:ea typeface="Pretendard"/>
                 <a:cs typeface="Pretendard"/>
               </a:rPr>
-              <a:t>Summarize each feature across multiple flows</a:t>
-            </a:r>
-          </a:p>
-          <a:p>
-            <a:pPr>
+              <a:t>Summarize each feature across flows</a:t>
+            </a:r>
+          </a:p>
+          <a:p>
+            <a:pPr algn="l">
               <a:lnSpc>
                 <a:spcPct val="114000"/>
               </a:lnSpc>
@@ -6287,7 +6641,7 @@
                 <a:ea typeface="Pretendard"/>
                 <a:cs typeface="Pretendard"/>
               </a:rPr>
-              <a:t>Use the labels supplied with the context</a:t>
+              <a:t>Use the labels in the context</a:t>
             </a:r>
           </a:p>
         </p:txBody>
@@ -6314,7 +6668,7 @@
           </a:bodyPr>
           <a:lstStyle/>
           <a:p>
-            <a:pPr>
+            <a:pPr algn="l">
               <a:lnSpc>
                 <a:spcPct val="114000"/>
               </a:lnSpc>
@@ -6361,7 +6715,7 @@
           </a:bodyPr>
           <a:lstStyle/>
           <a:p>
-            <a:pPr>
+            <a:pPr algn="l">
               <a:lnSpc>
                 <a:spcPct val="114000"/>
               </a:lnSpc>
@@ -6381,11 +6735,11 @@
                 <a:ea typeface="Pretendard"/>
                 <a:cs typeface="Pretendard"/>
               </a:rPr>
-              <a:t>Combine a flow’s features into one representation</a:t>
-            </a:r>
-          </a:p>
-          <a:p>
-            <a:pPr>
+              <a:t>Combine a flow’s features into a representation</a:t>
+            </a:r>
+          </a:p>
+          <a:p>
+            <a:pPr algn="l">
               <a:lnSpc>
                 <a:spcPct val="114000"/>
               </a:lnSpc>
@@ -6406,6 +6760,143 @@
                 <a:cs typeface="Pretendard"/>
               </a:rPr>
               <a:t>Prepare it for comparison with other flows</a:t>
+            </a:r>
+          </a:p>
+        </p:txBody>
+      </p:sp>
+      <p:sp>
+        <p:nvSpPr>
+          <p:cNvPr id="10" name="Rectangle 9"/>
+          <p:cNvSpPr/>
+          <p:nvPr/>
+        </p:nvSpPr>
+        <p:spPr>
+          <a:xfrm>
+            <a:off x="0" y="6446520"/>
+            <a:ext cx="12191999" cy="411480"/>
+          </a:xfrm>
+          <a:prstGeom prst="rect">
+            <a:avLst/>
+          </a:prstGeom>
+          <a:solidFill>
+            <a:srgbClr val="00306C"/>
+          </a:solidFill>
+          <a:ln>
+            <a:noFill/>
+          </a:ln>
+        </p:spPr>
+        <p:style>
+          <a:lnRef idx="1">
+            <a:schemeClr val="accent1"/>
+          </a:lnRef>
+          <a:fillRef idx="3">
+            <a:schemeClr val="accent1"/>
+          </a:fillRef>
+          <a:effectRef idx="2">
+            <a:schemeClr val="accent1"/>
+          </a:effectRef>
+          <a:fontRef idx="minor">
+            <a:schemeClr val="lt1"/>
+          </a:fontRef>
+        </p:style>
+        <p:txBody>
+          <a:bodyPr rtlCol="0" anchor="ctr"/>
+          <a:lstStyle/>
+          <a:p>
+            <a:pPr algn="ctr"/>
+          </a:p>
+        </p:txBody>
+      </p:sp>
+      <p:sp>
+        <p:nvSpPr>
+          <p:cNvPr id="11" name="TextBox 10"/>
+          <p:cNvSpPr txBox="1"/>
+          <p:nvPr/>
+        </p:nvSpPr>
+        <p:spPr>
+          <a:xfrm>
+            <a:off x="566928" y="6528816"/>
+            <a:ext cx="9738360" cy="210312"/>
+          </a:xfrm>
+          <a:prstGeom prst="rect">
+            <a:avLst/>
+          </a:prstGeom>
+          <a:noFill/>
+        </p:spPr>
+        <p:txBody>
+          <a:bodyPr wrap="none" anchor="t" lIns="0" rIns="0" tIns="0" bIns="0">
+            <a:noAutofit/>
+          </a:bodyPr>
+          <a:lstStyle/>
+          <a:p>
+            <a:pPr algn="l">
+              <a:lnSpc>
+                <a:spcPct val="114000"/>
+              </a:lnSpc>
+              <a:spcBef>
+                <a:spcPts val="0"/>
+              </a:spcBef>
+              <a:spcAft>
+                <a:spcPts val="0"/>
+              </a:spcAft>
+            </a:pPr>
+            <a:r>
+              <a:rPr sz="1400" b="0" lang="en-US">
+                <a:solidFill>
+                  <a:srgbClr val="FFFFFF"/>
+                </a:solidFill>
+                <a:latin typeface="Pretendard"/>
+                <a:ea typeface="Pretendard"/>
+                <a:cs typeface="Pretendard"/>
+              </a:rPr>
+              <a:t/>
+            </a:r>
+          </a:p>
+        </p:txBody>
+      </p:sp>
+      <p:sp>
+        <p:nvSpPr>
+          <p:cNvPr id="12" name="TextBox 11"/>
+          <p:cNvSpPr txBox="1"/>
+          <p:nvPr/>
+        </p:nvSpPr>
+        <p:spPr>
+          <a:xfrm>
+            <a:off x="10469880" y="6537960"/>
+            <a:ext cx="1143000" cy="201168"/>
+          </a:xfrm>
+          <a:prstGeom prst="rect">
+            <a:avLst/>
+          </a:prstGeom>
+          <a:noFill/>
+        </p:spPr>
+        <p:txBody>
+          <a:bodyPr wrap="none" anchor="t" lIns="0" rIns="0" tIns="0" bIns="0">
+            <a:noAutofit/>
+          </a:bodyPr>
+          <a:lstStyle/>
+          <a:p>
+            <a:pPr algn="r">
+              <a:lnSpc>
+                <a:spcPct val="114000"/>
+              </a:lnSpc>
+              <a:spcBef>
+                <a:spcPts val="0"/>
+              </a:spcBef>
+              <a:spcAft>
+                <a:spcPts val="0"/>
+              </a:spcAft>
+            </a:pPr>
+            <a:r>
+              <a:rPr sz="1200" b="0" lang="en-US">
+                <a:solidFill>
+                  <a:srgbClr val="FFFFFF"/>
+                </a:solidFill>
+                <a:latin typeface="Pretendard"/>
+                <a:ea typeface="Pretendard"/>
+                <a:cs typeface="Pretendard"/>
+              </a:rPr>
+              <a:t>02   3</a:t>
             </a:r>
           </a:p>
         </p:txBody>
@@ -6450,7 +6941,7 @@
           </a:bodyPr>
           <a:lstStyle/>
           <a:p>
-            <a:pPr>
+            <a:pPr algn="l">
               <a:lnSpc>
                 <a:spcPct val="114000"/>
               </a:lnSpc>
@@ -6470,7 +6961,7 @@
                 <a:ea typeface="Pretendard"/>
                 <a:cs typeface="Pretendard"/>
               </a:rPr>
-              <a:t>v3 architecture · Context-based prediction</a:t>
+              <a:t>v3 architecture · Context and update computation</a:t>
             </a:r>
           </a:p>
         </p:txBody>
@@ -6522,7 +7013,7 @@
           </a:bodyPr>
           <a:lstStyle/>
           <a:p>
-            <a:pPr>
+            <a:pPr algn="l">
               <a:lnSpc>
                 <a:spcPct val="114000"/>
               </a:lnSpc>
@@ -6569,7 +7060,7 @@
           </a:bodyPr>
           <a:lstStyle/>
           <a:p>
-            <a:pPr>
+            <a:pPr algn="l">
               <a:lnSpc>
                 <a:spcPct val="114000"/>
               </a:lnSpc>
@@ -6589,11 +7080,11 @@
                 <a:ea typeface="Pretendard"/>
                 <a:cs typeface="Pretendard"/>
               </a:rPr>
-              <a:t>Compare the query with labelled context examples</a:t>
-            </a:r>
-          </a:p>
-          <a:p>
-            <a:pPr>
+              <a:t>Compare the query with context examples</a:t>
+            </a:r>
+          </a:p>
+          <a:p>
+            <a:pPr algn="l">
               <a:lnSpc>
                 <a:spcPct val="114000"/>
               </a:lnSpc>
@@ -6613,7 +7104,7 @@
                 <a:ea typeface="Pretendard"/>
                 <a:cs typeface="Pretendard"/>
               </a:rPr>
-              <a:t>Weight their relevance through attention</a:t>
+              <a:t>Use attention to weight their relevance</a:t>
             </a:r>
           </a:p>
         </p:txBody>
@@ -6640,7 +7131,7 @@
           </a:bodyPr>
           <a:lstStyle/>
           <a:p>
-            <a:pPr>
+            <a:pPr algn="l">
               <a:lnSpc>
                 <a:spcPct val="114000"/>
               </a:lnSpc>
@@ -6687,7 +7178,7 @@
           </a:bodyPr>
           <a:lstStyle/>
           <a:p>
-            <a:pPr>
+            <a:pPr algn="l">
               <a:lnSpc>
                 <a:spcPct val="114000"/>
               </a:lnSpc>
@@ -6707,11 +7198,11 @@
                 <a:ea typeface="Pretendard"/>
                 <a:cs typeface="Pretendard"/>
               </a:rPr>
-              <a:t>Combine context labels with attention weights</a:t>
-            </a:r>
-          </a:p>
-          <a:p>
-            <a:pPr>
+              <a:t>Weight and combine the context labels</a:t>
+            </a:r>
+          </a:p>
+          <a:p>
+            <a:pPr algn="l">
               <a:lnSpc>
                 <a:spcPct val="114000"/>
               </a:lnSpc>
@@ -6731,7 +7222,7 @@
                 <a:ea typeface="Pretendard"/>
                 <a:cs typeface="Pretendard"/>
               </a:rPr>
-              <a:t>Keep examples of both existing and new classes</a:t>
+              <a:t>Retain benign, existing and new attack examples</a:t>
             </a:r>
           </a:p>
         </p:txBody>
@@ -6801,7 +7292,7 @@
           </a:bodyPr>
           <a:lstStyle/>
           <a:p>
-            <a:pPr>
+            <a:pPr algn="l">
               <a:lnSpc>
                 <a:spcPct val="114000"/>
               </a:lnSpc>
@@ -6821,7 +7312,7 @@
                 <a:ea typeface="Pretendard"/>
                 <a:cs typeface="Pretendard"/>
               </a:rPr>
-              <a:t>Context updates also require computation</a:t>
+              <a:t>Update computation without weight training</a:t>
             </a:r>
           </a:p>
         </p:txBody>
@@ -6848,7 +7339,7 @@
           </a:bodyPr>
           <a:lstStyle/>
           <a:p>
-            <a:pPr>
+            <a:pPr algn="l">
               <a:lnSpc>
                 <a:spcPct val="114000"/>
               </a:lnSpc>
@@ -6868,11 +7359,11 @@
                 <a:ea typeface="Pretendard"/>
                 <a:cs typeface="Pretendard"/>
               </a:rPr>
-              <a:t>Preprocessing · Representations · Cache preparation</a:t>
-            </a:r>
-          </a:p>
-          <a:p>
-            <a:pPr>
+              <a:t>Context preprocessing · Representations · Cache</a:t>
+            </a:r>
+          </a:p>
+          <a:p>
+            <a:pPr algn="l">
               <a:lnSpc>
                 <a:spcPct val="114000"/>
               </a:lnSpc>
@@ -6892,7 +7383,144 @@
                 <a:ea typeface="Pretendard"/>
                 <a:cs typeface="Pretendard"/>
               </a:rPr>
-              <a:t>Measure update time separately from weight training</a:t>
+              <a:t>Measure the cost against XGB refitting</a:t>
+            </a:r>
+          </a:p>
+        </p:txBody>
+      </p:sp>
+      <p:sp>
+        <p:nvSpPr>
+          <p:cNvPr id="11" name="Rectangle 10"/>
+          <p:cNvSpPr/>
+          <p:nvPr/>
+        </p:nvSpPr>
+        <p:spPr>
+          <a:xfrm>
+            <a:off x="0" y="6446520"/>
+            <a:ext cx="12191999" cy="411480"/>
+          </a:xfrm>
+          <a:prstGeom prst="rect">
+            <a:avLst/>
+          </a:prstGeom>
+          <a:solidFill>
+            <a:srgbClr val="00306C"/>
+          </a:solidFill>
+          <a:ln>
+            <a:noFill/>
+          </a:ln>
+        </p:spPr>
+        <p:style>
+          <a:lnRef idx="1">
+            <a:schemeClr val="accent1"/>
+          </a:lnRef>
+          <a:fillRef idx="3">
+            <a:schemeClr val="accent1"/>
+          </a:fillRef>
+          <a:effectRef idx="2">
+            <a:schemeClr val="accent1"/>
+          </a:effectRef>
+          <a:fontRef idx="minor">
+            <a:schemeClr val="lt1"/>
+          </a:fontRef>
+        </p:style>
+        <p:txBody>
+          <a:bodyPr rtlCol="0" anchor="ctr"/>
+          <a:lstStyle/>
+          <a:p>
+            <a:pPr algn="ctr"/>
+          </a:p>
+        </p:txBody>
+      </p:sp>
+      <p:sp>
+        <p:nvSpPr>
+          <p:cNvPr id="12" name="TextBox 11"/>
+          <p:cNvSpPr txBox="1"/>
+          <p:nvPr/>
+        </p:nvSpPr>
+        <p:spPr>
+          <a:xfrm>
+            <a:off x="566928" y="6528816"/>
+            <a:ext cx="9738360" cy="214853"/>
+          </a:xfrm>
+          <a:prstGeom prst="rect">
+            <a:avLst/>
+          </a:prstGeom>
+          <a:noFill/>
+        </p:spPr>
+        <p:txBody>
+          <a:bodyPr wrap="none" anchor="t" lIns="0" rIns="0" tIns="0" bIns="0">
+            <a:noAutofit/>
+          </a:bodyPr>
+          <a:lstStyle/>
+          <a:p>
+            <a:pPr algn="l">
+              <a:lnSpc>
+                <a:spcPct val="114000"/>
+              </a:lnSpc>
+              <a:spcBef>
+                <a:spcPts val="0"/>
+              </a:spcBef>
+              <a:spcAft>
+                <a:spcPts val="0"/>
+              </a:spcAft>
+            </a:pPr>
+            <a:r>
+              <a:rPr sz="1400" b="0" lang="en-US">
+                <a:solidFill>
+                  <a:srgbClr val="FFFFFF"/>
+                </a:solidFill>
+                <a:latin typeface="Pretendard"/>
+                <a:ea typeface="Pretendard"/>
+                <a:cs typeface="Pretendard"/>
+              </a:rPr>
+              <a:t>No additional weight training does not by itself establish low update cost</a:t>
+            </a:r>
+          </a:p>
+        </p:txBody>
+      </p:sp>
+      <p:sp>
+        <p:nvSpPr>
+          <p:cNvPr id="13" name="TextBox 12"/>
+          <p:cNvSpPr txBox="1"/>
+          <p:nvPr/>
+        </p:nvSpPr>
+        <p:spPr>
+          <a:xfrm>
+            <a:off x="10469880" y="6537960"/>
+            <a:ext cx="1143000" cy="201168"/>
+          </a:xfrm>
+          <a:prstGeom prst="rect">
+            <a:avLst/>
+          </a:prstGeom>
+          <a:noFill/>
+        </p:spPr>
+        <p:txBody>
+          <a:bodyPr wrap="none" anchor="t" lIns="0" rIns="0" tIns="0" bIns="0">
+            <a:noAutofit/>
+          </a:bodyPr>
+          <a:lstStyle/>
+          <a:p>
+            <a:pPr algn="r">
+              <a:lnSpc>
+                <a:spcPct val="114000"/>
+              </a:lnSpc>
+              <a:spcBef>
+                <a:spcPts val="0"/>
+              </a:spcBef>
+              <a:spcAft>
+                <a:spcPts val="0"/>
+              </a:spcAft>
+            </a:pPr>
+            <a:r>
+              <a:rPr sz="1200" b="0" lang="en-US">
+                <a:solidFill>
+                  <a:srgbClr val="FFFFFF"/>
+                </a:solidFill>
+                <a:latin typeface="Pretendard"/>
+                <a:ea typeface="Pretendard"/>
+                <a:cs typeface="Pretendard"/>
+              </a:rPr>
+              <a:t>02   4</a:t>
             </a:r>
           </a:p>
         </p:txBody>
@@ -6915,30 +7543,1193 @@
         <p:nvPr/>
       </p:nvGrpSpPr>
       <p:grpSpPr/>
-      <p:pic>
-        <p:nvPicPr>
-          <p:cNvPr id="2" name="Picture 1" descr="original-4.png"/>
-          <p:cNvPicPr>
-            <a:picLocks noChangeAspect="1"/>
-          </p:cNvPicPr>
-          <p:nvPr/>
-        </p:nvPicPr>
-        <p:blipFill>
-          <a:blip r:embed="rId2"/>
-          <a:stretch>
-            <a:fillRect/>
-          </a:stretch>
-        </p:blipFill>
-        <p:spPr>
-          <a:xfrm>
-            <a:off x="0" y="0"/>
-            <a:ext cx="12191999" cy="6858000"/>
-          </a:xfrm>
-          <a:prstGeom prst="rect">
-            <a:avLst/>
-          </a:prstGeom>
-        </p:spPr>
-      </p:pic>
+      <p:sp>
+        <p:nvSpPr>
+          <p:cNvPr id="2" name="TextBox 1"/>
+          <p:cNvSpPr txBox="1"/>
+          <p:nvPr/>
+        </p:nvSpPr>
+        <p:spPr>
+          <a:xfrm>
+            <a:off x="548640" y="301752"/>
+            <a:ext cx="11064240" cy="521207"/>
+          </a:xfrm>
+          <a:prstGeom prst="rect">
+            <a:avLst/>
+          </a:prstGeom>
+          <a:noFill/>
+        </p:spPr>
+        <p:txBody>
+          <a:bodyPr wrap="none" anchor="t" lIns="0" rIns="0" tIns="0" bIns="0">
+            <a:noAutofit/>
+          </a:bodyPr>
+          <a:lstStyle/>
+          <a:p>
+            <a:pPr algn="l">
+              <a:lnSpc>
+                <a:spcPct val="114000"/>
+              </a:lnSpc>
+              <a:spcBef>
+                <a:spcPts val="0"/>
+              </a:spcBef>
+              <a:spcAft>
+                <a:spcPts val="0"/>
+              </a:spcAft>
+            </a:pPr>
+            <a:r>
+              <a:rPr sz="3000" b="1" lang="en-US">
+                <a:solidFill>
+                  <a:srgbClr val="00306C"/>
+                </a:solidFill>
+                <a:latin typeface="Pretendard"/>
+                <a:ea typeface="Pretendard"/>
+                <a:cs typeface="Pretendard"/>
+              </a:rPr>
+              <a:t>Evaluation data · From benchmark rows to labelled examples</a:t>
+            </a:r>
+          </a:p>
+        </p:txBody>
+      </p:sp>
+      <p:sp>
+        <p:nvSpPr>
+          <p:cNvPr id="3" name="TextBox 2"/>
+          <p:cNvSpPr txBox="1"/>
+          <p:nvPr/>
+        </p:nvSpPr>
+        <p:spPr>
+          <a:xfrm>
+            <a:off x="566928" y="1005840"/>
+            <a:ext cx="10972800" cy="613867"/>
+          </a:xfrm>
+          <a:prstGeom prst="rect">
+            <a:avLst/>
+          </a:prstGeom>
+          <a:noFill/>
+        </p:spPr>
+        <p:txBody>
+          <a:bodyPr wrap="none" anchor="t" lIns="0" rIns="0" tIns="0" bIns="0">
+            <a:noAutofit/>
+          </a:bodyPr>
+          <a:lstStyle/>
+          <a:p>
+            <a:pPr algn="l">
+              <a:lnSpc>
+                <a:spcPct val="114000"/>
+              </a:lnSpc>
+              <a:spcBef>
+                <a:spcPts val="0"/>
+              </a:spcBef>
+              <a:spcAft>
+                <a:spcPts val="0"/>
+              </a:spcAft>
+            </a:pPr>
+            <a:r>
+              <a:rPr sz="2000" b="0" lang="en-US">
+                <a:solidFill>
+                  <a:srgbClr val="20262E"/>
+                </a:solidFill>
+                <a:latin typeface="Pretendard"/>
+                <a:ea typeface="Pretendard"/>
+                <a:cs typeface="Pretendard"/>
+              </a:rPr>
+              <a:t>One row = features of a recorded network flow + its benign/attack label</a:t>
+            </a:r>
+          </a:p>
+          <a:p>
+            <a:pPr algn="l">
+              <a:lnSpc>
+                <a:spcPct val="114000"/>
+              </a:lnSpc>
+              <a:spcBef>
+                <a:spcPts val="0"/>
+              </a:spcBef>
+              <a:spcAft>
+                <a:spcPts val="0"/>
+              </a:spcAft>
+            </a:pPr>
+            <a:r>
+              <a:rPr sz="2000" b="0" lang="en-US">
+                <a:solidFill>
+                  <a:srgbClr val="20262E"/>
+                </a:solidFill>
+                <a:latin typeface="Pretendard"/>
+                <a:ea typeface="Pretendard"/>
+                <a:cs typeface="Pretendard"/>
+              </a:rPr>
+              <a:t>Clean and split each benchmark separately; select examples within that benchmark</a:t>
+            </a:r>
+          </a:p>
+        </p:txBody>
+      </p:sp>
+      <p:sp>
+        <p:nvSpPr>
+          <p:cNvPr id="4" name="Rectangle 3"/>
+          <p:cNvSpPr/>
+          <p:nvPr/>
+        </p:nvSpPr>
+        <p:spPr>
+          <a:xfrm>
+            <a:off x="566928" y="2066543"/>
+            <a:ext cx="1892807" cy="969264"/>
+          </a:xfrm>
+          <a:prstGeom prst="rect">
+            <a:avLst/>
+          </a:prstGeom>
+          <a:solidFill>
+            <a:srgbClr val="F1F5F9"/>
+          </a:solidFill>
+          <a:ln>
+            <a:noFill/>
+          </a:ln>
+        </p:spPr>
+        <p:style>
+          <a:lnRef idx="1">
+            <a:schemeClr val="accent1"/>
+          </a:lnRef>
+          <a:fillRef idx="3">
+            <a:schemeClr val="accent1"/>
+          </a:fillRef>
+          <a:effectRef idx="2">
+            <a:schemeClr val="accent1"/>
+          </a:effectRef>
+          <a:fontRef idx="minor">
+            <a:schemeClr val="lt1"/>
+          </a:fontRef>
+        </p:style>
+        <p:txBody>
+          <a:bodyPr rtlCol="0" anchor="ctr"/>
+          <a:lstStyle/>
+          <a:p>
+            <a:pPr algn="ctr"/>
+          </a:p>
+        </p:txBody>
+      </p:sp>
+      <p:sp>
+        <p:nvSpPr>
+          <p:cNvPr id="5" name="TextBox 4"/>
+          <p:cNvSpPr txBox="1"/>
+          <p:nvPr/>
+        </p:nvSpPr>
+        <p:spPr>
+          <a:xfrm>
+            <a:off x="731520" y="2368296"/>
+            <a:ext cx="1581912" cy="337626"/>
+          </a:xfrm>
+          <a:prstGeom prst="rect">
+            <a:avLst/>
+          </a:prstGeom>
+          <a:noFill/>
+        </p:spPr>
+        <p:txBody>
+          <a:bodyPr wrap="none" anchor="t" lIns="0" rIns="0" tIns="0" bIns="0">
+            <a:noAutofit/>
+          </a:bodyPr>
+          <a:lstStyle/>
+          <a:p>
+            <a:pPr algn="l">
+              <a:lnSpc>
+                <a:spcPct val="114000"/>
+              </a:lnSpc>
+              <a:spcBef>
+                <a:spcPts val="0"/>
+              </a:spcBef>
+              <a:spcAft>
+                <a:spcPts val="0"/>
+              </a:spcAft>
+            </a:pPr>
+            <a:r>
+              <a:rPr sz="2200" b="1" lang="en-US">
+                <a:solidFill>
+                  <a:srgbClr val="00306C"/>
+                </a:solidFill>
+                <a:latin typeface="Pretendard"/>
+                <a:ea typeface="Pretendard"/>
+                <a:cs typeface="Pretendard"/>
+              </a:rPr>
+              <a:t>CIC2018</a:t>
+            </a:r>
+          </a:p>
+        </p:txBody>
+      </p:sp>
+      <p:sp>
+        <p:nvSpPr>
+          <p:cNvPr id="6" name="Right Arrow 5"/>
+          <p:cNvSpPr/>
+          <p:nvPr/>
+        </p:nvSpPr>
+        <p:spPr>
+          <a:xfrm>
+            <a:off x="2651760" y="2414015"/>
+            <a:ext cx="365760" cy="256032"/>
+          </a:xfrm>
+          <a:prstGeom prst="rightArrow">
+            <a:avLst/>
+          </a:prstGeom>
+          <a:solidFill>
+            <a:srgbClr val="007BC6"/>
+          </a:solidFill>
+          <a:ln>
+            <a:noFill/>
+          </a:ln>
+        </p:spPr>
+        <p:style>
+          <a:lnRef idx="1">
+            <a:schemeClr val="accent1"/>
+          </a:lnRef>
+          <a:fillRef idx="3">
+            <a:schemeClr val="accent1"/>
+          </a:fillRef>
+          <a:effectRef idx="2">
+            <a:schemeClr val="accent1"/>
+          </a:effectRef>
+          <a:fontRef idx="minor">
+            <a:schemeClr val="lt1"/>
+          </a:fontRef>
+        </p:style>
+        <p:txBody>
+          <a:bodyPr rtlCol="0" anchor="ctr"/>
+          <a:lstStyle/>
+          <a:p>
+            <a:pPr algn="ctr"/>
+          </a:p>
+        </p:txBody>
+      </p:sp>
+      <p:sp>
+        <p:nvSpPr>
+          <p:cNvPr id="7" name="Rectangle 6"/>
+          <p:cNvSpPr/>
+          <p:nvPr/>
+        </p:nvSpPr>
+        <p:spPr>
+          <a:xfrm>
+            <a:off x="3236976" y="2066543"/>
+            <a:ext cx="3822191" cy="969264"/>
+          </a:xfrm>
+          <a:prstGeom prst="rect">
+            <a:avLst/>
+          </a:prstGeom>
+          <a:solidFill>
+            <a:srgbClr val="F1F5F9"/>
+          </a:solidFill>
+          <a:ln>
+            <a:noFill/>
+          </a:ln>
+        </p:spPr>
+        <p:style>
+          <a:lnRef idx="1">
+            <a:schemeClr val="accent1"/>
+          </a:lnRef>
+          <a:fillRef idx="3">
+            <a:schemeClr val="accent1"/>
+          </a:fillRef>
+          <a:effectRef idx="2">
+            <a:schemeClr val="accent1"/>
+          </a:effectRef>
+          <a:fontRef idx="minor">
+            <a:schemeClr val="lt1"/>
+          </a:fontRef>
+        </p:style>
+        <p:txBody>
+          <a:bodyPr rtlCol="0" anchor="ctr"/>
+          <a:lstStyle/>
+          <a:p>
+            <a:pPr algn="ctr"/>
+          </a:p>
+        </p:txBody>
+      </p:sp>
+      <p:sp>
+        <p:nvSpPr>
+          <p:cNvPr id="8" name="TextBox 7"/>
+          <p:cNvSpPr txBox="1"/>
+          <p:nvPr/>
+        </p:nvSpPr>
+        <p:spPr>
+          <a:xfrm>
+            <a:off x="3410712" y="2203703"/>
+            <a:ext cx="3474720" cy="292608"/>
+          </a:xfrm>
+          <a:prstGeom prst="rect">
+            <a:avLst/>
+          </a:prstGeom>
+          <a:noFill/>
+        </p:spPr>
+        <p:txBody>
+          <a:bodyPr wrap="none" anchor="t" lIns="0" rIns="0" tIns="0" bIns="0">
+            <a:noAutofit/>
+          </a:bodyPr>
+          <a:lstStyle/>
+          <a:p>
+            <a:pPr algn="l">
+              <a:lnSpc>
+                <a:spcPct val="114000"/>
+              </a:lnSpc>
+              <a:spcBef>
+                <a:spcPts val="0"/>
+              </a:spcBef>
+              <a:spcAft>
+                <a:spcPts val="0"/>
+              </a:spcAft>
+            </a:pPr>
+            <a:r>
+              <a:rPr sz="1900" b="1" lang="en-US">
+                <a:solidFill>
+                  <a:srgbClr val="007BC6"/>
+                </a:solidFill>
+                <a:latin typeface="Pretendard"/>
+                <a:ea typeface="Pretendard"/>
+                <a:cs typeface="Pretendard"/>
+              </a:rPr>
+              <a:t>Train · Candidate examples</a:t>
+            </a:r>
+          </a:p>
+        </p:txBody>
+      </p:sp>
+      <p:sp>
+        <p:nvSpPr>
+          <p:cNvPr id="9" name="TextBox 8"/>
+          <p:cNvSpPr txBox="1"/>
+          <p:nvPr/>
+        </p:nvSpPr>
+        <p:spPr>
+          <a:xfrm>
+            <a:off x="3410712" y="2642615"/>
+            <a:ext cx="3474720" cy="265176"/>
+          </a:xfrm>
+          <a:prstGeom prst="rect">
+            <a:avLst/>
+          </a:prstGeom>
+          <a:noFill/>
+        </p:spPr>
+        <p:txBody>
+          <a:bodyPr wrap="none" anchor="t" lIns="0" rIns="0" tIns="0" bIns="0">
+            <a:noAutofit/>
+          </a:bodyPr>
+          <a:lstStyle/>
+          <a:p>
+            <a:pPr algn="l">
+              <a:lnSpc>
+                <a:spcPct val="114000"/>
+              </a:lnSpc>
+              <a:spcBef>
+                <a:spcPts val="0"/>
+              </a:spcBef>
+              <a:spcAft>
+                <a:spcPts val="0"/>
+              </a:spcAft>
+            </a:pPr>
+            <a:r>
+              <a:rPr sz="1600" b="0" lang="en-US">
+                <a:solidFill>
+                  <a:srgbClr val="20262E"/>
+                </a:solidFill>
+                <a:latin typeface="Pretendard"/>
+                <a:ea typeface="Pretendard"/>
+                <a:cs typeface="Pretendard"/>
+              </a:rPr>
+              <a:t>Select initial cases, then new attacks</a:t>
+            </a:r>
+          </a:p>
+        </p:txBody>
+      </p:sp>
+      <p:sp>
+        <p:nvSpPr>
+          <p:cNvPr id="10" name="Rectangle 9"/>
+          <p:cNvSpPr/>
+          <p:nvPr/>
+        </p:nvSpPr>
+        <p:spPr>
+          <a:xfrm>
+            <a:off x="7397496" y="2066543"/>
+            <a:ext cx="4197096" cy="969264"/>
+          </a:xfrm>
+          <a:prstGeom prst="rect">
+            <a:avLst/>
+          </a:prstGeom>
+          <a:solidFill>
+            <a:srgbClr val="F1F5F9"/>
+          </a:solidFill>
+          <a:ln>
+            <a:noFill/>
+          </a:ln>
+        </p:spPr>
+        <p:style>
+          <a:lnRef idx="1">
+            <a:schemeClr val="accent1"/>
+          </a:lnRef>
+          <a:fillRef idx="3">
+            <a:schemeClr val="accent1"/>
+          </a:fillRef>
+          <a:effectRef idx="2">
+            <a:schemeClr val="accent1"/>
+          </a:effectRef>
+          <a:fontRef idx="minor">
+            <a:schemeClr val="lt1"/>
+          </a:fontRef>
+        </p:style>
+        <p:txBody>
+          <a:bodyPr rtlCol="0" anchor="ctr"/>
+          <a:lstStyle/>
+          <a:p>
+            <a:pPr algn="ctr"/>
+          </a:p>
+        </p:txBody>
+      </p:sp>
+      <p:sp>
+        <p:nvSpPr>
+          <p:cNvPr id="11" name="TextBox 10"/>
+          <p:cNvSpPr txBox="1"/>
+          <p:nvPr/>
+        </p:nvSpPr>
+        <p:spPr>
+          <a:xfrm>
+            <a:off x="7571231" y="2203703"/>
+            <a:ext cx="3849624" cy="292608"/>
+          </a:xfrm>
+          <a:prstGeom prst="rect">
+            <a:avLst/>
+          </a:prstGeom>
+          <a:noFill/>
+        </p:spPr>
+        <p:txBody>
+          <a:bodyPr wrap="none" anchor="t" lIns="0" rIns="0" tIns="0" bIns="0">
+            <a:noAutofit/>
+          </a:bodyPr>
+          <a:lstStyle/>
+          <a:p>
+            <a:pPr algn="l">
+              <a:lnSpc>
+                <a:spcPct val="114000"/>
+              </a:lnSpc>
+              <a:spcBef>
+                <a:spcPts val="0"/>
+              </a:spcBef>
+              <a:spcAft>
+                <a:spcPts val="0"/>
+              </a:spcAft>
+            </a:pPr>
+            <a:r>
+              <a:rPr sz="1900" b="1" lang="en-US">
+                <a:solidFill>
+                  <a:srgbClr val="007BC6"/>
+                </a:solidFill>
+                <a:latin typeface="Pretendard"/>
+                <a:ea typeface="Pretendard"/>
+                <a:cs typeface="Pretendard"/>
+              </a:rPr>
+              <a:t>Test · Fixed evaluation flows</a:t>
+            </a:r>
+          </a:p>
+        </p:txBody>
+      </p:sp>
+      <p:sp>
+        <p:nvSpPr>
+          <p:cNvPr id="12" name="TextBox 11"/>
+          <p:cNvSpPr txBox="1"/>
+          <p:nvPr/>
+        </p:nvSpPr>
+        <p:spPr>
+          <a:xfrm>
+            <a:off x="7571231" y="2642615"/>
+            <a:ext cx="3849624" cy="265176"/>
+          </a:xfrm>
+          <a:prstGeom prst="rect">
+            <a:avLst/>
+          </a:prstGeom>
+          <a:noFill/>
+        </p:spPr>
+        <p:txBody>
+          <a:bodyPr wrap="none" anchor="t" lIns="0" rIns="0" tIns="0" bIns="0">
+            <a:noAutofit/>
+          </a:bodyPr>
+          <a:lstStyle/>
+          <a:p>
+            <a:pPr algn="l">
+              <a:lnSpc>
+                <a:spcPct val="114000"/>
+              </a:lnSpc>
+              <a:spcBef>
+                <a:spcPts val="0"/>
+              </a:spcBef>
+              <a:spcAft>
+                <a:spcPts val="0"/>
+              </a:spcAft>
+            </a:pPr>
+            <a:r>
+              <a:rPr sz="1600" b="0" lang="en-US">
+                <a:solidFill>
+                  <a:srgbClr val="20262E"/>
+                </a:solidFill>
+                <a:latin typeface="Pretendard"/>
+                <a:ea typeface="Pretendard"/>
+                <a:cs typeface="Pretendard"/>
+              </a:rPr>
+              <a:t>3,042,473 rows · Excluded from updates</a:t>
+            </a:r>
+          </a:p>
+        </p:txBody>
+      </p:sp>
+      <p:sp>
+        <p:nvSpPr>
+          <p:cNvPr id="13" name="Rectangle 12"/>
+          <p:cNvSpPr/>
+          <p:nvPr/>
+        </p:nvSpPr>
+        <p:spPr>
+          <a:xfrm>
+            <a:off x="566928" y="3346703"/>
+            <a:ext cx="1892807" cy="969264"/>
+          </a:xfrm>
+          <a:prstGeom prst="rect">
+            <a:avLst/>
+          </a:prstGeom>
+          <a:solidFill>
+            <a:srgbClr val="F1F5F9"/>
+          </a:solidFill>
+          <a:ln>
+            <a:noFill/>
+          </a:ln>
+        </p:spPr>
+        <p:style>
+          <a:lnRef idx="1">
+            <a:schemeClr val="accent1"/>
+          </a:lnRef>
+          <a:fillRef idx="3">
+            <a:schemeClr val="accent1"/>
+          </a:fillRef>
+          <a:effectRef idx="2">
+            <a:schemeClr val="accent1"/>
+          </a:effectRef>
+          <a:fontRef idx="minor">
+            <a:schemeClr val="lt1"/>
+          </a:fontRef>
+        </p:style>
+        <p:txBody>
+          <a:bodyPr rtlCol="0" anchor="ctr"/>
+          <a:lstStyle/>
+          <a:p>
+            <a:pPr algn="ctr"/>
+          </a:p>
+        </p:txBody>
+      </p:sp>
+      <p:sp>
+        <p:nvSpPr>
+          <p:cNvPr id="14" name="TextBox 13"/>
+          <p:cNvSpPr txBox="1"/>
+          <p:nvPr/>
+        </p:nvSpPr>
+        <p:spPr>
+          <a:xfrm>
+            <a:off x="731520" y="3648456"/>
+            <a:ext cx="1581912" cy="337626"/>
+          </a:xfrm>
+          <a:prstGeom prst="rect">
+            <a:avLst/>
+          </a:prstGeom>
+          <a:noFill/>
+        </p:spPr>
+        <p:txBody>
+          <a:bodyPr wrap="none" anchor="t" lIns="0" rIns="0" tIns="0" bIns="0">
+            <a:noAutofit/>
+          </a:bodyPr>
+          <a:lstStyle/>
+          <a:p>
+            <a:pPr algn="l">
+              <a:lnSpc>
+                <a:spcPct val="114000"/>
+              </a:lnSpc>
+              <a:spcBef>
+                <a:spcPts val="0"/>
+              </a:spcBef>
+              <a:spcAft>
+                <a:spcPts val="0"/>
+              </a:spcAft>
+            </a:pPr>
+            <a:r>
+              <a:rPr sz="2200" b="1" lang="en-US">
+                <a:solidFill>
+                  <a:srgbClr val="00306C"/>
+                </a:solidFill>
+                <a:latin typeface="Pretendard"/>
+                <a:ea typeface="Pretendard"/>
+                <a:cs typeface="Pretendard"/>
+              </a:rPr>
+              <a:t>ToN-IoT</a:t>
+            </a:r>
+          </a:p>
+        </p:txBody>
+      </p:sp>
+      <p:sp>
+        <p:nvSpPr>
+          <p:cNvPr id="15" name="Right Arrow 14"/>
+          <p:cNvSpPr/>
+          <p:nvPr/>
+        </p:nvSpPr>
+        <p:spPr>
+          <a:xfrm>
+            <a:off x="2651760" y="3694176"/>
+            <a:ext cx="365760" cy="256032"/>
+          </a:xfrm>
+          <a:prstGeom prst="rightArrow">
+            <a:avLst/>
+          </a:prstGeom>
+          <a:solidFill>
+            <a:srgbClr val="007BC6"/>
+          </a:solidFill>
+          <a:ln>
+            <a:noFill/>
+          </a:ln>
+        </p:spPr>
+        <p:style>
+          <a:lnRef idx="1">
+            <a:schemeClr val="accent1"/>
+          </a:lnRef>
+          <a:fillRef idx="3">
+            <a:schemeClr val="accent1"/>
+          </a:fillRef>
+          <a:effectRef idx="2">
+            <a:schemeClr val="accent1"/>
+          </a:effectRef>
+          <a:fontRef idx="minor">
+            <a:schemeClr val="lt1"/>
+          </a:fontRef>
+        </p:style>
+        <p:txBody>
+          <a:bodyPr rtlCol="0" anchor="ctr"/>
+          <a:lstStyle/>
+          <a:p>
+            <a:pPr algn="ctr"/>
+          </a:p>
+        </p:txBody>
+      </p:sp>
+      <p:sp>
+        <p:nvSpPr>
+          <p:cNvPr id="16" name="Rectangle 15"/>
+          <p:cNvSpPr/>
+          <p:nvPr/>
+        </p:nvSpPr>
+        <p:spPr>
+          <a:xfrm>
+            <a:off x="3236976" y="3346703"/>
+            <a:ext cx="3822191" cy="969264"/>
+          </a:xfrm>
+          <a:prstGeom prst="rect">
+            <a:avLst/>
+          </a:prstGeom>
+          <a:solidFill>
+            <a:srgbClr val="F1F5F9"/>
+          </a:solidFill>
+          <a:ln>
+            <a:noFill/>
+          </a:ln>
+        </p:spPr>
+        <p:style>
+          <a:lnRef idx="1">
+            <a:schemeClr val="accent1"/>
+          </a:lnRef>
+          <a:fillRef idx="3">
+            <a:schemeClr val="accent1"/>
+          </a:fillRef>
+          <a:effectRef idx="2">
+            <a:schemeClr val="accent1"/>
+          </a:effectRef>
+          <a:fontRef idx="minor">
+            <a:schemeClr val="lt1"/>
+          </a:fontRef>
+        </p:style>
+        <p:txBody>
+          <a:bodyPr rtlCol="0" anchor="ctr"/>
+          <a:lstStyle/>
+          <a:p>
+            <a:pPr algn="ctr"/>
+          </a:p>
+        </p:txBody>
+      </p:sp>
+      <p:sp>
+        <p:nvSpPr>
+          <p:cNvPr id="17" name="TextBox 16"/>
+          <p:cNvSpPr txBox="1"/>
+          <p:nvPr/>
+        </p:nvSpPr>
+        <p:spPr>
+          <a:xfrm>
+            <a:off x="3410712" y="3483863"/>
+            <a:ext cx="3474720" cy="292608"/>
+          </a:xfrm>
+          <a:prstGeom prst="rect">
+            <a:avLst/>
+          </a:prstGeom>
+          <a:noFill/>
+        </p:spPr>
+        <p:txBody>
+          <a:bodyPr wrap="none" anchor="t" lIns="0" rIns="0" tIns="0" bIns="0">
+            <a:noAutofit/>
+          </a:bodyPr>
+          <a:lstStyle/>
+          <a:p>
+            <a:pPr algn="l">
+              <a:lnSpc>
+                <a:spcPct val="114000"/>
+              </a:lnSpc>
+              <a:spcBef>
+                <a:spcPts val="0"/>
+              </a:spcBef>
+              <a:spcAft>
+                <a:spcPts val="0"/>
+              </a:spcAft>
+            </a:pPr>
+            <a:r>
+              <a:rPr sz="1900" b="1" lang="en-US">
+                <a:solidFill>
+                  <a:srgbClr val="007BC6"/>
+                </a:solidFill>
+                <a:latin typeface="Pretendard"/>
+                <a:ea typeface="Pretendard"/>
+                <a:cs typeface="Pretendard"/>
+              </a:rPr>
+              <a:t>Train · Candidate examples</a:t>
+            </a:r>
+          </a:p>
+        </p:txBody>
+      </p:sp>
+      <p:sp>
+        <p:nvSpPr>
+          <p:cNvPr id="18" name="TextBox 17"/>
+          <p:cNvSpPr txBox="1"/>
+          <p:nvPr/>
+        </p:nvSpPr>
+        <p:spPr>
+          <a:xfrm>
+            <a:off x="3410712" y="3922776"/>
+            <a:ext cx="3474720" cy="265176"/>
+          </a:xfrm>
+          <a:prstGeom prst="rect">
+            <a:avLst/>
+          </a:prstGeom>
+          <a:noFill/>
+        </p:spPr>
+        <p:txBody>
+          <a:bodyPr wrap="none" anchor="t" lIns="0" rIns="0" tIns="0" bIns="0">
+            <a:noAutofit/>
+          </a:bodyPr>
+          <a:lstStyle/>
+          <a:p>
+            <a:pPr algn="l">
+              <a:lnSpc>
+                <a:spcPct val="114000"/>
+              </a:lnSpc>
+              <a:spcBef>
+                <a:spcPts val="0"/>
+              </a:spcBef>
+              <a:spcAft>
+                <a:spcPts val="0"/>
+              </a:spcAft>
+            </a:pPr>
+            <a:r>
+              <a:rPr sz="1600" b="0" lang="en-US">
+                <a:solidFill>
+                  <a:srgbClr val="20262E"/>
+                </a:solidFill>
+                <a:latin typeface="Pretendard"/>
+                <a:ea typeface="Pretendard"/>
+                <a:cs typeface="Pretendard"/>
+              </a:rPr>
+              <a:t>Select initial cases, then new attacks</a:t>
+            </a:r>
+          </a:p>
+        </p:txBody>
+      </p:sp>
+      <p:sp>
+        <p:nvSpPr>
+          <p:cNvPr id="19" name="Rectangle 18"/>
+          <p:cNvSpPr/>
+          <p:nvPr/>
+        </p:nvSpPr>
+        <p:spPr>
+          <a:xfrm>
+            <a:off x="7397496" y="3346703"/>
+            <a:ext cx="4197096" cy="969264"/>
+          </a:xfrm>
+          <a:prstGeom prst="rect">
+            <a:avLst/>
+          </a:prstGeom>
+          <a:solidFill>
+            <a:srgbClr val="F1F5F9"/>
+          </a:solidFill>
+          <a:ln>
+            <a:noFill/>
+          </a:ln>
+        </p:spPr>
+        <p:style>
+          <a:lnRef idx="1">
+            <a:schemeClr val="accent1"/>
+          </a:lnRef>
+          <a:fillRef idx="3">
+            <a:schemeClr val="accent1"/>
+          </a:fillRef>
+          <a:effectRef idx="2">
+            <a:schemeClr val="accent1"/>
+          </a:effectRef>
+          <a:fontRef idx="minor">
+            <a:schemeClr val="lt1"/>
+          </a:fontRef>
+        </p:style>
+        <p:txBody>
+          <a:bodyPr rtlCol="0" anchor="ctr"/>
+          <a:lstStyle/>
+          <a:p>
+            <a:pPr algn="ctr"/>
+          </a:p>
+        </p:txBody>
+      </p:sp>
+      <p:sp>
+        <p:nvSpPr>
+          <p:cNvPr id="20" name="TextBox 19"/>
+          <p:cNvSpPr txBox="1"/>
+          <p:nvPr/>
+        </p:nvSpPr>
+        <p:spPr>
+          <a:xfrm>
+            <a:off x="7571231" y="3483863"/>
+            <a:ext cx="3849624" cy="292608"/>
+          </a:xfrm>
+          <a:prstGeom prst="rect">
+            <a:avLst/>
+          </a:prstGeom>
+          <a:noFill/>
+        </p:spPr>
+        <p:txBody>
+          <a:bodyPr wrap="none" anchor="t" lIns="0" rIns="0" tIns="0" bIns="0">
+            <a:noAutofit/>
+          </a:bodyPr>
+          <a:lstStyle/>
+          <a:p>
+            <a:pPr algn="l">
+              <a:lnSpc>
+                <a:spcPct val="114000"/>
+              </a:lnSpc>
+              <a:spcBef>
+                <a:spcPts val="0"/>
+              </a:spcBef>
+              <a:spcAft>
+                <a:spcPts val="0"/>
+              </a:spcAft>
+            </a:pPr>
+            <a:r>
+              <a:rPr sz="1900" b="1" lang="en-US">
+                <a:solidFill>
+                  <a:srgbClr val="007BC6"/>
+                </a:solidFill>
+                <a:latin typeface="Pretendard"/>
+                <a:ea typeface="Pretendard"/>
+                <a:cs typeface="Pretendard"/>
+              </a:rPr>
+              <a:t>Test · Fixed evaluation flows</a:t>
+            </a:r>
+          </a:p>
+        </p:txBody>
+      </p:sp>
+      <p:sp>
+        <p:nvSpPr>
+          <p:cNvPr id="21" name="TextBox 20"/>
+          <p:cNvSpPr txBox="1"/>
+          <p:nvPr/>
+        </p:nvSpPr>
+        <p:spPr>
+          <a:xfrm>
+            <a:off x="7571231" y="3922776"/>
+            <a:ext cx="3849624" cy="265176"/>
+          </a:xfrm>
+          <a:prstGeom prst="rect">
+            <a:avLst/>
+          </a:prstGeom>
+          <a:noFill/>
+        </p:spPr>
+        <p:txBody>
+          <a:bodyPr wrap="none" anchor="t" lIns="0" rIns="0" tIns="0" bIns="0">
+            <a:noAutofit/>
+          </a:bodyPr>
+          <a:lstStyle/>
+          <a:p>
+            <a:pPr algn="l">
+              <a:lnSpc>
+                <a:spcPct val="114000"/>
+              </a:lnSpc>
+              <a:spcBef>
+                <a:spcPts val="0"/>
+              </a:spcBef>
+              <a:spcAft>
+                <a:spcPts val="0"/>
+              </a:spcAft>
+            </a:pPr>
+            <a:r>
+              <a:rPr sz="1600" b="0" lang="en-US">
+                <a:solidFill>
+                  <a:srgbClr val="20262E"/>
+                </a:solidFill>
+                <a:latin typeface="Pretendard"/>
+                <a:ea typeface="Pretendard"/>
+                <a:cs typeface="Pretendard"/>
+              </a:rPr>
+              <a:t>2,271,723 rows · Excluded from updates</a:t>
+            </a:r>
+          </a:p>
+        </p:txBody>
+      </p:sp>
+      <p:sp>
+        <p:nvSpPr>
+          <p:cNvPr id="22" name="TextBox 21"/>
+          <p:cNvSpPr txBox="1"/>
+          <p:nvPr/>
+        </p:nvSpPr>
+        <p:spPr>
+          <a:xfrm>
+            <a:off x="594360" y="4681728"/>
+            <a:ext cx="10972800" cy="356616"/>
+          </a:xfrm>
+          <a:prstGeom prst="rect">
+            <a:avLst/>
+          </a:prstGeom>
+          <a:noFill/>
+        </p:spPr>
+        <p:txBody>
+          <a:bodyPr wrap="none" anchor="t" lIns="0" rIns="0" tIns="0" bIns="0">
+            <a:noAutofit/>
+          </a:bodyPr>
+          <a:lstStyle/>
+          <a:p>
+            <a:pPr algn="l">
+              <a:lnSpc>
+                <a:spcPct val="114000"/>
+              </a:lnSpc>
+              <a:spcBef>
+                <a:spcPts val="0"/>
+              </a:spcBef>
+              <a:spcAft>
+                <a:spcPts val="0"/>
+              </a:spcAft>
+            </a:pPr>
+            <a:r>
+              <a:rPr sz="2000" b="1" lang="en-US">
+                <a:solidFill>
+                  <a:srgbClr val="00306C"/>
+                </a:solidFill>
+                <a:latin typeface="Pretendard"/>
+                <a:ea typeface="Pretendard"/>
+                <a:cs typeface="Pretendard"/>
+              </a:rPr>
+              <a:t>CIC example · Initial 1,000 + 100 DDoS rows from the same CIC train = 1,100 labels</a:t>
+            </a:r>
+          </a:p>
+        </p:txBody>
+      </p:sp>
+      <p:sp>
+        <p:nvSpPr>
+          <p:cNvPr id="23" name="TextBox 22"/>
+          <p:cNvSpPr txBox="1"/>
+          <p:nvPr/>
+        </p:nvSpPr>
+        <p:spPr>
+          <a:xfrm>
+            <a:off x="594360" y="5349240"/>
+            <a:ext cx="10972800" cy="603504"/>
+          </a:xfrm>
+          <a:prstGeom prst="rect">
+            <a:avLst/>
+          </a:prstGeom>
+          <a:noFill/>
+        </p:spPr>
+        <p:txBody>
+          <a:bodyPr wrap="none" anchor="t" lIns="0" rIns="0" tIns="0" bIns="0">
+            <a:noAutofit/>
+          </a:bodyPr>
+          <a:lstStyle/>
+          <a:p>
+            <a:pPr algn="l">
+              <a:lnSpc>
+                <a:spcPct val="114000"/>
+              </a:lnSpc>
+              <a:spcBef>
+                <a:spcPts val="0"/>
+              </a:spcBef>
+              <a:spcAft>
+                <a:spcPts val="0"/>
+              </a:spcAft>
+            </a:pPr>
+            <a:r>
+              <a:rPr sz="1900" b="0" lang="en-US">
+                <a:solidFill>
+                  <a:srgbClr val="20262E"/>
+                </a:solidFill>
+                <a:latin typeface="Pretendard"/>
+                <a:ea typeface="Pretendard"/>
+                <a:cs typeface="Pretendard"/>
+              </a:rPr>
+              <a:t>Use these same 1,100 rows for XGB refitting or as PFN context</a:t>
+            </a:r>
+          </a:p>
+          <a:p>
+            <a:pPr algn="l">
+              <a:lnSpc>
+                <a:spcPct val="114000"/>
+              </a:lnSpc>
+              <a:spcBef>
+                <a:spcPts val="0"/>
+              </a:spcBef>
+              <a:spcAft>
+                <a:spcPts val="0"/>
+              </a:spcAft>
+            </a:pPr>
+            <a:r>
+              <a:rPr sz="1900" b="0" lang="en-US">
+                <a:solidFill>
+                  <a:srgbClr val="20262E"/>
+                </a:solidFill>
+                <a:latin typeface="Pretendard"/>
+                <a:ea typeface="Pretendard"/>
+                <a:cs typeface="Pretendard"/>
+              </a:rPr>
+              <a:t>“Current dataset” means the labelled examples supplied so far</a:t>
+            </a:r>
+          </a:p>
+        </p:txBody>
+      </p:sp>
+      <p:sp>
+        <p:nvSpPr>
+          <p:cNvPr id="24" name="Rectangle 23"/>
+          <p:cNvSpPr/>
+          <p:nvPr/>
+        </p:nvSpPr>
+        <p:spPr>
+          <a:xfrm>
+            <a:off x="0" y="6446520"/>
+            <a:ext cx="12191999" cy="411480"/>
+          </a:xfrm>
+          <a:prstGeom prst="rect">
+            <a:avLst/>
+          </a:prstGeom>
+          <a:solidFill>
+            <a:srgbClr val="00306C"/>
+          </a:solidFill>
+          <a:ln>
+            <a:noFill/>
+          </a:ln>
+        </p:spPr>
+        <p:style>
+          <a:lnRef idx="1">
+            <a:schemeClr val="accent1"/>
+          </a:lnRef>
+          <a:fillRef idx="3">
+            <a:schemeClr val="accent1"/>
+          </a:fillRef>
+          <a:effectRef idx="2">
+            <a:schemeClr val="accent1"/>
+          </a:effectRef>
+          <a:fontRef idx="minor">
+            <a:schemeClr val="lt1"/>
+          </a:fontRef>
+        </p:style>
+        <p:txBody>
+          <a:bodyPr rtlCol="0" anchor="ctr"/>
+          <a:lstStyle/>
+          <a:p>
+            <a:pPr algn="ctr"/>
+          </a:p>
+        </p:txBody>
+      </p:sp>
+      <p:sp>
+        <p:nvSpPr>
+          <p:cNvPr id="25" name="TextBox 24"/>
+          <p:cNvSpPr txBox="1"/>
+          <p:nvPr/>
+        </p:nvSpPr>
+        <p:spPr>
+          <a:xfrm>
+            <a:off x="566928" y="6528816"/>
+            <a:ext cx="9738360" cy="214853"/>
+          </a:xfrm>
+          <a:prstGeom prst="rect">
+            <a:avLst/>
+          </a:prstGeom>
+          <a:noFill/>
+        </p:spPr>
+        <p:txBody>
+          <a:bodyPr wrap="none" anchor="t" lIns="0" rIns="0" tIns="0" bIns="0">
+            <a:noAutofit/>
+          </a:bodyPr>
+          <a:lstStyle/>
+          <a:p>
+            <a:pPr algn="l">
+              <a:lnSpc>
+                <a:spcPct val="114000"/>
+              </a:lnSpc>
+              <a:spcBef>
+                <a:spcPts val="0"/>
+              </a:spcBef>
+              <a:spcAft>
+                <a:spcPts val="0"/>
+              </a:spcAft>
+            </a:pPr>
+            <a:r>
+              <a:rPr sz="1400" b="0" lang="en-US">
+                <a:solidFill>
+                  <a:srgbClr val="FFFFFF"/>
+                </a:solidFill>
+                <a:latin typeface="Pretendard"/>
+                <a:ea typeface="Pretendard"/>
+                <a:cs typeface="Pretendard"/>
+              </a:rPr>
+              <a:t>Independent CIC and ToN evaluations; selected real rows with a designed label-release schedule</a:t>
+            </a:r>
+          </a:p>
+        </p:txBody>
+      </p:sp>
+      <p:sp>
+        <p:nvSpPr>
+          <p:cNvPr id="26" name="TextBox 25"/>
+          <p:cNvSpPr txBox="1"/>
+          <p:nvPr/>
+        </p:nvSpPr>
+        <p:spPr>
+          <a:xfrm>
+            <a:off x="10469880" y="6537960"/>
+            <a:ext cx="1143000" cy="201168"/>
+          </a:xfrm>
+          <a:prstGeom prst="rect">
+            <a:avLst/>
+          </a:prstGeom>
+          <a:noFill/>
+        </p:spPr>
+        <p:txBody>
+          <a:bodyPr wrap="none" anchor="t" lIns="0" rIns="0" tIns="0" bIns="0">
+            <a:noAutofit/>
+          </a:bodyPr>
+          <a:lstStyle/>
+          <a:p>
+            <a:pPr algn="r">
+              <a:lnSpc>
+                <a:spcPct val="114000"/>
+              </a:lnSpc>
+              <a:spcBef>
+                <a:spcPts val="0"/>
+              </a:spcBef>
+              <a:spcAft>
+                <a:spcPts val="0"/>
+              </a:spcAft>
+            </a:pPr>
+            <a:r>
+              <a:rPr sz="1200" b="0" lang="en-US">
+                <a:solidFill>
+                  <a:srgbClr val="FFFFFF"/>
+                </a:solidFill>
+                <a:latin typeface="Pretendard"/>
+                <a:ea typeface="Pretendard"/>
+                <a:cs typeface="Pretendard"/>
+              </a:rPr>
+              <a:t>03   5</a:t>
+            </a:r>
+          </a:p>
+        </p:txBody>
+      </p:sp>
     </p:spTree>
   </p:cSld>
   <p:clrMapOvr>
@@ -6957,30 +8748,3669 @@
         <p:nvPr/>
       </p:nvGrpSpPr>
       <p:grpSpPr/>
-      <p:pic>
-        <p:nvPicPr>
-          <p:cNvPr id="2" name="Picture 1" descr="original-5.png"/>
-          <p:cNvPicPr>
-            <a:picLocks noChangeAspect="1"/>
-          </p:cNvPicPr>
-          <p:nvPr/>
-        </p:nvPicPr>
-        <p:blipFill>
-          <a:blip r:embed="rId2"/>
-          <a:stretch>
-            <a:fillRect/>
-          </a:stretch>
-        </p:blipFill>
-        <p:spPr>
-          <a:xfrm>
-            <a:off x="0" y="0"/>
-            <a:ext cx="12191999" cy="6858000"/>
-          </a:xfrm>
-          <a:prstGeom prst="rect">
-            <a:avLst/>
-          </a:prstGeom>
-        </p:spPr>
-      </p:pic>
+      <p:sp>
+        <p:nvSpPr>
+          <p:cNvPr id="2" name="TextBox 1"/>
+          <p:cNvSpPr txBox="1"/>
+          <p:nvPr/>
+        </p:nvSpPr>
+        <p:spPr>
+          <a:xfrm>
+            <a:off x="548640" y="301752"/>
+            <a:ext cx="11064240" cy="521207"/>
+          </a:xfrm>
+          <a:prstGeom prst="rect">
+            <a:avLst/>
+          </a:prstGeom>
+          <a:noFill/>
+        </p:spPr>
+        <p:txBody>
+          <a:bodyPr wrap="none" anchor="t" lIns="0" rIns="0" tIns="0" bIns="0">
+            <a:noAutofit/>
+          </a:bodyPr>
+          <a:lstStyle/>
+          <a:p>
+            <a:pPr algn="l">
+              <a:lnSpc>
+                <a:spcPct val="114000"/>
+              </a:lnSpc>
+              <a:spcBef>
+                <a:spcPts val="0"/>
+              </a:spcBef>
+              <a:spcAft>
+                <a:spcPts val="0"/>
+              </a:spcAft>
+            </a:pPr>
+            <a:r>
+              <a:rPr sz="3000" b="1" lang="en-US">
+                <a:solidFill>
+                  <a:srgbClr val="00306C"/>
+                </a:solidFill>
+                <a:latin typeface="Pretendard"/>
+                <a:ea typeface="Pretendard"/>
+                <a:cs typeface="Pretendard"/>
+              </a:rPr>
+              <a:t>Evaluation scenario · n labels per new attack class</a:t>
+            </a:r>
+          </a:p>
+        </p:txBody>
+      </p:sp>
+      <p:sp>
+        <p:nvSpPr>
+          <p:cNvPr id="3" name="TextBox 2"/>
+          <p:cNvSpPr txBox="1"/>
+          <p:nvPr/>
+        </p:nvSpPr>
+        <p:spPr>
+          <a:xfrm>
+            <a:off x="566928" y="1005840"/>
+            <a:ext cx="10972800" cy="320040"/>
+          </a:xfrm>
+          <a:prstGeom prst="rect">
+            <a:avLst/>
+          </a:prstGeom>
+          <a:noFill/>
+        </p:spPr>
+        <p:txBody>
+          <a:bodyPr wrap="none" anchor="t" lIns="0" rIns="0" tIns="0" bIns="0">
+            <a:noAutofit/>
+          </a:bodyPr>
+          <a:lstStyle/>
+          <a:p>
+            <a:pPr algn="l">
+              <a:lnSpc>
+                <a:spcPct val="114000"/>
+              </a:lnSpc>
+              <a:spcBef>
+                <a:spcPts val="0"/>
+              </a:spcBef>
+              <a:spcAft>
+                <a:spcPts val="0"/>
+              </a:spcAft>
+            </a:pPr>
+            <a:r>
+              <a:rPr sz="1800" b="0" lang="en-US">
+                <a:solidFill>
+                  <a:srgbClr val="617080"/>
+                </a:solidFill>
+                <a:latin typeface="Pretendard"/>
+                <a:ea typeface="Pretendard"/>
+                <a:cs typeface="Pretendard"/>
+              </a:rPr>
+              <a:t>Counts = newly supplied training/context examples at each stage · Ordered by class arrival</a:t>
+            </a:r>
+          </a:p>
+        </p:txBody>
+      </p:sp>
+      <p:sp>
+        <p:nvSpPr>
+          <p:cNvPr id="4" name="TextBox 3"/>
+          <p:cNvSpPr txBox="1"/>
+          <p:nvPr/>
+        </p:nvSpPr>
+        <p:spPr>
+          <a:xfrm>
+            <a:off x="566928" y="1600200"/>
+            <a:ext cx="5340096" cy="352973"/>
+          </a:xfrm>
+          <a:prstGeom prst="rect">
+            <a:avLst/>
+          </a:prstGeom>
+          <a:noFill/>
+        </p:spPr>
+        <p:txBody>
+          <a:bodyPr wrap="none" anchor="t" lIns="0" rIns="0" tIns="0" bIns="0">
+            <a:noAutofit/>
+          </a:bodyPr>
+          <a:lstStyle/>
+          <a:p>
+            <a:pPr algn="l">
+              <a:lnSpc>
+                <a:spcPct val="114000"/>
+              </a:lnSpc>
+              <a:spcBef>
+                <a:spcPts val="0"/>
+              </a:spcBef>
+              <a:spcAft>
+                <a:spcPts val="0"/>
+              </a:spcAft>
+            </a:pPr>
+            <a:r>
+              <a:rPr sz="2300" b="1" lang="en-US">
+                <a:solidFill>
+                  <a:srgbClr val="007BC6"/>
+                </a:solidFill>
+                <a:latin typeface="Pretendard"/>
+                <a:ea typeface="Pretendard"/>
+                <a:cs typeface="Pretendard"/>
+              </a:rPr>
+              <a:t>CIC2018</a:t>
+            </a:r>
+          </a:p>
+        </p:txBody>
+      </p:sp>
+      <p:sp>
+        <p:nvSpPr>
+          <p:cNvPr id="5" name="Rectangle 4"/>
+          <p:cNvSpPr/>
+          <p:nvPr/>
+        </p:nvSpPr>
+        <p:spPr>
+          <a:xfrm>
+            <a:off x="566928" y="2084831"/>
+            <a:ext cx="5340096" cy="420624"/>
+          </a:xfrm>
+          <a:prstGeom prst="rect">
+            <a:avLst/>
+          </a:prstGeom>
+          <a:solidFill>
+            <a:srgbClr val="00306C"/>
+          </a:solidFill>
+          <a:ln>
+            <a:noFill/>
+          </a:ln>
+        </p:spPr>
+        <p:style>
+          <a:lnRef idx="1">
+            <a:schemeClr val="accent1"/>
+          </a:lnRef>
+          <a:fillRef idx="3">
+            <a:schemeClr val="accent1"/>
+          </a:fillRef>
+          <a:effectRef idx="2">
+            <a:schemeClr val="accent1"/>
+          </a:effectRef>
+          <a:fontRef idx="minor">
+            <a:schemeClr val="lt1"/>
+          </a:fontRef>
+        </p:style>
+        <p:txBody>
+          <a:bodyPr rtlCol="0" anchor="ctr"/>
+          <a:lstStyle/>
+          <a:p>
+            <a:pPr algn="ctr"/>
+          </a:p>
+        </p:txBody>
+      </p:sp>
+      <p:sp>
+        <p:nvSpPr>
+          <p:cNvPr id="6" name="TextBox 5"/>
+          <p:cNvSpPr txBox="1"/>
+          <p:nvPr/>
+        </p:nvSpPr>
+        <p:spPr>
+          <a:xfrm>
+            <a:off x="621792" y="2176272"/>
+            <a:ext cx="466344" cy="228600"/>
+          </a:xfrm>
+          <a:prstGeom prst="rect">
+            <a:avLst/>
+          </a:prstGeom>
+          <a:noFill/>
+        </p:spPr>
+        <p:txBody>
+          <a:bodyPr wrap="none" anchor="t" lIns="0" rIns="0" tIns="0" bIns="0">
+            <a:noAutofit/>
+          </a:bodyPr>
+          <a:lstStyle/>
+          <a:p>
+            <a:pPr algn="l">
+              <a:lnSpc>
+                <a:spcPct val="114000"/>
+              </a:lnSpc>
+              <a:spcBef>
+                <a:spcPts val="0"/>
+              </a:spcBef>
+              <a:spcAft>
+                <a:spcPts val="0"/>
+              </a:spcAft>
+            </a:pPr>
+            <a:r>
+              <a:rPr sz="1400" b="1" lang="en-US">
+                <a:solidFill>
+                  <a:srgbClr val="FFFFFF"/>
+                </a:solidFill>
+                <a:latin typeface="Pretendard"/>
+                <a:ea typeface="Pretendard"/>
+                <a:cs typeface="Pretendard"/>
+              </a:rPr>
+              <a:t>Stage</a:t>
+            </a:r>
+          </a:p>
+        </p:txBody>
+      </p:sp>
+      <p:sp>
+        <p:nvSpPr>
+          <p:cNvPr id="7" name="TextBox 6"/>
+          <p:cNvSpPr txBox="1"/>
+          <p:nvPr/>
+        </p:nvSpPr>
+        <p:spPr>
+          <a:xfrm>
+            <a:off x="1197864" y="2176272"/>
+            <a:ext cx="2276856" cy="228600"/>
+          </a:xfrm>
+          <a:prstGeom prst="rect">
+            <a:avLst/>
+          </a:prstGeom>
+          <a:noFill/>
+        </p:spPr>
+        <p:txBody>
+          <a:bodyPr wrap="none" anchor="t" lIns="0" rIns="0" tIns="0" bIns="0">
+            <a:noAutofit/>
+          </a:bodyPr>
+          <a:lstStyle/>
+          <a:p>
+            <a:pPr algn="l">
+              <a:lnSpc>
+                <a:spcPct val="114000"/>
+              </a:lnSpc>
+              <a:spcBef>
+                <a:spcPts val="0"/>
+              </a:spcBef>
+              <a:spcAft>
+                <a:spcPts val="0"/>
+              </a:spcAft>
+            </a:pPr>
+            <a:r>
+              <a:rPr sz="1400" b="1" lang="en-US">
+                <a:solidFill>
+                  <a:srgbClr val="FFFFFF"/>
+                </a:solidFill>
+                <a:latin typeface="Pretendard"/>
+                <a:ea typeface="Pretendard"/>
+                <a:cs typeface="Pretendard"/>
+              </a:rPr>
+              <a:t>Newly supplied class</a:t>
+            </a:r>
+          </a:p>
+        </p:txBody>
+      </p:sp>
+      <p:sp>
+        <p:nvSpPr>
+          <p:cNvPr id="8" name="TextBox 7"/>
+          <p:cNvSpPr txBox="1"/>
+          <p:nvPr/>
+        </p:nvSpPr>
+        <p:spPr>
+          <a:xfrm>
+            <a:off x="3584448" y="2176272"/>
+            <a:ext cx="804672" cy="228600"/>
+          </a:xfrm>
+          <a:prstGeom prst="rect">
+            <a:avLst/>
+          </a:prstGeom>
+          <a:noFill/>
+        </p:spPr>
+        <p:txBody>
+          <a:bodyPr wrap="none" anchor="t" lIns="0" rIns="0" tIns="0" bIns="0">
+            <a:noAutofit/>
+          </a:bodyPr>
+          <a:lstStyle/>
+          <a:p>
+            <a:pPr algn="r">
+              <a:lnSpc>
+                <a:spcPct val="114000"/>
+              </a:lnSpc>
+              <a:spcBef>
+                <a:spcPts val="0"/>
+              </a:spcBef>
+              <a:spcAft>
+                <a:spcPts val="0"/>
+              </a:spcAft>
+            </a:pPr>
+            <a:r>
+              <a:rPr sz="1400" b="1" lang="en-US">
+                <a:solidFill>
+                  <a:srgbClr val="FFFFFF"/>
+                </a:solidFill>
+                <a:latin typeface="Pretendard"/>
+                <a:ea typeface="Pretendard"/>
+                <a:cs typeface="Pretendard"/>
+              </a:rPr>
+              <a:t>Per class</a:t>
+            </a:r>
+          </a:p>
+        </p:txBody>
+      </p:sp>
+      <p:sp>
+        <p:nvSpPr>
+          <p:cNvPr id="9" name="TextBox 8"/>
+          <p:cNvSpPr txBox="1"/>
+          <p:nvPr/>
+        </p:nvSpPr>
+        <p:spPr>
+          <a:xfrm>
+            <a:off x="4498847" y="2176272"/>
+            <a:ext cx="1353312" cy="228600"/>
+          </a:xfrm>
+          <a:prstGeom prst="rect">
+            <a:avLst/>
+          </a:prstGeom>
+          <a:noFill/>
+        </p:spPr>
+        <p:txBody>
+          <a:bodyPr wrap="none" anchor="t" lIns="0" rIns="0" tIns="0" bIns="0">
+            <a:noAutofit/>
+          </a:bodyPr>
+          <a:lstStyle/>
+          <a:p>
+            <a:pPr algn="r">
+              <a:lnSpc>
+                <a:spcPct val="114000"/>
+              </a:lnSpc>
+              <a:spcBef>
+                <a:spcPts val="0"/>
+              </a:spcBef>
+              <a:spcAft>
+                <a:spcPts val="0"/>
+              </a:spcAft>
+            </a:pPr>
+            <a:r>
+              <a:rPr sz="1400" b="1" lang="en-US">
+                <a:solidFill>
+                  <a:srgbClr val="FFFFFF"/>
+                </a:solidFill>
+                <a:latin typeface="Pretendard"/>
+                <a:ea typeface="Pretendard"/>
+                <a:cs typeface="Pretendard"/>
+              </a:rPr>
+              <a:t>Total so far</a:t>
+            </a:r>
+          </a:p>
+        </p:txBody>
+      </p:sp>
+      <p:sp>
+        <p:nvSpPr>
+          <p:cNvPr id="10" name="Rectangle 9"/>
+          <p:cNvSpPr/>
+          <p:nvPr/>
+        </p:nvSpPr>
+        <p:spPr>
+          <a:xfrm>
+            <a:off x="566928" y="2505456"/>
+            <a:ext cx="5340096" cy="868680"/>
+          </a:xfrm>
+          <a:prstGeom prst="rect">
+            <a:avLst/>
+          </a:prstGeom>
+          <a:solidFill>
+            <a:srgbClr val="F1F5F9"/>
+          </a:solidFill>
+          <a:ln>
+            <a:noFill/>
+          </a:ln>
+        </p:spPr>
+        <p:style>
+          <a:lnRef idx="1">
+            <a:schemeClr val="accent1"/>
+          </a:lnRef>
+          <a:fillRef idx="3">
+            <a:schemeClr val="accent1"/>
+          </a:fillRef>
+          <a:effectRef idx="2">
+            <a:schemeClr val="accent1"/>
+          </a:effectRef>
+          <a:fontRef idx="minor">
+            <a:schemeClr val="lt1"/>
+          </a:fontRef>
+        </p:style>
+        <p:txBody>
+          <a:bodyPr rtlCol="0" anchor="ctr"/>
+          <a:lstStyle/>
+          <a:p>
+            <a:pPr algn="ctr"/>
+          </a:p>
+        </p:txBody>
+      </p:sp>
+      <p:sp>
+        <p:nvSpPr>
+          <p:cNvPr id="11" name="TextBox 10"/>
+          <p:cNvSpPr txBox="1"/>
+          <p:nvPr/>
+        </p:nvSpPr>
+        <p:spPr>
+          <a:xfrm>
+            <a:off x="640080" y="2596896"/>
+            <a:ext cx="429768" cy="740664"/>
+          </a:xfrm>
+          <a:prstGeom prst="rect">
+            <a:avLst/>
+          </a:prstGeom>
+          <a:noFill/>
+        </p:spPr>
+        <p:txBody>
+          <a:bodyPr wrap="none" anchor="t" lIns="0" rIns="0" tIns="0" bIns="0">
+            <a:noAutofit/>
+          </a:bodyPr>
+          <a:lstStyle/>
+          <a:p>
+            <a:pPr algn="l">
+              <a:lnSpc>
+                <a:spcPct val="114000"/>
+              </a:lnSpc>
+              <a:spcBef>
+                <a:spcPts val="0"/>
+              </a:spcBef>
+              <a:spcAft>
+                <a:spcPts val="0"/>
+              </a:spcAft>
+            </a:pPr>
+            <a:r>
+              <a:rPr sz="1600" b="0" lang="en-US">
+                <a:solidFill>
+                  <a:srgbClr val="20262E"/>
+                </a:solidFill>
+                <a:latin typeface="Pretendard"/>
+                <a:ea typeface="Pretendard"/>
+                <a:cs typeface="Pretendard"/>
+              </a:rPr>
+              <a:t>1</a:t>
+            </a:r>
+          </a:p>
+        </p:txBody>
+      </p:sp>
+      <p:sp>
+        <p:nvSpPr>
+          <p:cNvPr id="12" name="TextBox 11"/>
+          <p:cNvSpPr txBox="1"/>
+          <p:nvPr/>
+        </p:nvSpPr>
+        <p:spPr>
+          <a:xfrm>
+            <a:off x="1216152" y="2596896"/>
+            <a:ext cx="2240279" cy="740664"/>
+          </a:xfrm>
+          <a:prstGeom prst="rect">
+            <a:avLst/>
+          </a:prstGeom>
+          <a:noFill/>
+        </p:spPr>
+        <p:txBody>
+          <a:bodyPr wrap="none" anchor="t" lIns="0" rIns="0" tIns="0" bIns="0">
+            <a:noAutofit/>
+          </a:bodyPr>
+          <a:lstStyle/>
+          <a:p>
+            <a:pPr algn="l">
+              <a:lnSpc>
+                <a:spcPct val="114000"/>
+              </a:lnSpc>
+              <a:spcBef>
+                <a:spcPts val="0"/>
+              </a:spcBef>
+              <a:spcAft>
+                <a:spcPts val="0"/>
+              </a:spcAft>
+            </a:pPr>
+            <a:r>
+              <a:rPr sz="1600" b="0" lang="en-US">
+                <a:solidFill>
+                  <a:srgbClr val="20262E"/>
+                </a:solidFill>
+                <a:latin typeface="Pretendard"/>
+                <a:ea typeface="Pretendard"/>
+                <a:cs typeface="Pretendard"/>
+              </a:rPr>
+              <a:t>Benign</a:t>
+            </a:r>
+          </a:p>
+          <a:p>
+            <a:pPr algn="l">
+              <a:lnSpc>
+                <a:spcPct val="114000"/>
+              </a:lnSpc>
+              <a:spcBef>
+                <a:spcPts val="0"/>
+              </a:spcBef>
+              <a:spcAft>
+                <a:spcPts val="0"/>
+              </a:spcAft>
+            </a:pPr>
+            <a:r>
+              <a:rPr sz="1600" b="0" lang="en-US">
+                <a:solidFill>
+                  <a:srgbClr val="20262E"/>
+                </a:solidFill>
+                <a:latin typeface="Pretendard"/>
+                <a:ea typeface="Pretendard"/>
+                <a:cs typeface="Pretendard"/>
+              </a:rPr>
+              <a:t>Brute force</a:t>
+            </a:r>
+          </a:p>
+          <a:p>
+            <a:pPr algn="l">
+              <a:lnSpc>
+                <a:spcPct val="114000"/>
+              </a:lnSpc>
+              <a:spcBef>
+                <a:spcPts val="0"/>
+              </a:spcBef>
+              <a:spcAft>
+                <a:spcPts val="0"/>
+              </a:spcAft>
+            </a:pPr>
+            <a:r>
+              <a:rPr sz="1600" b="0" lang="en-US">
+                <a:solidFill>
+                  <a:srgbClr val="20262E"/>
+                </a:solidFill>
+                <a:latin typeface="Pretendard"/>
+                <a:ea typeface="Pretendard"/>
+                <a:cs typeface="Pretendard"/>
+              </a:rPr>
+              <a:t>DoS</a:t>
+            </a:r>
+          </a:p>
+        </p:txBody>
+      </p:sp>
+      <p:sp>
+        <p:nvSpPr>
+          <p:cNvPr id="13" name="TextBox 12"/>
+          <p:cNvSpPr txBox="1"/>
+          <p:nvPr/>
+        </p:nvSpPr>
+        <p:spPr>
+          <a:xfrm>
+            <a:off x="3602736" y="2596896"/>
+            <a:ext cx="768096" cy="740664"/>
+          </a:xfrm>
+          <a:prstGeom prst="rect">
+            <a:avLst/>
+          </a:prstGeom>
+          <a:noFill/>
+        </p:spPr>
+        <p:txBody>
+          <a:bodyPr wrap="none" anchor="t" lIns="0" rIns="0" tIns="0" bIns="0">
+            <a:noAutofit/>
+          </a:bodyPr>
+          <a:lstStyle/>
+          <a:p>
+            <a:pPr algn="r">
+              <a:lnSpc>
+                <a:spcPct val="114000"/>
+              </a:lnSpc>
+              <a:spcBef>
+                <a:spcPts val="0"/>
+              </a:spcBef>
+              <a:spcAft>
+                <a:spcPts val="0"/>
+              </a:spcAft>
+            </a:pPr>
+            <a:r>
+              <a:rPr sz="1600" b="0" lang="en-US">
+                <a:solidFill>
+                  <a:srgbClr val="20262E"/>
+                </a:solidFill>
+                <a:latin typeface="Pretendard"/>
+                <a:ea typeface="Pretendard"/>
+                <a:cs typeface="Pretendard"/>
+              </a:rPr>
+              <a:t>750</a:t>
+            </a:r>
+          </a:p>
+          <a:p>
+            <a:pPr algn="r">
+              <a:lnSpc>
+                <a:spcPct val="114000"/>
+              </a:lnSpc>
+              <a:spcBef>
+                <a:spcPts val="0"/>
+              </a:spcBef>
+              <a:spcAft>
+                <a:spcPts val="0"/>
+              </a:spcAft>
+            </a:pPr>
+            <a:r>
+              <a:rPr sz="1600" b="0" lang="en-US">
+                <a:solidFill>
+                  <a:srgbClr val="20262E"/>
+                </a:solidFill>
+                <a:latin typeface="Pretendard"/>
+                <a:ea typeface="Pretendard"/>
+                <a:cs typeface="Pretendard"/>
+              </a:rPr>
+              <a:t>125</a:t>
+            </a:r>
+          </a:p>
+          <a:p>
+            <a:pPr algn="r">
+              <a:lnSpc>
+                <a:spcPct val="114000"/>
+              </a:lnSpc>
+              <a:spcBef>
+                <a:spcPts val="0"/>
+              </a:spcBef>
+              <a:spcAft>
+                <a:spcPts val="0"/>
+              </a:spcAft>
+            </a:pPr>
+            <a:r>
+              <a:rPr sz="1600" b="0" lang="en-US">
+                <a:solidFill>
+                  <a:srgbClr val="20262E"/>
+                </a:solidFill>
+                <a:latin typeface="Pretendard"/>
+                <a:ea typeface="Pretendard"/>
+                <a:cs typeface="Pretendard"/>
+              </a:rPr>
+              <a:t>125</a:t>
+            </a:r>
+          </a:p>
+        </p:txBody>
+      </p:sp>
+      <p:sp>
+        <p:nvSpPr>
+          <p:cNvPr id="14" name="TextBox 13"/>
+          <p:cNvSpPr txBox="1"/>
+          <p:nvPr/>
+        </p:nvSpPr>
+        <p:spPr>
+          <a:xfrm>
+            <a:off x="4517136" y="2596896"/>
+            <a:ext cx="1316736" cy="740664"/>
+          </a:xfrm>
+          <a:prstGeom prst="rect">
+            <a:avLst/>
+          </a:prstGeom>
+          <a:noFill/>
+        </p:spPr>
+        <p:txBody>
+          <a:bodyPr wrap="none" anchor="t" lIns="0" rIns="0" tIns="0" bIns="0">
+            <a:noAutofit/>
+          </a:bodyPr>
+          <a:lstStyle/>
+          <a:p>
+            <a:pPr algn="r">
+              <a:lnSpc>
+                <a:spcPct val="114000"/>
+              </a:lnSpc>
+              <a:spcBef>
+                <a:spcPts val="0"/>
+              </a:spcBef>
+              <a:spcAft>
+                <a:spcPts val="0"/>
+              </a:spcAft>
+            </a:pPr>
+            <a:r>
+              <a:rPr sz="1600" b="0" lang="en-US">
+                <a:solidFill>
+                  <a:srgbClr val="20262E"/>
+                </a:solidFill>
+                <a:latin typeface="Pretendard"/>
+                <a:ea typeface="Pretendard"/>
+                <a:cs typeface="Pretendard"/>
+              </a:rPr>
+              <a:t>1,000</a:t>
+            </a:r>
+          </a:p>
+        </p:txBody>
+      </p:sp>
+      <p:sp>
+        <p:nvSpPr>
+          <p:cNvPr id="15" name="Rectangle 14"/>
+          <p:cNvSpPr/>
+          <p:nvPr/>
+        </p:nvSpPr>
+        <p:spPr>
+          <a:xfrm>
+            <a:off x="566928" y="3374135"/>
+            <a:ext cx="5340096" cy="448056"/>
+          </a:xfrm>
+          <a:prstGeom prst="rect">
+            <a:avLst/>
+          </a:prstGeom>
+          <a:solidFill>
+            <a:srgbClr val="FFFFFF"/>
+          </a:solidFill>
+          <a:ln>
+            <a:noFill/>
+          </a:ln>
+        </p:spPr>
+        <p:style>
+          <a:lnRef idx="1">
+            <a:schemeClr val="accent1"/>
+          </a:lnRef>
+          <a:fillRef idx="3">
+            <a:schemeClr val="accent1"/>
+          </a:fillRef>
+          <a:effectRef idx="2">
+            <a:schemeClr val="accent1"/>
+          </a:effectRef>
+          <a:fontRef idx="minor">
+            <a:schemeClr val="lt1"/>
+          </a:fontRef>
+        </p:style>
+        <p:txBody>
+          <a:bodyPr rtlCol="0" anchor="ctr"/>
+          <a:lstStyle/>
+          <a:p>
+            <a:pPr algn="ctr"/>
+          </a:p>
+        </p:txBody>
+      </p:sp>
+      <p:sp>
+        <p:nvSpPr>
+          <p:cNvPr id="16" name="TextBox 15"/>
+          <p:cNvSpPr txBox="1"/>
+          <p:nvPr/>
+        </p:nvSpPr>
+        <p:spPr>
+          <a:xfrm>
+            <a:off x="640080" y="3465575"/>
+            <a:ext cx="429768" cy="320040"/>
+          </a:xfrm>
+          <a:prstGeom prst="rect">
+            <a:avLst/>
+          </a:prstGeom>
+          <a:noFill/>
+        </p:spPr>
+        <p:txBody>
+          <a:bodyPr wrap="none" anchor="t" lIns="0" rIns="0" tIns="0" bIns="0">
+            <a:noAutofit/>
+          </a:bodyPr>
+          <a:lstStyle/>
+          <a:p>
+            <a:pPr algn="l">
+              <a:lnSpc>
+                <a:spcPct val="114000"/>
+              </a:lnSpc>
+              <a:spcBef>
+                <a:spcPts val="0"/>
+              </a:spcBef>
+              <a:spcAft>
+                <a:spcPts val="0"/>
+              </a:spcAft>
+            </a:pPr>
+            <a:r>
+              <a:rPr sz="1600" b="0" lang="en-US">
+                <a:solidFill>
+                  <a:srgbClr val="20262E"/>
+                </a:solidFill>
+                <a:latin typeface="Pretendard"/>
+                <a:ea typeface="Pretendard"/>
+                <a:cs typeface="Pretendard"/>
+              </a:rPr>
+              <a:t>2</a:t>
+            </a:r>
+          </a:p>
+        </p:txBody>
+      </p:sp>
+      <p:sp>
+        <p:nvSpPr>
+          <p:cNvPr id="17" name="TextBox 16"/>
+          <p:cNvSpPr txBox="1"/>
+          <p:nvPr/>
+        </p:nvSpPr>
+        <p:spPr>
+          <a:xfrm>
+            <a:off x="1216152" y="3465575"/>
+            <a:ext cx="2240279" cy="320040"/>
+          </a:xfrm>
+          <a:prstGeom prst="rect">
+            <a:avLst/>
+          </a:prstGeom>
+          <a:noFill/>
+        </p:spPr>
+        <p:txBody>
+          <a:bodyPr wrap="none" anchor="t" lIns="0" rIns="0" tIns="0" bIns="0">
+            <a:noAutofit/>
+          </a:bodyPr>
+          <a:lstStyle/>
+          <a:p>
+            <a:pPr algn="l">
+              <a:lnSpc>
+                <a:spcPct val="114000"/>
+              </a:lnSpc>
+              <a:spcBef>
+                <a:spcPts val="0"/>
+              </a:spcBef>
+              <a:spcAft>
+                <a:spcPts val="0"/>
+              </a:spcAft>
+            </a:pPr>
+            <a:r>
+              <a:rPr sz="1600" b="0" lang="en-US">
+                <a:solidFill>
+                  <a:srgbClr val="20262E"/>
+                </a:solidFill>
+                <a:latin typeface="Pretendard"/>
+                <a:ea typeface="Pretendard"/>
+                <a:cs typeface="Pretendard"/>
+              </a:rPr>
+              <a:t>DDoS</a:t>
+            </a:r>
+          </a:p>
+        </p:txBody>
+      </p:sp>
+      <p:sp>
+        <p:nvSpPr>
+          <p:cNvPr id="18" name="TextBox 17"/>
+          <p:cNvSpPr txBox="1"/>
+          <p:nvPr/>
+        </p:nvSpPr>
+        <p:spPr>
+          <a:xfrm>
+            <a:off x="3602736" y="3465575"/>
+            <a:ext cx="768096" cy="320040"/>
+          </a:xfrm>
+          <a:prstGeom prst="rect">
+            <a:avLst/>
+          </a:prstGeom>
+          <a:noFill/>
+        </p:spPr>
+        <p:txBody>
+          <a:bodyPr wrap="none" anchor="t" lIns="0" rIns="0" tIns="0" bIns="0">
+            <a:noAutofit/>
+          </a:bodyPr>
+          <a:lstStyle/>
+          <a:p>
+            <a:pPr algn="r">
+              <a:lnSpc>
+                <a:spcPct val="114000"/>
+              </a:lnSpc>
+              <a:spcBef>
+                <a:spcPts val="0"/>
+              </a:spcBef>
+              <a:spcAft>
+                <a:spcPts val="0"/>
+              </a:spcAft>
+            </a:pPr>
+            <a:r>
+              <a:rPr sz="1600" b="0" lang="en-US">
+                <a:solidFill>
+                  <a:srgbClr val="20262E"/>
+                </a:solidFill>
+                <a:latin typeface="Pretendard"/>
+                <a:ea typeface="Pretendard"/>
+                <a:cs typeface="Pretendard"/>
+              </a:rPr>
+              <a:t>n</a:t>
+            </a:r>
+          </a:p>
+        </p:txBody>
+      </p:sp>
+      <p:sp>
+        <p:nvSpPr>
+          <p:cNvPr id="19" name="TextBox 18"/>
+          <p:cNvSpPr txBox="1"/>
+          <p:nvPr/>
+        </p:nvSpPr>
+        <p:spPr>
+          <a:xfrm>
+            <a:off x="4517136" y="3465575"/>
+            <a:ext cx="1316736" cy="320040"/>
+          </a:xfrm>
+          <a:prstGeom prst="rect">
+            <a:avLst/>
+          </a:prstGeom>
+          <a:noFill/>
+        </p:spPr>
+        <p:txBody>
+          <a:bodyPr wrap="none" anchor="t" lIns="0" rIns="0" tIns="0" bIns="0">
+            <a:noAutofit/>
+          </a:bodyPr>
+          <a:lstStyle/>
+          <a:p>
+            <a:pPr algn="r">
+              <a:lnSpc>
+                <a:spcPct val="114000"/>
+              </a:lnSpc>
+              <a:spcBef>
+                <a:spcPts val="0"/>
+              </a:spcBef>
+              <a:spcAft>
+                <a:spcPts val="0"/>
+              </a:spcAft>
+            </a:pPr>
+            <a:r>
+              <a:rPr sz="1600" b="0" lang="en-US">
+                <a:solidFill>
+                  <a:srgbClr val="20262E"/>
+                </a:solidFill>
+                <a:latin typeface="Pretendard"/>
+                <a:ea typeface="Pretendard"/>
+                <a:cs typeface="Pretendard"/>
+              </a:rPr>
+              <a:t>1,000 + n</a:t>
+            </a:r>
+          </a:p>
+        </p:txBody>
+      </p:sp>
+      <p:sp>
+        <p:nvSpPr>
+          <p:cNvPr id="20" name="Rectangle 19"/>
+          <p:cNvSpPr/>
+          <p:nvPr/>
+        </p:nvSpPr>
+        <p:spPr>
+          <a:xfrm>
+            <a:off x="566928" y="3822191"/>
+            <a:ext cx="5340096" cy="448056"/>
+          </a:xfrm>
+          <a:prstGeom prst="rect">
+            <a:avLst/>
+          </a:prstGeom>
+          <a:solidFill>
+            <a:srgbClr val="F1F5F9"/>
+          </a:solidFill>
+          <a:ln>
+            <a:noFill/>
+          </a:ln>
+        </p:spPr>
+        <p:style>
+          <a:lnRef idx="1">
+            <a:schemeClr val="accent1"/>
+          </a:lnRef>
+          <a:fillRef idx="3">
+            <a:schemeClr val="accent1"/>
+          </a:fillRef>
+          <a:effectRef idx="2">
+            <a:schemeClr val="accent1"/>
+          </a:effectRef>
+          <a:fontRef idx="minor">
+            <a:schemeClr val="lt1"/>
+          </a:fontRef>
+        </p:style>
+        <p:txBody>
+          <a:bodyPr rtlCol="0" anchor="ctr"/>
+          <a:lstStyle/>
+          <a:p>
+            <a:pPr algn="ctr"/>
+          </a:p>
+        </p:txBody>
+      </p:sp>
+      <p:sp>
+        <p:nvSpPr>
+          <p:cNvPr id="21" name="TextBox 20"/>
+          <p:cNvSpPr txBox="1"/>
+          <p:nvPr/>
+        </p:nvSpPr>
+        <p:spPr>
+          <a:xfrm>
+            <a:off x="640080" y="3913631"/>
+            <a:ext cx="429768" cy="320040"/>
+          </a:xfrm>
+          <a:prstGeom prst="rect">
+            <a:avLst/>
+          </a:prstGeom>
+          <a:noFill/>
+        </p:spPr>
+        <p:txBody>
+          <a:bodyPr wrap="none" anchor="t" lIns="0" rIns="0" tIns="0" bIns="0">
+            <a:noAutofit/>
+          </a:bodyPr>
+          <a:lstStyle/>
+          <a:p>
+            <a:pPr algn="l">
+              <a:lnSpc>
+                <a:spcPct val="114000"/>
+              </a:lnSpc>
+              <a:spcBef>
+                <a:spcPts val="0"/>
+              </a:spcBef>
+              <a:spcAft>
+                <a:spcPts val="0"/>
+              </a:spcAft>
+            </a:pPr>
+            <a:r>
+              <a:rPr sz="1600" b="0" lang="en-US">
+                <a:solidFill>
+                  <a:srgbClr val="20262E"/>
+                </a:solidFill>
+                <a:latin typeface="Pretendard"/>
+                <a:ea typeface="Pretendard"/>
+                <a:cs typeface="Pretendard"/>
+              </a:rPr>
+              <a:t>3</a:t>
+            </a:r>
+          </a:p>
+        </p:txBody>
+      </p:sp>
+      <p:sp>
+        <p:nvSpPr>
+          <p:cNvPr id="22" name="TextBox 21"/>
+          <p:cNvSpPr txBox="1"/>
+          <p:nvPr/>
+        </p:nvSpPr>
+        <p:spPr>
+          <a:xfrm>
+            <a:off x="1216152" y="3913631"/>
+            <a:ext cx="2240279" cy="320040"/>
+          </a:xfrm>
+          <a:prstGeom prst="rect">
+            <a:avLst/>
+          </a:prstGeom>
+          <a:noFill/>
+        </p:spPr>
+        <p:txBody>
+          <a:bodyPr wrap="none" anchor="t" lIns="0" rIns="0" tIns="0" bIns="0">
+            <a:noAutofit/>
+          </a:bodyPr>
+          <a:lstStyle/>
+          <a:p>
+            <a:pPr algn="l">
+              <a:lnSpc>
+                <a:spcPct val="114000"/>
+              </a:lnSpc>
+              <a:spcBef>
+                <a:spcPts val="0"/>
+              </a:spcBef>
+              <a:spcAft>
+                <a:spcPts val="0"/>
+              </a:spcAft>
+            </a:pPr>
+            <a:r>
+              <a:rPr sz="1600" b="0" lang="en-US">
+                <a:solidFill>
+                  <a:srgbClr val="20262E"/>
+                </a:solidFill>
+                <a:latin typeface="Pretendard"/>
+                <a:ea typeface="Pretendard"/>
+                <a:cs typeface="Pretendard"/>
+              </a:rPr>
+              <a:t>Web attacks</a:t>
+            </a:r>
+          </a:p>
+        </p:txBody>
+      </p:sp>
+      <p:sp>
+        <p:nvSpPr>
+          <p:cNvPr id="23" name="TextBox 22"/>
+          <p:cNvSpPr txBox="1"/>
+          <p:nvPr/>
+        </p:nvSpPr>
+        <p:spPr>
+          <a:xfrm>
+            <a:off x="3602736" y="3913631"/>
+            <a:ext cx="768096" cy="320040"/>
+          </a:xfrm>
+          <a:prstGeom prst="rect">
+            <a:avLst/>
+          </a:prstGeom>
+          <a:noFill/>
+        </p:spPr>
+        <p:txBody>
+          <a:bodyPr wrap="none" anchor="t" lIns="0" rIns="0" tIns="0" bIns="0">
+            <a:noAutofit/>
+          </a:bodyPr>
+          <a:lstStyle/>
+          <a:p>
+            <a:pPr algn="r">
+              <a:lnSpc>
+                <a:spcPct val="114000"/>
+              </a:lnSpc>
+              <a:spcBef>
+                <a:spcPts val="0"/>
+              </a:spcBef>
+              <a:spcAft>
+                <a:spcPts val="0"/>
+              </a:spcAft>
+            </a:pPr>
+            <a:r>
+              <a:rPr sz="1600" b="0" lang="en-US">
+                <a:solidFill>
+                  <a:srgbClr val="20262E"/>
+                </a:solidFill>
+                <a:latin typeface="Pretendard"/>
+                <a:ea typeface="Pretendard"/>
+                <a:cs typeface="Pretendard"/>
+              </a:rPr>
+              <a:t>n</a:t>
+            </a:r>
+          </a:p>
+        </p:txBody>
+      </p:sp>
+      <p:sp>
+        <p:nvSpPr>
+          <p:cNvPr id="24" name="TextBox 23"/>
+          <p:cNvSpPr txBox="1"/>
+          <p:nvPr/>
+        </p:nvSpPr>
+        <p:spPr>
+          <a:xfrm>
+            <a:off x="4517136" y="3913631"/>
+            <a:ext cx="1316736" cy="320040"/>
+          </a:xfrm>
+          <a:prstGeom prst="rect">
+            <a:avLst/>
+          </a:prstGeom>
+          <a:noFill/>
+        </p:spPr>
+        <p:txBody>
+          <a:bodyPr wrap="none" anchor="t" lIns="0" rIns="0" tIns="0" bIns="0">
+            <a:noAutofit/>
+          </a:bodyPr>
+          <a:lstStyle/>
+          <a:p>
+            <a:pPr algn="r">
+              <a:lnSpc>
+                <a:spcPct val="114000"/>
+              </a:lnSpc>
+              <a:spcBef>
+                <a:spcPts val="0"/>
+              </a:spcBef>
+              <a:spcAft>
+                <a:spcPts val="0"/>
+              </a:spcAft>
+            </a:pPr>
+            <a:r>
+              <a:rPr sz="1600" b="0" lang="en-US">
+                <a:solidFill>
+                  <a:srgbClr val="20262E"/>
+                </a:solidFill>
+                <a:latin typeface="Pretendard"/>
+                <a:ea typeface="Pretendard"/>
+                <a:cs typeface="Pretendard"/>
+              </a:rPr>
+              <a:t>1,000 + 2n</a:t>
+            </a:r>
+          </a:p>
+        </p:txBody>
+      </p:sp>
+      <p:sp>
+        <p:nvSpPr>
+          <p:cNvPr id="25" name="Rectangle 24"/>
+          <p:cNvSpPr/>
+          <p:nvPr/>
+        </p:nvSpPr>
+        <p:spPr>
+          <a:xfrm>
+            <a:off x="566928" y="4270248"/>
+            <a:ext cx="5340096" cy="448056"/>
+          </a:xfrm>
+          <a:prstGeom prst="rect">
+            <a:avLst/>
+          </a:prstGeom>
+          <a:solidFill>
+            <a:srgbClr val="FFFFFF"/>
+          </a:solidFill>
+          <a:ln>
+            <a:noFill/>
+          </a:ln>
+        </p:spPr>
+        <p:style>
+          <a:lnRef idx="1">
+            <a:schemeClr val="accent1"/>
+          </a:lnRef>
+          <a:fillRef idx="3">
+            <a:schemeClr val="accent1"/>
+          </a:fillRef>
+          <a:effectRef idx="2">
+            <a:schemeClr val="accent1"/>
+          </a:effectRef>
+          <a:fontRef idx="minor">
+            <a:schemeClr val="lt1"/>
+          </a:fontRef>
+        </p:style>
+        <p:txBody>
+          <a:bodyPr rtlCol="0" anchor="ctr"/>
+          <a:lstStyle/>
+          <a:p>
+            <a:pPr algn="ctr"/>
+          </a:p>
+        </p:txBody>
+      </p:sp>
+      <p:sp>
+        <p:nvSpPr>
+          <p:cNvPr id="26" name="TextBox 25"/>
+          <p:cNvSpPr txBox="1"/>
+          <p:nvPr/>
+        </p:nvSpPr>
+        <p:spPr>
+          <a:xfrm>
+            <a:off x="640080" y="4361688"/>
+            <a:ext cx="429768" cy="320040"/>
+          </a:xfrm>
+          <a:prstGeom prst="rect">
+            <a:avLst/>
+          </a:prstGeom>
+          <a:noFill/>
+        </p:spPr>
+        <p:txBody>
+          <a:bodyPr wrap="none" anchor="t" lIns="0" rIns="0" tIns="0" bIns="0">
+            <a:noAutofit/>
+          </a:bodyPr>
+          <a:lstStyle/>
+          <a:p>
+            <a:pPr algn="l">
+              <a:lnSpc>
+                <a:spcPct val="114000"/>
+              </a:lnSpc>
+              <a:spcBef>
+                <a:spcPts val="0"/>
+              </a:spcBef>
+              <a:spcAft>
+                <a:spcPts val="0"/>
+              </a:spcAft>
+            </a:pPr>
+            <a:r>
+              <a:rPr sz="1600" b="0" lang="en-US">
+                <a:solidFill>
+                  <a:srgbClr val="20262E"/>
+                </a:solidFill>
+                <a:latin typeface="Pretendard"/>
+                <a:ea typeface="Pretendard"/>
+                <a:cs typeface="Pretendard"/>
+              </a:rPr>
+              <a:t>4</a:t>
+            </a:r>
+          </a:p>
+        </p:txBody>
+      </p:sp>
+      <p:sp>
+        <p:nvSpPr>
+          <p:cNvPr id="27" name="TextBox 26"/>
+          <p:cNvSpPr txBox="1"/>
+          <p:nvPr/>
+        </p:nvSpPr>
+        <p:spPr>
+          <a:xfrm>
+            <a:off x="1216152" y="4361688"/>
+            <a:ext cx="2240279" cy="320040"/>
+          </a:xfrm>
+          <a:prstGeom prst="rect">
+            <a:avLst/>
+          </a:prstGeom>
+          <a:noFill/>
+        </p:spPr>
+        <p:txBody>
+          <a:bodyPr wrap="none" anchor="t" lIns="0" rIns="0" tIns="0" bIns="0">
+            <a:noAutofit/>
+          </a:bodyPr>
+          <a:lstStyle/>
+          <a:p>
+            <a:pPr algn="l">
+              <a:lnSpc>
+                <a:spcPct val="114000"/>
+              </a:lnSpc>
+              <a:spcBef>
+                <a:spcPts val="0"/>
+              </a:spcBef>
+              <a:spcAft>
+                <a:spcPts val="0"/>
+              </a:spcAft>
+            </a:pPr>
+            <a:r>
+              <a:rPr sz="1600" b="0" lang="en-US">
+                <a:solidFill>
+                  <a:srgbClr val="20262E"/>
+                </a:solidFill>
+                <a:latin typeface="Pretendard"/>
+                <a:ea typeface="Pretendard"/>
+                <a:cs typeface="Pretendard"/>
+              </a:rPr>
+              <a:t>Infiltration</a:t>
+            </a:r>
+          </a:p>
+        </p:txBody>
+      </p:sp>
+      <p:sp>
+        <p:nvSpPr>
+          <p:cNvPr id="28" name="TextBox 27"/>
+          <p:cNvSpPr txBox="1"/>
+          <p:nvPr/>
+        </p:nvSpPr>
+        <p:spPr>
+          <a:xfrm>
+            <a:off x="3602736" y="4361688"/>
+            <a:ext cx="768096" cy="320040"/>
+          </a:xfrm>
+          <a:prstGeom prst="rect">
+            <a:avLst/>
+          </a:prstGeom>
+          <a:noFill/>
+        </p:spPr>
+        <p:txBody>
+          <a:bodyPr wrap="none" anchor="t" lIns="0" rIns="0" tIns="0" bIns="0">
+            <a:noAutofit/>
+          </a:bodyPr>
+          <a:lstStyle/>
+          <a:p>
+            <a:pPr algn="r">
+              <a:lnSpc>
+                <a:spcPct val="114000"/>
+              </a:lnSpc>
+              <a:spcBef>
+                <a:spcPts val="0"/>
+              </a:spcBef>
+              <a:spcAft>
+                <a:spcPts val="0"/>
+              </a:spcAft>
+            </a:pPr>
+            <a:r>
+              <a:rPr sz="1600" b="0" lang="en-US">
+                <a:solidFill>
+                  <a:srgbClr val="20262E"/>
+                </a:solidFill>
+                <a:latin typeface="Pretendard"/>
+                <a:ea typeface="Pretendard"/>
+                <a:cs typeface="Pretendard"/>
+              </a:rPr>
+              <a:t>n</a:t>
+            </a:r>
+          </a:p>
+        </p:txBody>
+      </p:sp>
+      <p:sp>
+        <p:nvSpPr>
+          <p:cNvPr id="29" name="TextBox 28"/>
+          <p:cNvSpPr txBox="1"/>
+          <p:nvPr/>
+        </p:nvSpPr>
+        <p:spPr>
+          <a:xfrm>
+            <a:off x="4517136" y="4361688"/>
+            <a:ext cx="1316736" cy="320040"/>
+          </a:xfrm>
+          <a:prstGeom prst="rect">
+            <a:avLst/>
+          </a:prstGeom>
+          <a:noFill/>
+        </p:spPr>
+        <p:txBody>
+          <a:bodyPr wrap="none" anchor="t" lIns="0" rIns="0" tIns="0" bIns="0">
+            <a:noAutofit/>
+          </a:bodyPr>
+          <a:lstStyle/>
+          <a:p>
+            <a:pPr algn="r">
+              <a:lnSpc>
+                <a:spcPct val="114000"/>
+              </a:lnSpc>
+              <a:spcBef>
+                <a:spcPts val="0"/>
+              </a:spcBef>
+              <a:spcAft>
+                <a:spcPts val="0"/>
+              </a:spcAft>
+            </a:pPr>
+            <a:r>
+              <a:rPr sz="1600" b="0" lang="en-US">
+                <a:solidFill>
+                  <a:srgbClr val="20262E"/>
+                </a:solidFill>
+                <a:latin typeface="Pretendard"/>
+                <a:ea typeface="Pretendard"/>
+                <a:cs typeface="Pretendard"/>
+              </a:rPr>
+              <a:t>1,000 + 3n</a:t>
+            </a:r>
+          </a:p>
+        </p:txBody>
+      </p:sp>
+      <p:sp>
+        <p:nvSpPr>
+          <p:cNvPr id="30" name="Rectangle 29"/>
+          <p:cNvSpPr/>
+          <p:nvPr/>
+        </p:nvSpPr>
+        <p:spPr>
+          <a:xfrm>
+            <a:off x="566928" y="4718304"/>
+            <a:ext cx="5340096" cy="448056"/>
+          </a:xfrm>
+          <a:prstGeom prst="rect">
+            <a:avLst/>
+          </a:prstGeom>
+          <a:solidFill>
+            <a:srgbClr val="F1F5F9"/>
+          </a:solidFill>
+          <a:ln>
+            <a:noFill/>
+          </a:ln>
+        </p:spPr>
+        <p:style>
+          <a:lnRef idx="1">
+            <a:schemeClr val="accent1"/>
+          </a:lnRef>
+          <a:fillRef idx="3">
+            <a:schemeClr val="accent1"/>
+          </a:fillRef>
+          <a:effectRef idx="2">
+            <a:schemeClr val="accent1"/>
+          </a:effectRef>
+          <a:fontRef idx="minor">
+            <a:schemeClr val="lt1"/>
+          </a:fontRef>
+        </p:style>
+        <p:txBody>
+          <a:bodyPr rtlCol="0" anchor="ctr"/>
+          <a:lstStyle/>
+          <a:p>
+            <a:pPr algn="ctr"/>
+          </a:p>
+        </p:txBody>
+      </p:sp>
+      <p:sp>
+        <p:nvSpPr>
+          <p:cNvPr id="31" name="TextBox 30"/>
+          <p:cNvSpPr txBox="1"/>
+          <p:nvPr/>
+        </p:nvSpPr>
+        <p:spPr>
+          <a:xfrm>
+            <a:off x="640080" y="4809744"/>
+            <a:ext cx="429768" cy="320040"/>
+          </a:xfrm>
+          <a:prstGeom prst="rect">
+            <a:avLst/>
+          </a:prstGeom>
+          <a:noFill/>
+        </p:spPr>
+        <p:txBody>
+          <a:bodyPr wrap="none" anchor="t" lIns="0" rIns="0" tIns="0" bIns="0">
+            <a:noAutofit/>
+          </a:bodyPr>
+          <a:lstStyle/>
+          <a:p>
+            <a:pPr algn="l">
+              <a:lnSpc>
+                <a:spcPct val="114000"/>
+              </a:lnSpc>
+              <a:spcBef>
+                <a:spcPts val="0"/>
+              </a:spcBef>
+              <a:spcAft>
+                <a:spcPts val="0"/>
+              </a:spcAft>
+            </a:pPr>
+            <a:r>
+              <a:rPr sz="1600" b="0" lang="en-US">
+                <a:solidFill>
+                  <a:srgbClr val="20262E"/>
+                </a:solidFill>
+                <a:latin typeface="Pretendard"/>
+                <a:ea typeface="Pretendard"/>
+                <a:cs typeface="Pretendard"/>
+              </a:rPr>
+              <a:t>5</a:t>
+            </a:r>
+          </a:p>
+        </p:txBody>
+      </p:sp>
+      <p:sp>
+        <p:nvSpPr>
+          <p:cNvPr id="32" name="TextBox 31"/>
+          <p:cNvSpPr txBox="1"/>
+          <p:nvPr/>
+        </p:nvSpPr>
+        <p:spPr>
+          <a:xfrm>
+            <a:off x="1216152" y="4809744"/>
+            <a:ext cx="2240279" cy="320040"/>
+          </a:xfrm>
+          <a:prstGeom prst="rect">
+            <a:avLst/>
+          </a:prstGeom>
+          <a:noFill/>
+        </p:spPr>
+        <p:txBody>
+          <a:bodyPr wrap="none" anchor="t" lIns="0" rIns="0" tIns="0" bIns="0">
+            <a:noAutofit/>
+          </a:bodyPr>
+          <a:lstStyle/>
+          <a:p>
+            <a:pPr algn="l">
+              <a:lnSpc>
+                <a:spcPct val="114000"/>
+              </a:lnSpc>
+              <a:spcBef>
+                <a:spcPts val="0"/>
+              </a:spcBef>
+              <a:spcAft>
+                <a:spcPts val="0"/>
+              </a:spcAft>
+            </a:pPr>
+            <a:r>
+              <a:rPr sz="1600" b="0" lang="en-US">
+                <a:solidFill>
+                  <a:srgbClr val="20262E"/>
+                </a:solidFill>
+                <a:latin typeface="Pretendard"/>
+                <a:ea typeface="Pretendard"/>
+                <a:cs typeface="Pretendard"/>
+              </a:rPr>
+              <a:t>Bot</a:t>
+            </a:r>
+          </a:p>
+        </p:txBody>
+      </p:sp>
+      <p:sp>
+        <p:nvSpPr>
+          <p:cNvPr id="33" name="TextBox 32"/>
+          <p:cNvSpPr txBox="1"/>
+          <p:nvPr/>
+        </p:nvSpPr>
+        <p:spPr>
+          <a:xfrm>
+            <a:off x="3602736" y="4809744"/>
+            <a:ext cx="768096" cy="320040"/>
+          </a:xfrm>
+          <a:prstGeom prst="rect">
+            <a:avLst/>
+          </a:prstGeom>
+          <a:noFill/>
+        </p:spPr>
+        <p:txBody>
+          <a:bodyPr wrap="none" anchor="t" lIns="0" rIns="0" tIns="0" bIns="0">
+            <a:noAutofit/>
+          </a:bodyPr>
+          <a:lstStyle/>
+          <a:p>
+            <a:pPr algn="r">
+              <a:lnSpc>
+                <a:spcPct val="114000"/>
+              </a:lnSpc>
+              <a:spcBef>
+                <a:spcPts val="0"/>
+              </a:spcBef>
+              <a:spcAft>
+                <a:spcPts val="0"/>
+              </a:spcAft>
+            </a:pPr>
+            <a:r>
+              <a:rPr sz="1600" b="0" lang="en-US">
+                <a:solidFill>
+                  <a:srgbClr val="20262E"/>
+                </a:solidFill>
+                <a:latin typeface="Pretendard"/>
+                <a:ea typeface="Pretendard"/>
+                <a:cs typeface="Pretendard"/>
+              </a:rPr>
+              <a:t>n</a:t>
+            </a:r>
+          </a:p>
+        </p:txBody>
+      </p:sp>
+      <p:sp>
+        <p:nvSpPr>
+          <p:cNvPr id="34" name="TextBox 33"/>
+          <p:cNvSpPr txBox="1"/>
+          <p:nvPr/>
+        </p:nvSpPr>
+        <p:spPr>
+          <a:xfrm>
+            <a:off x="4517136" y="4809744"/>
+            <a:ext cx="1316736" cy="320040"/>
+          </a:xfrm>
+          <a:prstGeom prst="rect">
+            <a:avLst/>
+          </a:prstGeom>
+          <a:noFill/>
+        </p:spPr>
+        <p:txBody>
+          <a:bodyPr wrap="none" anchor="t" lIns="0" rIns="0" tIns="0" bIns="0">
+            <a:noAutofit/>
+          </a:bodyPr>
+          <a:lstStyle/>
+          <a:p>
+            <a:pPr algn="r">
+              <a:lnSpc>
+                <a:spcPct val="114000"/>
+              </a:lnSpc>
+              <a:spcBef>
+                <a:spcPts val="0"/>
+              </a:spcBef>
+              <a:spcAft>
+                <a:spcPts val="0"/>
+              </a:spcAft>
+            </a:pPr>
+            <a:r>
+              <a:rPr sz="1600" b="0" lang="en-US">
+                <a:solidFill>
+                  <a:srgbClr val="20262E"/>
+                </a:solidFill>
+                <a:latin typeface="Pretendard"/>
+                <a:ea typeface="Pretendard"/>
+                <a:cs typeface="Pretendard"/>
+              </a:rPr>
+              <a:t>1,000 + 4n</a:t>
+            </a:r>
+          </a:p>
+        </p:txBody>
+      </p:sp>
+      <p:sp>
+        <p:nvSpPr>
+          <p:cNvPr id="35" name="TextBox 34"/>
+          <p:cNvSpPr txBox="1"/>
+          <p:nvPr/>
+        </p:nvSpPr>
+        <p:spPr>
+          <a:xfrm>
+            <a:off x="6291072" y="1600200"/>
+            <a:ext cx="5340096" cy="352973"/>
+          </a:xfrm>
+          <a:prstGeom prst="rect">
+            <a:avLst/>
+          </a:prstGeom>
+          <a:noFill/>
+        </p:spPr>
+        <p:txBody>
+          <a:bodyPr wrap="none" anchor="t" lIns="0" rIns="0" tIns="0" bIns="0">
+            <a:noAutofit/>
+          </a:bodyPr>
+          <a:lstStyle/>
+          <a:p>
+            <a:pPr algn="l">
+              <a:lnSpc>
+                <a:spcPct val="114000"/>
+              </a:lnSpc>
+              <a:spcBef>
+                <a:spcPts val="0"/>
+              </a:spcBef>
+              <a:spcAft>
+                <a:spcPts val="0"/>
+              </a:spcAft>
+            </a:pPr>
+            <a:r>
+              <a:rPr sz="2300" b="1" lang="en-US">
+                <a:solidFill>
+                  <a:srgbClr val="007BC6"/>
+                </a:solidFill>
+                <a:latin typeface="Pretendard"/>
+                <a:ea typeface="Pretendard"/>
+                <a:cs typeface="Pretendard"/>
+              </a:rPr>
+              <a:t>ToN-IoT</a:t>
+            </a:r>
+          </a:p>
+        </p:txBody>
+      </p:sp>
+      <p:sp>
+        <p:nvSpPr>
+          <p:cNvPr id="36" name="Rectangle 35"/>
+          <p:cNvSpPr/>
+          <p:nvPr/>
+        </p:nvSpPr>
+        <p:spPr>
+          <a:xfrm>
+            <a:off x="6291072" y="2084831"/>
+            <a:ext cx="5340096" cy="420624"/>
+          </a:xfrm>
+          <a:prstGeom prst="rect">
+            <a:avLst/>
+          </a:prstGeom>
+          <a:solidFill>
+            <a:srgbClr val="00306C"/>
+          </a:solidFill>
+          <a:ln>
+            <a:noFill/>
+          </a:ln>
+        </p:spPr>
+        <p:style>
+          <a:lnRef idx="1">
+            <a:schemeClr val="accent1"/>
+          </a:lnRef>
+          <a:fillRef idx="3">
+            <a:schemeClr val="accent1"/>
+          </a:fillRef>
+          <a:effectRef idx="2">
+            <a:schemeClr val="accent1"/>
+          </a:effectRef>
+          <a:fontRef idx="minor">
+            <a:schemeClr val="lt1"/>
+          </a:fontRef>
+        </p:style>
+        <p:txBody>
+          <a:bodyPr rtlCol="0" anchor="ctr"/>
+          <a:lstStyle/>
+          <a:p>
+            <a:pPr algn="ctr"/>
+          </a:p>
+        </p:txBody>
+      </p:sp>
+      <p:sp>
+        <p:nvSpPr>
+          <p:cNvPr id="37" name="TextBox 36"/>
+          <p:cNvSpPr txBox="1"/>
+          <p:nvPr/>
+        </p:nvSpPr>
+        <p:spPr>
+          <a:xfrm>
+            <a:off x="6345936" y="2176272"/>
+            <a:ext cx="466344" cy="228600"/>
+          </a:xfrm>
+          <a:prstGeom prst="rect">
+            <a:avLst/>
+          </a:prstGeom>
+          <a:noFill/>
+        </p:spPr>
+        <p:txBody>
+          <a:bodyPr wrap="none" anchor="t" lIns="0" rIns="0" tIns="0" bIns="0">
+            <a:noAutofit/>
+          </a:bodyPr>
+          <a:lstStyle/>
+          <a:p>
+            <a:pPr algn="l">
+              <a:lnSpc>
+                <a:spcPct val="114000"/>
+              </a:lnSpc>
+              <a:spcBef>
+                <a:spcPts val="0"/>
+              </a:spcBef>
+              <a:spcAft>
+                <a:spcPts val="0"/>
+              </a:spcAft>
+            </a:pPr>
+            <a:r>
+              <a:rPr sz="1400" b="1" lang="en-US">
+                <a:solidFill>
+                  <a:srgbClr val="FFFFFF"/>
+                </a:solidFill>
+                <a:latin typeface="Pretendard"/>
+                <a:ea typeface="Pretendard"/>
+                <a:cs typeface="Pretendard"/>
+              </a:rPr>
+              <a:t>Stage</a:t>
+            </a:r>
+          </a:p>
+        </p:txBody>
+      </p:sp>
+      <p:sp>
+        <p:nvSpPr>
+          <p:cNvPr id="38" name="TextBox 37"/>
+          <p:cNvSpPr txBox="1"/>
+          <p:nvPr/>
+        </p:nvSpPr>
+        <p:spPr>
+          <a:xfrm>
+            <a:off x="6922007" y="2176272"/>
+            <a:ext cx="2276856" cy="228600"/>
+          </a:xfrm>
+          <a:prstGeom prst="rect">
+            <a:avLst/>
+          </a:prstGeom>
+          <a:noFill/>
+        </p:spPr>
+        <p:txBody>
+          <a:bodyPr wrap="none" anchor="t" lIns="0" rIns="0" tIns="0" bIns="0">
+            <a:noAutofit/>
+          </a:bodyPr>
+          <a:lstStyle/>
+          <a:p>
+            <a:pPr algn="l">
+              <a:lnSpc>
+                <a:spcPct val="114000"/>
+              </a:lnSpc>
+              <a:spcBef>
+                <a:spcPts val="0"/>
+              </a:spcBef>
+              <a:spcAft>
+                <a:spcPts val="0"/>
+              </a:spcAft>
+            </a:pPr>
+            <a:r>
+              <a:rPr sz="1400" b="1" lang="en-US">
+                <a:solidFill>
+                  <a:srgbClr val="FFFFFF"/>
+                </a:solidFill>
+                <a:latin typeface="Pretendard"/>
+                <a:ea typeface="Pretendard"/>
+                <a:cs typeface="Pretendard"/>
+              </a:rPr>
+              <a:t>Newly supplied class</a:t>
+            </a:r>
+          </a:p>
+        </p:txBody>
+      </p:sp>
+      <p:sp>
+        <p:nvSpPr>
+          <p:cNvPr id="39" name="TextBox 38"/>
+          <p:cNvSpPr txBox="1"/>
+          <p:nvPr/>
+        </p:nvSpPr>
+        <p:spPr>
+          <a:xfrm>
+            <a:off x="9308592" y="2176272"/>
+            <a:ext cx="804672" cy="228600"/>
+          </a:xfrm>
+          <a:prstGeom prst="rect">
+            <a:avLst/>
+          </a:prstGeom>
+          <a:noFill/>
+        </p:spPr>
+        <p:txBody>
+          <a:bodyPr wrap="none" anchor="t" lIns="0" rIns="0" tIns="0" bIns="0">
+            <a:noAutofit/>
+          </a:bodyPr>
+          <a:lstStyle/>
+          <a:p>
+            <a:pPr algn="r">
+              <a:lnSpc>
+                <a:spcPct val="114000"/>
+              </a:lnSpc>
+              <a:spcBef>
+                <a:spcPts val="0"/>
+              </a:spcBef>
+              <a:spcAft>
+                <a:spcPts val="0"/>
+              </a:spcAft>
+            </a:pPr>
+            <a:r>
+              <a:rPr sz="1400" b="1" lang="en-US">
+                <a:solidFill>
+                  <a:srgbClr val="FFFFFF"/>
+                </a:solidFill>
+                <a:latin typeface="Pretendard"/>
+                <a:ea typeface="Pretendard"/>
+                <a:cs typeface="Pretendard"/>
+              </a:rPr>
+              <a:t>Per class</a:t>
+            </a:r>
+          </a:p>
+        </p:txBody>
+      </p:sp>
+      <p:sp>
+        <p:nvSpPr>
+          <p:cNvPr id="40" name="TextBox 39"/>
+          <p:cNvSpPr txBox="1"/>
+          <p:nvPr/>
+        </p:nvSpPr>
+        <p:spPr>
+          <a:xfrm>
+            <a:off x="10222992" y="2176272"/>
+            <a:ext cx="1353312" cy="228600"/>
+          </a:xfrm>
+          <a:prstGeom prst="rect">
+            <a:avLst/>
+          </a:prstGeom>
+          <a:noFill/>
+        </p:spPr>
+        <p:txBody>
+          <a:bodyPr wrap="none" anchor="t" lIns="0" rIns="0" tIns="0" bIns="0">
+            <a:noAutofit/>
+          </a:bodyPr>
+          <a:lstStyle/>
+          <a:p>
+            <a:pPr algn="r">
+              <a:lnSpc>
+                <a:spcPct val="114000"/>
+              </a:lnSpc>
+              <a:spcBef>
+                <a:spcPts val="0"/>
+              </a:spcBef>
+              <a:spcAft>
+                <a:spcPts val="0"/>
+              </a:spcAft>
+            </a:pPr>
+            <a:r>
+              <a:rPr sz="1400" b="1" lang="en-US">
+                <a:solidFill>
+                  <a:srgbClr val="FFFFFF"/>
+                </a:solidFill>
+                <a:latin typeface="Pretendard"/>
+                <a:ea typeface="Pretendard"/>
+                <a:cs typeface="Pretendard"/>
+              </a:rPr>
+              <a:t>Total so far</a:t>
+            </a:r>
+          </a:p>
+        </p:txBody>
+      </p:sp>
+      <p:sp>
+        <p:nvSpPr>
+          <p:cNvPr id="41" name="Rectangle 40"/>
+          <p:cNvSpPr/>
+          <p:nvPr/>
+        </p:nvSpPr>
+        <p:spPr>
+          <a:xfrm>
+            <a:off x="6291072" y="2505456"/>
+            <a:ext cx="5340096" cy="868680"/>
+          </a:xfrm>
+          <a:prstGeom prst="rect">
+            <a:avLst/>
+          </a:prstGeom>
+          <a:solidFill>
+            <a:srgbClr val="F1F5F9"/>
+          </a:solidFill>
+          <a:ln>
+            <a:noFill/>
+          </a:ln>
+        </p:spPr>
+        <p:style>
+          <a:lnRef idx="1">
+            <a:schemeClr val="accent1"/>
+          </a:lnRef>
+          <a:fillRef idx="3">
+            <a:schemeClr val="accent1"/>
+          </a:fillRef>
+          <a:effectRef idx="2">
+            <a:schemeClr val="accent1"/>
+          </a:effectRef>
+          <a:fontRef idx="minor">
+            <a:schemeClr val="lt1"/>
+          </a:fontRef>
+        </p:style>
+        <p:txBody>
+          <a:bodyPr rtlCol="0" anchor="ctr"/>
+          <a:lstStyle/>
+          <a:p>
+            <a:pPr algn="ctr"/>
+          </a:p>
+        </p:txBody>
+      </p:sp>
+      <p:sp>
+        <p:nvSpPr>
+          <p:cNvPr id="42" name="TextBox 41"/>
+          <p:cNvSpPr txBox="1"/>
+          <p:nvPr/>
+        </p:nvSpPr>
+        <p:spPr>
+          <a:xfrm>
+            <a:off x="6364224" y="2596896"/>
+            <a:ext cx="429768" cy="740664"/>
+          </a:xfrm>
+          <a:prstGeom prst="rect">
+            <a:avLst/>
+          </a:prstGeom>
+          <a:noFill/>
+        </p:spPr>
+        <p:txBody>
+          <a:bodyPr wrap="none" anchor="t" lIns="0" rIns="0" tIns="0" bIns="0">
+            <a:noAutofit/>
+          </a:bodyPr>
+          <a:lstStyle/>
+          <a:p>
+            <a:pPr algn="l">
+              <a:lnSpc>
+                <a:spcPct val="114000"/>
+              </a:lnSpc>
+              <a:spcBef>
+                <a:spcPts val="0"/>
+              </a:spcBef>
+              <a:spcAft>
+                <a:spcPts val="0"/>
+              </a:spcAft>
+            </a:pPr>
+            <a:r>
+              <a:rPr sz="1600" b="0" lang="en-US">
+                <a:solidFill>
+                  <a:srgbClr val="20262E"/>
+                </a:solidFill>
+                <a:latin typeface="Pretendard"/>
+                <a:ea typeface="Pretendard"/>
+                <a:cs typeface="Pretendard"/>
+              </a:rPr>
+              <a:t>1</a:t>
+            </a:r>
+          </a:p>
+        </p:txBody>
+      </p:sp>
+      <p:sp>
+        <p:nvSpPr>
+          <p:cNvPr id="43" name="TextBox 42"/>
+          <p:cNvSpPr txBox="1"/>
+          <p:nvPr/>
+        </p:nvSpPr>
+        <p:spPr>
+          <a:xfrm>
+            <a:off x="6940296" y="2596896"/>
+            <a:ext cx="2240279" cy="740664"/>
+          </a:xfrm>
+          <a:prstGeom prst="rect">
+            <a:avLst/>
+          </a:prstGeom>
+          <a:noFill/>
+        </p:spPr>
+        <p:txBody>
+          <a:bodyPr wrap="none" anchor="t" lIns="0" rIns="0" tIns="0" bIns="0">
+            <a:noAutofit/>
+          </a:bodyPr>
+          <a:lstStyle/>
+          <a:p>
+            <a:pPr algn="l">
+              <a:lnSpc>
+                <a:spcPct val="114000"/>
+              </a:lnSpc>
+              <a:spcBef>
+                <a:spcPts val="0"/>
+              </a:spcBef>
+              <a:spcAft>
+                <a:spcPts val="0"/>
+              </a:spcAft>
+            </a:pPr>
+            <a:r>
+              <a:rPr sz="1600" b="0" lang="en-US">
+                <a:solidFill>
+                  <a:srgbClr val="20262E"/>
+                </a:solidFill>
+                <a:latin typeface="Pretendard"/>
+                <a:ea typeface="Pretendard"/>
+                <a:cs typeface="Pretendard"/>
+              </a:rPr>
+              <a:t>Benign</a:t>
+            </a:r>
+          </a:p>
+          <a:p>
+            <a:pPr algn="l">
+              <a:lnSpc>
+                <a:spcPct val="114000"/>
+              </a:lnSpc>
+              <a:spcBef>
+                <a:spcPts val="0"/>
+              </a:spcBef>
+              <a:spcAft>
+                <a:spcPts val="0"/>
+              </a:spcAft>
+            </a:pPr>
+            <a:r>
+              <a:rPr sz="1600" b="0" lang="en-US">
+                <a:solidFill>
+                  <a:srgbClr val="20262E"/>
+                </a:solidFill>
+                <a:latin typeface="Pretendard"/>
+                <a:ea typeface="Pretendard"/>
+                <a:cs typeface="Pretendard"/>
+              </a:rPr>
+              <a:t>DoS</a:t>
+            </a:r>
+          </a:p>
+          <a:p>
+            <a:pPr algn="l">
+              <a:lnSpc>
+                <a:spcPct val="114000"/>
+              </a:lnSpc>
+              <a:spcBef>
+                <a:spcPts val="0"/>
+              </a:spcBef>
+              <a:spcAft>
+                <a:spcPts val="0"/>
+              </a:spcAft>
+            </a:pPr>
+            <a:r>
+              <a:rPr sz="1600" b="0" lang="en-US">
+                <a:solidFill>
+                  <a:srgbClr val="20262E"/>
+                </a:solidFill>
+                <a:latin typeface="Pretendard"/>
+                <a:ea typeface="Pretendard"/>
+                <a:cs typeface="Pretendard"/>
+              </a:rPr>
+              <a:t>Scanning</a:t>
+            </a:r>
+          </a:p>
+        </p:txBody>
+      </p:sp>
+      <p:sp>
+        <p:nvSpPr>
+          <p:cNvPr id="44" name="TextBox 43"/>
+          <p:cNvSpPr txBox="1"/>
+          <p:nvPr/>
+        </p:nvSpPr>
+        <p:spPr>
+          <a:xfrm>
+            <a:off x="9326880" y="2596896"/>
+            <a:ext cx="768096" cy="740664"/>
+          </a:xfrm>
+          <a:prstGeom prst="rect">
+            <a:avLst/>
+          </a:prstGeom>
+          <a:noFill/>
+        </p:spPr>
+        <p:txBody>
+          <a:bodyPr wrap="none" anchor="t" lIns="0" rIns="0" tIns="0" bIns="0">
+            <a:noAutofit/>
+          </a:bodyPr>
+          <a:lstStyle/>
+          <a:p>
+            <a:pPr algn="r">
+              <a:lnSpc>
+                <a:spcPct val="114000"/>
+              </a:lnSpc>
+              <a:spcBef>
+                <a:spcPts val="0"/>
+              </a:spcBef>
+              <a:spcAft>
+                <a:spcPts val="0"/>
+              </a:spcAft>
+            </a:pPr>
+            <a:r>
+              <a:rPr sz="1600" b="0" lang="en-US">
+                <a:solidFill>
+                  <a:srgbClr val="20262E"/>
+                </a:solidFill>
+                <a:latin typeface="Pretendard"/>
+                <a:ea typeface="Pretendard"/>
+                <a:cs typeface="Pretendard"/>
+              </a:rPr>
+              <a:t>750</a:t>
+            </a:r>
+          </a:p>
+          <a:p>
+            <a:pPr algn="r">
+              <a:lnSpc>
+                <a:spcPct val="114000"/>
+              </a:lnSpc>
+              <a:spcBef>
+                <a:spcPts val="0"/>
+              </a:spcBef>
+              <a:spcAft>
+                <a:spcPts val="0"/>
+              </a:spcAft>
+            </a:pPr>
+            <a:r>
+              <a:rPr sz="1600" b="0" lang="en-US">
+                <a:solidFill>
+                  <a:srgbClr val="20262E"/>
+                </a:solidFill>
+                <a:latin typeface="Pretendard"/>
+                <a:ea typeface="Pretendard"/>
+                <a:cs typeface="Pretendard"/>
+              </a:rPr>
+              <a:t>125</a:t>
+            </a:r>
+          </a:p>
+          <a:p>
+            <a:pPr algn="r">
+              <a:lnSpc>
+                <a:spcPct val="114000"/>
+              </a:lnSpc>
+              <a:spcBef>
+                <a:spcPts val="0"/>
+              </a:spcBef>
+              <a:spcAft>
+                <a:spcPts val="0"/>
+              </a:spcAft>
+            </a:pPr>
+            <a:r>
+              <a:rPr sz="1600" b="0" lang="en-US">
+                <a:solidFill>
+                  <a:srgbClr val="20262E"/>
+                </a:solidFill>
+                <a:latin typeface="Pretendard"/>
+                <a:ea typeface="Pretendard"/>
+                <a:cs typeface="Pretendard"/>
+              </a:rPr>
+              <a:t>125</a:t>
+            </a:r>
+          </a:p>
+        </p:txBody>
+      </p:sp>
+      <p:sp>
+        <p:nvSpPr>
+          <p:cNvPr id="45" name="TextBox 44"/>
+          <p:cNvSpPr txBox="1"/>
+          <p:nvPr/>
+        </p:nvSpPr>
+        <p:spPr>
+          <a:xfrm>
+            <a:off x="10241280" y="2596896"/>
+            <a:ext cx="1316736" cy="740664"/>
+          </a:xfrm>
+          <a:prstGeom prst="rect">
+            <a:avLst/>
+          </a:prstGeom>
+          <a:noFill/>
+        </p:spPr>
+        <p:txBody>
+          <a:bodyPr wrap="none" anchor="t" lIns="0" rIns="0" tIns="0" bIns="0">
+            <a:noAutofit/>
+          </a:bodyPr>
+          <a:lstStyle/>
+          <a:p>
+            <a:pPr algn="r">
+              <a:lnSpc>
+                <a:spcPct val="114000"/>
+              </a:lnSpc>
+              <a:spcBef>
+                <a:spcPts val="0"/>
+              </a:spcBef>
+              <a:spcAft>
+                <a:spcPts val="0"/>
+              </a:spcAft>
+            </a:pPr>
+            <a:r>
+              <a:rPr sz="1600" b="0" lang="en-US">
+                <a:solidFill>
+                  <a:srgbClr val="20262E"/>
+                </a:solidFill>
+                <a:latin typeface="Pretendard"/>
+                <a:ea typeface="Pretendard"/>
+                <a:cs typeface="Pretendard"/>
+              </a:rPr>
+              <a:t>1,000</a:t>
+            </a:r>
+          </a:p>
+        </p:txBody>
+      </p:sp>
+      <p:sp>
+        <p:nvSpPr>
+          <p:cNvPr id="46" name="Rectangle 45"/>
+          <p:cNvSpPr/>
+          <p:nvPr/>
+        </p:nvSpPr>
+        <p:spPr>
+          <a:xfrm>
+            <a:off x="6291072" y="3374135"/>
+            <a:ext cx="5340096" cy="621792"/>
+          </a:xfrm>
+          <a:prstGeom prst="rect">
+            <a:avLst/>
+          </a:prstGeom>
+          <a:solidFill>
+            <a:srgbClr val="FFFFFF"/>
+          </a:solidFill>
+          <a:ln>
+            <a:noFill/>
+          </a:ln>
+        </p:spPr>
+        <p:style>
+          <a:lnRef idx="1">
+            <a:schemeClr val="accent1"/>
+          </a:lnRef>
+          <a:fillRef idx="3">
+            <a:schemeClr val="accent1"/>
+          </a:fillRef>
+          <a:effectRef idx="2">
+            <a:schemeClr val="accent1"/>
+          </a:effectRef>
+          <a:fontRef idx="minor">
+            <a:schemeClr val="lt1"/>
+          </a:fontRef>
+        </p:style>
+        <p:txBody>
+          <a:bodyPr rtlCol="0" anchor="ctr"/>
+          <a:lstStyle/>
+          <a:p>
+            <a:pPr algn="ctr"/>
+          </a:p>
+        </p:txBody>
+      </p:sp>
+      <p:sp>
+        <p:nvSpPr>
+          <p:cNvPr id="47" name="TextBox 46"/>
+          <p:cNvSpPr txBox="1"/>
+          <p:nvPr/>
+        </p:nvSpPr>
+        <p:spPr>
+          <a:xfrm>
+            <a:off x="6364224" y="3465575"/>
+            <a:ext cx="429768" cy="493776"/>
+          </a:xfrm>
+          <a:prstGeom prst="rect">
+            <a:avLst/>
+          </a:prstGeom>
+          <a:noFill/>
+        </p:spPr>
+        <p:txBody>
+          <a:bodyPr wrap="none" anchor="t" lIns="0" rIns="0" tIns="0" bIns="0">
+            <a:noAutofit/>
+          </a:bodyPr>
+          <a:lstStyle/>
+          <a:p>
+            <a:pPr algn="l">
+              <a:lnSpc>
+                <a:spcPct val="114000"/>
+              </a:lnSpc>
+              <a:spcBef>
+                <a:spcPts val="0"/>
+              </a:spcBef>
+              <a:spcAft>
+                <a:spcPts val="0"/>
+              </a:spcAft>
+            </a:pPr>
+            <a:r>
+              <a:rPr sz="1600" b="0" lang="en-US">
+                <a:solidFill>
+                  <a:srgbClr val="20262E"/>
+                </a:solidFill>
+                <a:latin typeface="Pretendard"/>
+                <a:ea typeface="Pretendard"/>
+                <a:cs typeface="Pretendard"/>
+              </a:rPr>
+              <a:t>2</a:t>
+            </a:r>
+          </a:p>
+        </p:txBody>
+      </p:sp>
+      <p:sp>
+        <p:nvSpPr>
+          <p:cNvPr id="48" name="TextBox 47"/>
+          <p:cNvSpPr txBox="1"/>
+          <p:nvPr/>
+        </p:nvSpPr>
+        <p:spPr>
+          <a:xfrm>
+            <a:off x="6940296" y="3465575"/>
+            <a:ext cx="2240279" cy="493776"/>
+          </a:xfrm>
+          <a:prstGeom prst="rect">
+            <a:avLst/>
+          </a:prstGeom>
+          <a:noFill/>
+        </p:spPr>
+        <p:txBody>
+          <a:bodyPr wrap="none" anchor="t" lIns="0" rIns="0" tIns="0" bIns="0">
+            <a:noAutofit/>
+          </a:bodyPr>
+          <a:lstStyle/>
+          <a:p>
+            <a:pPr algn="l">
+              <a:lnSpc>
+                <a:spcPct val="114000"/>
+              </a:lnSpc>
+              <a:spcBef>
+                <a:spcPts val="0"/>
+              </a:spcBef>
+              <a:spcAft>
+                <a:spcPts val="0"/>
+              </a:spcAft>
+            </a:pPr>
+            <a:r>
+              <a:rPr sz="1600" b="0" lang="en-US">
+                <a:solidFill>
+                  <a:srgbClr val="20262E"/>
+                </a:solidFill>
+                <a:latin typeface="Pretendard"/>
+                <a:ea typeface="Pretendard"/>
+                <a:cs typeface="Pretendard"/>
+              </a:rPr>
+              <a:t>DDoS</a:t>
+            </a:r>
+          </a:p>
+          <a:p>
+            <a:pPr algn="l">
+              <a:lnSpc>
+                <a:spcPct val="114000"/>
+              </a:lnSpc>
+              <a:spcBef>
+                <a:spcPts val="0"/>
+              </a:spcBef>
+              <a:spcAft>
+                <a:spcPts val="0"/>
+              </a:spcAft>
+            </a:pPr>
+            <a:r>
+              <a:rPr sz="1600" b="0" lang="en-US">
+                <a:solidFill>
+                  <a:srgbClr val="20262E"/>
+                </a:solidFill>
+                <a:latin typeface="Pretendard"/>
+                <a:ea typeface="Pretendard"/>
+                <a:cs typeface="Pretendard"/>
+              </a:rPr>
+              <a:t>Injection</a:t>
+            </a:r>
+          </a:p>
+        </p:txBody>
+      </p:sp>
+      <p:sp>
+        <p:nvSpPr>
+          <p:cNvPr id="49" name="TextBox 48"/>
+          <p:cNvSpPr txBox="1"/>
+          <p:nvPr/>
+        </p:nvSpPr>
+        <p:spPr>
+          <a:xfrm>
+            <a:off x="9326880" y="3465575"/>
+            <a:ext cx="768096" cy="493776"/>
+          </a:xfrm>
+          <a:prstGeom prst="rect">
+            <a:avLst/>
+          </a:prstGeom>
+          <a:noFill/>
+        </p:spPr>
+        <p:txBody>
+          <a:bodyPr wrap="none" anchor="t" lIns="0" rIns="0" tIns="0" bIns="0">
+            <a:noAutofit/>
+          </a:bodyPr>
+          <a:lstStyle/>
+          <a:p>
+            <a:pPr algn="r">
+              <a:lnSpc>
+                <a:spcPct val="114000"/>
+              </a:lnSpc>
+              <a:spcBef>
+                <a:spcPts val="0"/>
+              </a:spcBef>
+              <a:spcAft>
+                <a:spcPts val="0"/>
+              </a:spcAft>
+            </a:pPr>
+            <a:r>
+              <a:rPr sz="1600" b="0" lang="en-US">
+                <a:solidFill>
+                  <a:srgbClr val="20262E"/>
+                </a:solidFill>
+                <a:latin typeface="Pretendard"/>
+                <a:ea typeface="Pretendard"/>
+                <a:cs typeface="Pretendard"/>
+              </a:rPr>
+              <a:t>n</a:t>
+            </a:r>
+          </a:p>
+          <a:p>
+            <a:pPr algn="r">
+              <a:lnSpc>
+                <a:spcPct val="114000"/>
+              </a:lnSpc>
+              <a:spcBef>
+                <a:spcPts val="0"/>
+              </a:spcBef>
+              <a:spcAft>
+                <a:spcPts val="0"/>
+              </a:spcAft>
+            </a:pPr>
+            <a:r>
+              <a:rPr sz="1600" b="0" lang="en-US">
+                <a:solidFill>
+                  <a:srgbClr val="20262E"/>
+                </a:solidFill>
+                <a:latin typeface="Pretendard"/>
+                <a:ea typeface="Pretendard"/>
+                <a:cs typeface="Pretendard"/>
+              </a:rPr>
+              <a:t>n</a:t>
+            </a:r>
+          </a:p>
+        </p:txBody>
+      </p:sp>
+      <p:sp>
+        <p:nvSpPr>
+          <p:cNvPr id="50" name="TextBox 49"/>
+          <p:cNvSpPr txBox="1"/>
+          <p:nvPr/>
+        </p:nvSpPr>
+        <p:spPr>
+          <a:xfrm>
+            <a:off x="10241280" y="3465575"/>
+            <a:ext cx="1316736" cy="493776"/>
+          </a:xfrm>
+          <a:prstGeom prst="rect">
+            <a:avLst/>
+          </a:prstGeom>
+          <a:noFill/>
+        </p:spPr>
+        <p:txBody>
+          <a:bodyPr wrap="none" anchor="t" lIns="0" rIns="0" tIns="0" bIns="0">
+            <a:noAutofit/>
+          </a:bodyPr>
+          <a:lstStyle/>
+          <a:p>
+            <a:pPr algn="r">
+              <a:lnSpc>
+                <a:spcPct val="114000"/>
+              </a:lnSpc>
+              <a:spcBef>
+                <a:spcPts val="0"/>
+              </a:spcBef>
+              <a:spcAft>
+                <a:spcPts val="0"/>
+              </a:spcAft>
+            </a:pPr>
+            <a:r>
+              <a:rPr sz="1600" b="0" lang="en-US">
+                <a:solidFill>
+                  <a:srgbClr val="20262E"/>
+                </a:solidFill>
+                <a:latin typeface="Pretendard"/>
+                <a:ea typeface="Pretendard"/>
+                <a:cs typeface="Pretendard"/>
+              </a:rPr>
+              <a:t>1,000 + 2n</a:t>
+            </a:r>
+          </a:p>
+        </p:txBody>
+      </p:sp>
+      <p:sp>
+        <p:nvSpPr>
+          <p:cNvPr id="51" name="Rectangle 50"/>
+          <p:cNvSpPr/>
+          <p:nvPr/>
+        </p:nvSpPr>
+        <p:spPr>
+          <a:xfrm>
+            <a:off x="6291072" y="3995927"/>
+            <a:ext cx="5340096" cy="448056"/>
+          </a:xfrm>
+          <a:prstGeom prst="rect">
+            <a:avLst/>
+          </a:prstGeom>
+          <a:solidFill>
+            <a:srgbClr val="F1F5F9"/>
+          </a:solidFill>
+          <a:ln>
+            <a:noFill/>
+          </a:ln>
+        </p:spPr>
+        <p:style>
+          <a:lnRef idx="1">
+            <a:schemeClr val="accent1"/>
+          </a:lnRef>
+          <a:fillRef idx="3">
+            <a:schemeClr val="accent1"/>
+          </a:fillRef>
+          <a:effectRef idx="2">
+            <a:schemeClr val="accent1"/>
+          </a:effectRef>
+          <a:fontRef idx="minor">
+            <a:schemeClr val="lt1"/>
+          </a:fontRef>
+        </p:style>
+        <p:txBody>
+          <a:bodyPr rtlCol="0" anchor="ctr"/>
+          <a:lstStyle/>
+          <a:p>
+            <a:pPr algn="ctr"/>
+          </a:p>
+        </p:txBody>
+      </p:sp>
+      <p:sp>
+        <p:nvSpPr>
+          <p:cNvPr id="52" name="TextBox 51"/>
+          <p:cNvSpPr txBox="1"/>
+          <p:nvPr/>
+        </p:nvSpPr>
+        <p:spPr>
+          <a:xfrm>
+            <a:off x="6364224" y="4087367"/>
+            <a:ext cx="429768" cy="320040"/>
+          </a:xfrm>
+          <a:prstGeom prst="rect">
+            <a:avLst/>
+          </a:prstGeom>
+          <a:noFill/>
+        </p:spPr>
+        <p:txBody>
+          <a:bodyPr wrap="none" anchor="t" lIns="0" rIns="0" tIns="0" bIns="0">
+            <a:noAutofit/>
+          </a:bodyPr>
+          <a:lstStyle/>
+          <a:p>
+            <a:pPr algn="l">
+              <a:lnSpc>
+                <a:spcPct val="114000"/>
+              </a:lnSpc>
+              <a:spcBef>
+                <a:spcPts val="0"/>
+              </a:spcBef>
+              <a:spcAft>
+                <a:spcPts val="0"/>
+              </a:spcAft>
+            </a:pPr>
+            <a:r>
+              <a:rPr sz="1600" b="0" lang="en-US">
+                <a:solidFill>
+                  <a:srgbClr val="20262E"/>
+                </a:solidFill>
+                <a:latin typeface="Pretendard"/>
+                <a:ea typeface="Pretendard"/>
+                <a:cs typeface="Pretendard"/>
+              </a:rPr>
+              <a:t>3</a:t>
+            </a:r>
+          </a:p>
+        </p:txBody>
+      </p:sp>
+      <p:sp>
+        <p:nvSpPr>
+          <p:cNvPr id="53" name="TextBox 52"/>
+          <p:cNvSpPr txBox="1"/>
+          <p:nvPr/>
+        </p:nvSpPr>
+        <p:spPr>
+          <a:xfrm>
+            <a:off x="6940296" y="4087367"/>
+            <a:ext cx="2240279" cy="320040"/>
+          </a:xfrm>
+          <a:prstGeom prst="rect">
+            <a:avLst/>
+          </a:prstGeom>
+          <a:noFill/>
+        </p:spPr>
+        <p:txBody>
+          <a:bodyPr wrap="none" anchor="t" lIns="0" rIns="0" tIns="0" bIns="0">
+            <a:noAutofit/>
+          </a:bodyPr>
+          <a:lstStyle/>
+          <a:p>
+            <a:pPr algn="l">
+              <a:lnSpc>
+                <a:spcPct val="114000"/>
+              </a:lnSpc>
+              <a:spcBef>
+                <a:spcPts val="0"/>
+              </a:spcBef>
+              <a:spcAft>
+                <a:spcPts val="0"/>
+              </a:spcAft>
+            </a:pPr>
+            <a:r>
+              <a:rPr sz="1600" b="0" lang="en-US">
+                <a:solidFill>
+                  <a:srgbClr val="20262E"/>
+                </a:solidFill>
+                <a:latin typeface="Pretendard"/>
+                <a:ea typeface="Pretendard"/>
+                <a:cs typeface="Pretendard"/>
+              </a:rPr>
+              <a:t>Password</a:t>
+            </a:r>
+          </a:p>
+        </p:txBody>
+      </p:sp>
+      <p:sp>
+        <p:nvSpPr>
+          <p:cNvPr id="54" name="TextBox 53"/>
+          <p:cNvSpPr txBox="1"/>
+          <p:nvPr/>
+        </p:nvSpPr>
+        <p:spPr>
+          <a:xfrm>
+            <a:off x="9326880" y="4087367"/>
+            <a:ext cx="768096" cy="320040"/>
+          </a:xfrm>
+          <a:prstGeom prst="rect">
+            <a:avLst/>
+          </a:prstGeom>
+          <a:noFill/>
+        </p:spPr>
+        <p:txBody>
+          <a:bodyPr wrap="none" anchor="t" lIns="0" rIns="0" tIns="0" bIns="0">
+            <a:noAutofit/>
+          </a:bodyPr>
+          <a:lstStyle/>
+          <a:p>
+            <a:pPr algn="r">
+              <a:lnSpc>
+                <a:spcPct val="114000"/>
+              </a:lnSpc>
+              <a:spcBef>
+                <a:spcPts val="0"/>
+              </a:spcBef>
+              <a:spcAft>
+                <a:spcPts val="0"/>
+              </a:spcAft>
+            </a:pPr>
+            <a:r>
+              <a:rPr sz="1600" b="0" lang="en-US">
+                <a:solidFill>
+                  <a:srgbClr val="20262E"/>
+                </a:solidFill>
+                <a:latin typeface="Pretendard"/>
+                <a:ea typeface="Pretendard"/>
+                <a:cs typeface="Pretendard"/>
+              </a:rPr>
+              <a:t>n</a:t>
+            </a:r>
+          </a:p>
+        </p:txBody>
+      </p:sp>
+      <p:sp>
+        <p:nvSpPr>
+          <p:cNvPr id="55" name="TextBox 54"/>
+          <p:cNvSpPr txBox="1"/>
+          <p:nvPr/>
+        </p:nvSpPr>
+        <p:spPr>
+          <a:xfrm>
+            <a:off x="10241280" y="4087367"/>
+            <a:ext cx="1316736" cy="320040"/>
+          </a:xfrm>
+          <a:prstGeom prst="rect">
+            <a:avLst/>
+          </a:prstGeom>
+          <a:noFill/>
+        </p:spPr>
+        <p:txBody>
+          <a:bodyPr wrap="none" anchor="t" lIns="0" rIns="0" tIns="0" bIns="0">
+            <a:noAutofit/>
+          </a:bodyPr>
+          <a:lstStyle/>
+          <a:p>
+            <a:pPr algn="r">
+              <a:lnSpc>
+                <a:spcPct val="114000"/>
+              </a:lnSpc>
+              <a:spcBef>
+                <a:spcPts val="0"/>
+              </a:spcBef>
+              <a:spcAft>
+                <a:spcPts val="0"/>
+              </a:spcAft>
+            </a:pPr>
+            <a:r>
+              <a:rPr sz="1600" b="0" lang="en-US">
+                <a:solidFill>
+                  <a:srgbClr val="20262E"/>
+                </a:solidFill>
+                <a:latin typeface="Pretendard"/>
+                <a:ea typeface="Pretendard"/>
+                <a:cs typeface="Pretendard"/>
+              </a:rPr>
+              <a:t>1,000 + 3n</a:t>
+            </a:r>
+          </a:p>
+        </p:txBody>
+      </p:sp>
+      <p:sp>
+        <p:nvSpPr>
+          <p:cNvPr id="56" name="Rectangle 55"/>
+          <p:cNvSpPr/>
+          <p:nvPr/>
+        </p:nvSpPr>
+        <p:spPr>
+          <a:xfrm>
+            <a:off x="6291072" y="4443983"/>
+            <a:ext cx="5340096" cy="448056"/>
+          </a:xfrm>
+          <a:prstGeom prst="rect">
+            <a:avLst/>
+          </a:prstGeom>
+          <a:solidFill>
+            <a:srgbClr val="FFFFFF"/>
+          </a:solidFill>
+          <a:ln>
+            <a:noFill/>
+          </a:ln>
+        </p:spPr>
+        <p:style>
+          <a:lnRef idx="1">
+            <a:schemeClr val="accent1"/>
+          </a:lnRef>
+          <a:fillRef idx="3">
+            <a:schemeClr val="accent1"/>
+          </a:fillRef>
+          <a:effectRef idx="2">
+            <a:schemeClr val="accent1"/>
+          </a:effectRef>
+          <a:fontRef idx="minor">
+            <a:schemeClr val="lt1"/>
+          </a:fontRef>
+        </p:style>
+        <p:txBody>
+          <a:bodyPr rtlCol="0" anchor="ctr"/>
+          <a:lstStyle/>
+          <a:p>
+            <a:pPr algn="ctr"/>
+          </a:p>
+        </p:txBody>
+      </p:sp>
+      <p:sp>
+        <p:nvSpPr>
+          <p:cNvPr id="57" name="TextBox 56"/>
+          <p:cNvSpPr txBox="1"/>
+          <p:nvPr/>
+        </p:nvSpPr>
+        <p:spPr>
+          <a:xfrm>
+            <a:off x="6364224" y="4535423"/>
+            <a:ext cx="429768" cy="320040"/>
+          </a:xfrm>
+          <a:prstGeom prst="rect">
+            <a:avLst/>
+          </a:prstGeom>
+          <a:noFill/>
+        </p:spPr>
+        <p:txBody>
+          <a:bodyPr wrap="none" anchor="t" lIns="0" rIns="0" tIns="0" bIns="0">
+            <a:noAutofit/>
+          </a:bodyPr>
+          <a:lstStyle/>
+          <a:p>
+            <a:pPr algn="l">
+              <a:lnSpc>
+                <a:spcPct val="114000"/>
+              </a:lnSpc>
+              <a:spcBef>
+                <a:spcPts val="0"/>
+              </a:spcBef>
+              <a:spcAft>
+                <a:spcPts val="0"/>
+              </a:spcAft>
+            </a:pPr>
+            <a:r>
+              <a:rPr sz="1600" b="0" lang="en-US">
+                <a:solidFill>
+                  <a:srgbClr val="20262E"/>
+                </a:solidFill>
+                <a:latin typeface="Pretendard"/>
+                <a:ea typeface="Pretendard"/>
+                <a:cs typeface="Pretendard"/>
+              </a:rPr>
+              <a:t>4</a:t>
+            </a:r>
+          </a:p>
+        </p:txBody>
+      </p:sp>
+      <p:sp>
+        <p:nvSpPr>
+          <p:cNvPr id="58" name="TextBox 57"/>
+          <p:cNvSpPr txBox="1"/>
+          <p:nvPr/>
+        </p:nvSpPr>
+        <p:spPr>
+          <a:xfrm>
+            <a:off x="6940296" y="4535423"/>
+            <a:ext cx="2240279" cy="320040"/>
+          </a:xfrm>
+          <a:prstGeom prst="rect">
+            <a:avLst/>
+          </a:prstGeom>
+          <a:noFill/>
+        </p:spPr>
+        <p:txBody>
+          <a:bodyPr wrap="none" anchor="t" lIns="0" rIns="0" tIns="0" bIns="0">
+            <a:noAutofit/>
+          </a:bodyPr>
+          <a:lstStyle/>
+          <a:p>
+            <a:pPr algn="l">
+              <a:lnSpc>
+                <a:spcPct val="114000"/>
+              </a:lnSpc>
+              <a:spcBef>
+                <a:spcPts val="0"/>
+              </a:spcBef>
+              <a:spcAft>
+                <a:spcPts val="0"/>
+              </a:spcAft>
+            </a:pPr>
+            <a:r>
+              <a:rPr sz="1600" b="0" lang="en-US">
+                <a:solidFill>
+                  <a:srgbClr val="20262E"/>
+                </a:solidFill>
+                <a:latin typeface="Pretendard"/>
+                <a:ea typeface="Pretendard"/>
+                <a:cs typeface="Pretendard"/>
+              </a:rPr>
+              <a:t>XSS</a:t>
+            </a:r>
+          </a:p>
+        </p:txBody>
+      </p:sp>
+      <p:sp>
+        <p:nvSpPr>
+          <p:cNvPr id="59" name="TextBox 58"/>
+          <p:cNvSpPr txBox="1"/>
+          <p:nvPr/>
+        </p:nvSpPr>
+        <p:spPr>
+          <a:xfrm>
+            <a:off x="9326880" y="4535423"/>
+            <a:ext cx="768096" cy="320040"/>
+          </a:xfrm>
+          <a:prstGeom prst="rect">
+            <a:avLst/>
+          </a:prstGeom>
+          <a:noFill/>
+        </p:spPr>
+        <p:txBody>
+          <a:bodyPr wrap="none" anchor="t" lIns="0" rIns="0" tIns="0" bIns="0">
+            <a:noAutofit/>
+          </a:bodyPr>
+          <a:lstStyle/>
+          <a:p>
+            <a:pPr algn="r">
+              <a:lnSpc>
+                <a:spcPct val="114000"/>
+              </a:lnSpc>
+              <a:spcBef>
+                <a:spcPts val="0"/>
+              </a:spcBef>
+              <a:spcAft>
+                <a:spcPts val="0"/>
+              </a:spcAft>
+            </a:pPr>
+            <a:r>
+              <a:rPr sz="1600" b="0" lang="en-US">
+                <a:solidFill>
+                  <a:srgbClr val="20262E"/>
+                </a:solidFill>
+                <a:latin typeface="Pretendard"/>
+                <a:ea typeface="Pretendard"/>
+                <a:cs typeface="Pretendard"/>
+              </a:rPr>
+              <a:t>n</a:t>
+            </a:r>
+          </a:p>
+        </p:txBody>
+      </p:sp>
+      <p:sp>
+        <p:nvSpPr>
+          <p:cNvPr id="60" name="TextBox 59"/>
+          <p:cNvSpPr txBox="1"/>
+          <p:nvPr/>
+        </p:nvSpPr>
+        <p:spPr>
+          <a:xfrm>
+            <a:off x="10241280" y="4535423"/>
+            <a:ext cx="1316736" cy="320040"/>
+          </a:xfrm>
+          <a:prstGeom prst="rect">
+            <a:avLst/>
+          </a:prstGeom>
+          <a:noFill/>
+        </p:spPr>
+        <p:txBody>
+          <a:bodyPr wrap="none" anchor="t" lIns="0" rIns="0" tIns="0" bIns="0">
+            <a:noAutofit/>
+          </a:bodyPr>
+          <a:lstStyle/>
+          <a:p>
+            <a:pPr algn="r">
+              <a:lnSpc>
+                <a:spcPct val="114000"/>
+              </a:lnSpc>
+              <a:spcBef>
+                <a:spcPts val="0"/>
+              </a:spcBef>
+              <a:spcAft>
+                <a:spcPts val="0"/>
+              </a:spcAft>
+            </a:pPr>
+            <a:r>
+              <a:rPr sz="1600" b="0" lang="en-US">
+                <a:solidFill>
+                  <a:srgbClr val="20262E"/>
+                </a:solidFill>
+                <a:latin typeface="Pretendard"/>
+                <a:ea typeface="Pretendard"/>
+                <a:cs typeface="Pretendard"/>
+              </a:rPr>
+              <a:t>1,000 + 4n</a:t>
+            </a:r>
+          </a:p>
+        </p:txBody>
+      </p:sp>
+      <p:sp>
+        <p:nvSpPr>
+          <p:cNvPr id="61" name="Rectangle 60"/>
+          <p:cNvSpPr/>
+          <p:nvPr/>
+        </p:nvSpPr>
+        <p:spPr>
+          <a:xfrm>
+            <a:off x="6291072" y="4892040"/>
+            <a:ext cx="5340096" cy="621792"/>
+          </a:xfrm>
+          <a:prstGeom prst="rect">
+            <a:avLst/>
+          </a:prstGeom>
+          <a:solidFill>
+            <a:srgbClr val="F1F5F9"/>
+          </a:solidFill>
+          <a:ln>
+            <a:noFill/>
+          </a:ln>
+        </p:spPr>
+        <p:style>
+          <a:lnRef idx="1">
+            <a:schemeClr val="accent1"/>
+          </a:lnRef>
+          <a:fillRef idx="3">
+            <a:schemeClr val="accent1"/>
+          </a:fillRef>
+          <a:effectRef idx="2">
+            <a:schemeClr val="accent1"/>
+          </a:effectRef>
+          <a:fontRef idx="minor">
+            <a:schemeClr val="lt1"/>
+          </a:fontRef>
+        </p:style>
+        <p:txBody>
+          <a:bodyPr rtlCol="0" anchor="ctr"/>
+          <a:lstStyle/>
+          <a:p>
+            <a:pPr algn="ctr"/>
+          </a:p>
+        </p:txBody>
+      </p:sp>
+      <p:sp>
+        <p:nvSpPr>
+          <p:cNvPr id="62" name="TextBox 61"/>
+          <p:cNvSpPr txBox="1"/>
+          <p:nvPr/>
+        </p:nvSpPr>
+        <p:spPr>
+          <a:xfrm>
+            <a:off x="6364224" y="4983479"/>
+            <a:ext cx="429768" cy="493776"/>
+          </a:xfrm>
+          <a:prstGeom prst="rect">
+            <a:avLst/>
+          </a:prstGeom>
+          <a:noFill/>
+        </p:spPr>
+        <p:txBody>
+          <a:bodyPr wrap="none" anchor="t" lIns="0" rIns="0" tIns="0" bIns="0">
+            <a:noAutofit/>
+          </a:bodyPr>
+          <a:lstStyle/>
+          <a:p>
+            <a:pPr algn="l">
+              <a:lnSpc>
+                <a:spcPct val="114000"/>
+              </a:lnSpc>
+              <a:spcBef>
+                <a:spcPts val="0"/>
+              </a:spcBef>
+              <a:spcAft>
+                <a:spcPts val="0"/>
+              </a:spcAft>
+            </a:pPr>
+            <a:r>
+              <a:rPr sz="1600" b="0" lang="en-US">
+                <a:solidFill>
+                  <a:srgbClr val="20262E"/>
+                </a:solidFill>
+                <a:latin typeface="Pretendard"/>
+                <a:ea typeface="Pretendard"/>
+                <a:cs typeface="Pretendard"/>
+              </a:rPr>
+              <a:t>5</a:t>
+            </a:r>
+          </a:p>
+        </p:txBody>
+      </p:sp>
+      <p:sp>
+        <p:nvSpPr>
+          <p:cNvPr id="63" name="TextBox 62"/>
+          <p:cNvSpPr txBox="1"/>
+          <p:nvPr/>
+        </p:nvSpPr>
+        <p:spPr>
+          <a:xfrm>
+            <a:off x="6940296" y="4983479"/>
+            <a:ext cx="2240279" cy="493776"/>
+          </a:xfrm>
+          <a:prstGeom prst="rect">
+            <a:avLst/>
+          </a:prstGeom>
+          <a:noFill/>
+        </p:spPr>
+        <p:txBody>
+          <a:bodyPr wrap="none" anchor="t" lIns="0" rIns="0" tIns="0" bIns="0">
+            <a:noAutofit/>
+          </a:bodyPr>
+          <a:lstStyle/>
+          <a:p>
+            <a:pPr algn="l">
+              <a:lnSpc>
+                <a:spcPct val="114000"/>
+              </a:lnSpc>
+              <a:spcBef>
+                <a:spcPts val="0"/>
+              </a:spcBef>
+              <a:spcAft>
+                <a:spcPts val="0"/>
+              </a:spcAft>
+            </a:pPr>
+            <a:r>
+              <a:rPr sz="1600" b="0" lang="en-US">
+                <a:solidFill>
+                  <a:srgbClr val="20262E"/>
+                </a:solidFill>
+                <a:latin typeface="Pretendard"/>
+                <a:ea typeface="Pretendard"/>
+                <a:cs typeface="Pretendard"/>
+              </a:rPr>
+              <a:t>Backdoor</a:t>
+            </a:r>
+          </a:p>
+          <a:p>
+            <a:pPr algn="l">
+              <a:lnSpc>
+                <a:spcPct val="114000"/>
+              </a:lnSpc>
+              <a:spcBef>
+                <a:spcPts val="0"/>
+              </a:spcBef>
+              <a:spcAft>
+                <a:spcPts val="0"/>
+              </a:spcAft>
+            </a:pPr>
+            <a:r>
+              <a:rPr sz="1600" b="0" lang="en-US">
+                <a:solidFill>
+                  <a:srgbClr val="20262E"/>
+                </a:solidFill>
+                <a:latin typeface="Pretendard"/>
+                <a:ea typeface="Pretendard"/>
+                <a:cs typeface="Pretendard"/>
+              </a:rPr>
+              <a:t>Ransomware</a:t>
+            </a:r>
+          </a:p>
+        </p:txBody>
+      </p:sp>
+      <p:sp>
+        <p:nvSpPr>
+          <p:cNvPr id="64" name="TextBox 63"/>
+          <p:cNvSpPr txBox="1"/>
+          <p:nvPr/>
+        </p:nvSpPr>
+        <p:spPr>
+          <a:xfrm>
+            <a:off x="9326880" y="4983479"/>
+            <a:ext cx="768096" cy="493776"/>
+          </a:xfrm>
+          <a:prstGeom prst="rect">
+            <a:avLst/>
+          </a:prstGeom>
+          <a:noFill/>
+        </p:spPr>
+        <p:txBody>
+          <a:bodyPr wrap="none" anchor="t" lIns="0" rIns="0" tIns="0" bIns="0">
+            <a:noAutofit/>
+          </a:bodyPr>
+          <a:lstStyle/>
+          <a:p>
+            <a:pPr algn="r">
+              <a:lnSpc>
+                <a:spcPct val="114000"/>
+              </a:lnSpc>
+              <a:spcBef>
+                <a:spcPts val="0"/>
+              </a:spcBef>
+              <a:spcAft>
+                <a:spcPts val="0"/>
+              </a:spcAft>
+            </a:pPr>
+            <a:r>
+              <a:rPr sz="1600" b="0" lang="en-US">
+                <a:solidFill>
+                  <a:srgbClr val="20262E"/>
+                </a:solidFill>
+                <a:latin typeface="Pretendard"/>
+                <a:ea typeface="Pretendard"/>
+                <a:cs typeface="Pretendard"/>
+              </a:rPr>
+              <a:t>n</a:t>
+            </a:r>
+          </a:p>
+          <a:p>
+            <a:pPr algn="r">
+              <a:lnSpc>
+                <a:spcPct val="114000"/>
+              </a:lnSpc>
+              <a:spcBef>
+                <a:spcPts val="0"/>
+              </a:spcBef>
+              <a:spcAft>
+                <a:spcPts val="0"/>
+              </a:spcAft>
+            </a:pPr>
+            <a:r>
+              <a:rPr sz="1600" b="0" lang="en-US">
+                <a:solidFill>
+                  <a:srgbClr val="20262E"/>
+                </a:solidFill>
+                <a:latin typeface="Pretendard"/>
+                <a:ea typeface="Pretendard"/>
+                <a:cs typeface="Pretendard"/>
+              </a:rPr>
+              <a:t>n</a:t>
+            </a:r>
+          </a:p>
+        </p:txBody>
+      </p:sp>
+      <p:sp>
+        <p:nvSpPr>
+          <p:cNvPr id="65" name="TextBox 64"/>
+          <p:cNvSpPr txBox="1"/>
+          <p:nvPr/>
+        </p:nvSpPr>
+        <p:spPr>
+          <a:xfrm>
+            <a:off x="10241280" y="4983479"/>
+            <a:ext cx="1316736" cy="493776"/>
+          </a:xfrm>
+          <a:prstGeom prst="rect">
+            <a:avLst/>
+          </a:prstGeom>
+          <a:noFill/>
+        </p:spPr>
+        <p:txBody>
+          <a:bodyPr wrap="none" anchor="t" lIns="0" rIns="0" tIns="0" bIns="0">
+            <a:noAutofit/>
+          </a:bodyPr>
+          <a:lstStyle/>
+          <a:p>
+            <a:pPr algn="r">
+              <a:lnSpc>
+                <a:spcPct val="114000"/>
+              </a:lnSpc>
+              <a:spcBef>
+                <a:spcPts val="0"/>
+              </a:spcBef>
+              <a:spcAft>
+                <a:spcPts val="0"/>
+              </a:spcAft>
+            </a:pPr>
+            <a:r>
+              <a:rPr sz="1600" b="0" lang="en-US">
+                <a:solidFill>
+                  <a:srgbClr val="20262E"/>
+                </a:solidFill>
+                <a:latin typeface="Pretendard"/>
+                <a:ea typeface="Pretendard"/>
+                <a:cs typeface="Pretendard"/>
+              </a:rPr>
+              <a:t>1,000 + 6n</a:t>
+            </a:r>
+          </a:p>
+        </p:txBody>
+      </p:sp>
+      <p:sp>
+        <p:nvSpPr>
+          <p:cNvPr id="66" name="Rectangle 65"/>
+          <p:cNvSpPr/>
+          <p:nvPr/>
+        </p:nvSpPr>
+        <p:spPr>
+          <a:xfrm>
+            <a:off x="6291072" y="5513831"/>
+            <a:ext cx="5340096" cy="448056"/>
+          </a:xfrm>
+          <a:prstGeom prst="rect">
+            <a:avLst/>
+          </a:prstGeom>
+          <a:solidFill>
+            <a:srgbClr val="FFFFFF"/>
+          </a:solidFill>
+          <a:ln>
+            <a:noFill/>
+          </a:ln>
+        </p:spPr>
+        <p:style>
+          <a:lnRef idx="1">
+            <a:schemeClr val="accent1"/>
+          </a:lnRef>
+          <a:fillRef idx="3">
+            <a:schemeClr val="accent1"/>
+          </a:fillRef>
+          <a:effectRef idx="2">
+            <a:schemeClr val="accent1"/>
+          </a:effectRef>
+          <a:fontRef idx="minor">
+            <a:schemeClr val="lt1"/>
+          </a:fontRef>
+        </p:style>
+        <p:txBody>
+          <a:bodyPr rtlCol="0" anchor="ctr"/>
+          <a:lstStyle/>
+          <a:p>
+            <a:pPr algn="ctr"/>
+          </a:p>
+        </p:txBody>
+      </p:sp>
+      <p:sp>
+        <p:nvSpPr>
+          <p:cNvPr id="67" name="TextBox 66"/>
+          <p:cNvSpPr txBox="1"/>
+          <p:nvPr/>
+        </p:nvSpPr>
+        <p:spPr>
+          <a:xfrm>
+            <a:off x="6364224" y="5605271"/>
+            <a:ext cx="429768" cy="320040"/>
+          </a:xfrm>
+          <a:prstGeom prst="rect">
+            <a:avLst/>
+          </a:prstGeom>
+          <a:noFill/>
+        </p:spPr>
+        <p:txBody>
+          <a:bodyPr wrap="none" anchor="t" lIns="0" rIns="0" tIns="0" bIns="0">
+            <a:noAutofit/>
+          </a:bodyPr>
+          <a:lstStyle/>
+          <a:p>
+            <a:pPr algn="l">
+              <a:lnSpc>
+                <a:spcPct val="114000"/>
+              </a:lnSpc>
+              <a:spcBef>
+                <a:spcPts val="0"/>
+              </a:spcBef>
+              <a:spcAft>
+                <a:spcPts val="0"/>
+              </a:spcAft>
+            </a:pPr>
+            <a:r>
+              <a:rPr sz="1600" b="0" lang="en-US">
+                <a:solidFill>
+                  <a:srgbClr val="20262E"/>
+                </a:solidFill>
+                <a:latin typeface="Pretendard"/>
+                <a:ea typeface="Pretendard"/>
+                <a:cs typeface="Pretendard"/>
+              </a:rPr>
+              <a:t>6</a:t>
+            </a:r>
+          </a:p>
+        </p:txBody>
+      </p:sp>
+      <p:sp>
+        <p:nvSpPr>
+          <p:cNvPr id="68" name="TextBox 67"/>
+          <p:cNvSpPr txBox="1"/>
+          <p:nvPr/>
+        </p:nvSpPr>
+        <p:spPr>
+          <a:xfrm>
+            <a:off x="6940296" y="5605271"/>
+            <a:ext cx="2240279" cy="320040"/>
+          </a:xfrm>
+          <a:prstGeom prst="rect">
+            <a:avLst/>
+          </a:prstGeom>
+          <a:noFill/>
+        </p:spPr>
+        <p:txBody>
+          <a:bodyPr wrap="none" anchor="t" lIns="0" rIns="0" tIns="0" bIns="0">
+            <a:noAutofit/>
+          </a:bodyPr>
+          <a:lstStyle/>
+          <a:p>
+            <a:pPr algn="l">
+              <a:lnSpc>
+                <a:spcPct val="114000"/>
+              </a:lnSpc>
+              <a:spcBef>
+                <a:spcPts val="0"/>
+              </a:spcBef>
+              <a:spcAft>
+                <a:spcPts val="0"/>
+              </a:spcAft>
+            </a:pPr>
+            <a:r>
+              <a:rPr sz="1600" b="0" lang="en-US">
+                <a:solidFill>
+                  <a:srgbClr val="20262E"/>
+                </a:solidFill>
+                <a:latin typeface="Pretendard"/>
+                <a:ea typeface="Pretendard"/>
+                <a:cs typeface="Pretendard"/>
+              </a:rPr>
+              <a:t>MitM</a:t>
+            </a:r>
+          </a:p>
+        </p:txBody>
+      </p:sp>
+      <p:sp>
+        <p:nvSpPr>
+          <p:cNvPr id="69" name="TextBox 68"/>
+          <p:cNvSpPr txBox="1"/>
+          <p:nvPr/>
+        </p:nvSpPr>
+        <p:spPr>
+          <a:xfrm>
+            <a:off x="9326880" y="5605271"/>
+            <a:ext cx="768096" cy="320040"/>
+          </a:xfrm>
+          <a:prstGeom prst="rect">
+            <a:avLst/>
+          </a:prstGeom>
+          <a:noFill/>
+        </p:spPr>
+        <p:txBody>
+          <a:bodyPr wrap="none" anchor="t" lIns="0" rIns="0" tIns="0" bIns="0">
+            <a:noAutofit/>
+          </a:bodyPr>
+          <a:lstStyle/>
+          <a:p>
+            <a:pPr algn="r">
+              <a:lnSpc>
+                <a:spcPct val="114000"/>
+              </a:lnSpc>
+              <a:spcBef>
+                <a:spcPts val="0"/>
+              </a:spcBef>
+              <a:spcAft>
+                <a:spcPts val="0"/>
+              </a:spcAft>
+            </a:pPr>
+            <a:r>
+              <a:rPr sz="1600" b="0" lang="en-US">
+                <a:solidFill>
+                  <a:srgbClr val="20262E"/>
+                </a:solidFill>
+                <a:latin typeface="Pretendard"/>
+                <a:ea typeface="Pretendard"/>
+                <a:cs typeface="Pretendard"/>
+              </a:rPr>
+              <a:t>n</a:t>
+            </a:r>
+          </a:p>
+        </p:txBody>
+      </p:sp>
+      <p:sp>
+        <p:nvSpPr>
+          <p:cNvPr id="70" name="TextBox 69"/>
+          <p:cNvSpPr txBox="1"/>
+          <p:nvPr/>
+        </p:nvSpPr>
+        <p:spPr>
+          <a:xfrm>
+            <a:off x="10241280" y="5605271"/>
+            <a:ext cx="1316736" cy="320040"/>
+          </a:xfrm>
+          <a:prstGeom prst="rect">
+            <a:avLst/>
+          </a:prstGeom>
+          <a:noFill/>
+        </p:spPr>
+        <p:txBody>
+          <a:bodyPr wrap="none" anchor="t" lIns="0" rIns="0" tIns="0" bIns="0">
+            <a:noAutofit/>
+          </a:bodyPr>
+          <a:lstStyle/>
+          <a:p>
+            <a:pPr algn="r">
+              <a:lnSpc>
+                <a:spcPct val="114000"/>
+              </a:lnSpc>
+              <a:spcBef>
+                <a:spcPts val="0"/>
+              </a:spcBef>
+              <a:spcAft>
+                <a:spcPts val="0"/>
+              </a:spcAft>
+            </a:pPr>
+            <a:r>
+              <a:rPr sz="1600" b="0" lang="en-US">
+                <a:solidFill>
+                  <a:srgbClr val="20262E"/>
+                </a:solidFill>
+                <a:latin typeface="Pretendard"/>
+                <a:ea typeface="Pretendard"/>
+                <a:cs typeface="Pretendard"/>
+              </a:rPr>
+              <a:t>1,000 + 7n</a:t>
+            </a:r>
+          </a:p>
+        </p:txBody>
+      </p:sp>
+      <p:sp>
+        <p:nvSpPr>
+          <p:cNvPr id="71" name="TextBox 70"/>
+          <p:cNvSpPr txBox="1"/>
+          <p:nvPr/>
+        </p:nvSpPr>
+        <p:spPr>
+          <a:xfrm>
+            <a:off x="594360" y="6053328"/>
+            <a:ext cx="10972800" cy="256032"/>
+          </a:xfrm>
+          <a:prstGeom prst="rect">
+            <a:avLst/>
+          </a:prstGeom>
+          <a:noFill/>
+        </p:spPr>
+        <p:txBody>
+          <a:bodyPr wrap="none" anchor="t" lIns="0" rIns="0" tIns="0" bIns="0">
+            <a:noAutofit/>
+          </a:bodyPr>
+          <a:lstStyle/>
+          <a:p>
+            <a:pPr algn="l">
+              <a:lnSpc>
+                <a:spcPct val="114000"/>
+              </a:lnSpc>
+              <a:spcBef>
+                <a:spcPts val="0"/>
+              </a:spcBef>
+              <a:spcAft>
+                <a:spcPts val="0"/>
+              </a:spcAft>
+            </a:pPr>
+            <a:r>
+              <a:rPr sz="1600" b="0" lang="en-US">
+                <a:solidFill>
+                  <a:srgbClr val="617080"/>
+                </a:solidFill>
+                <a:latin typeface="Pretendard"/>
+                <a:ea typeface="Pretendard"/>
+                <a:cs typeface="Pretendard"/>
+              </a:rPr>
+              <a:t>At n = 100: CIC 1,400 / ToN 1,700 total labels; n is a label budget, not daily traffic volume</a:t>
+            </a:r>
+          </a:p>
+        </p:txBody>
+      </p:sp>
+      <p:sp>
+        <p:nvSpPr>
+          <p:cNvPr id="72" name="Rectangle 71"/>
+          <p:cNvSpPr/>
+          <p:nvPr/>
+        </p:nvSpPr>
+        <p:spPr>
+          <a:xfrm>
+            <a:off x="0" y="6446520"/>
+            <a:ext cx="12191999" cy="411480"/>
+          </a:xfrm>
+          <a:prstGeom prst="rect">
+            <a:avLst/>
+          </a:prstGeom>
+          <a:solidFill>
+            <a:srgbClr val="00306C"/>
+          </a:solidFill>
+          <a:ln>
+            <a:noFill/>
+          </a:ln>
+        </p:spPr>
+        <p:style>
+          <a:lnRef idx="1">
+            <a:schemeClr val="accent1"/>
+          </a:lnRef>
+          <a:fillRef idx="3">
+            <a:schemeClr val="accent1"/>
+          </a:fillRef>
+          <a:effectRef idx="2">
+            <a:schemeClr val="accent1"/>
+          </a:effectRef>
+          <a:fontRef idx="minor">
+            <a:schemeClr val="lt1"/>
+          </a:fontRef>
+        </p:style>
+        <p:txBody>
+          <a:bodyPr rtlCol="0" anchor="ctr"/>
+          <a:lstStyle/>
+          <a:p>
+            <a:pPr algn="ctr"/>
+          </a:p>
+        </p:txBody>
+      </p:sp>
+      <p:sp>
+        <p:nvSpPr>
+          <p:cNvPr id="73" name="TextBox 72"/>
+          <p:cNvSpPr txBox="1"/>
+          <p:nvPr/>
+        </p:nvSpPr>
+        <p:spPr>
+          <a:xfrm>
+            <a:off x="566928" y="6528816"/>
+            <a:ext cx="9738360" cy="214853"/>
+          </a:xfrm>
+          <a:prstGeom prst="rect">
+            <a:avLst/>
+          </a:prstGeom>
+          <a:noFill/>
+        </p:spPr>
+        <p:txBody>
+          <a:bodyPr wrap="none" anchor="t" lIns="0" rIns="0" tIns="0" bIns="0">
+            <a:noAutofit/>
+          </a:bodyPr>
+          <a:lstStyle/>
+          <a:p>
+            <a:pPr algn="l">
+              <a:lnSpc>
+                <a:spcPct val="114000"/>
+              </a:lnSpc>
+              <a:spcBef>
+                <a:spcPts val="0"/>
+              </a:spcBef>
+              <a:spcAft>
+                <a:spcPts val="0"/>
+              </a:spcAft>
+            </a:pPr>
+            <a:r>
+              <a:rPr sz="1400" b="0" lang="en-US">
+                <a:solidFill>
+                  <a:srgbClr val="FFFFFF"/>
+                </a:solidFill>
+                <a:latin typeface="Pretendard"/>
+                <a:ea typeface="Pretendard"/>
+                <a:cs typeface="Pretendard"/>
+              </a:rPr>
+              <a:t>Completed sweep: n = 10, 20, 50, 100, 200, 400; 100 is illustrative, not an optimum</a:t>
+            </a:r>
+          </a:p>
+        </p:txBody>
+      </p:sp>
+      <p:sp>
+        <p:nvSpPr>
+          <p:cNvPr id="74" name="TextBox 73"/>
+          <p:cNvSpPr txBox="1"/>
+          <p:nvPr/>
+        </p:nvSpPr>
+        <p:spPr>
+          <a:xfrm>
+            <a:off x="10469880" y="6537960"/>
+            <a:ext cx="1143000" cy="201168"/>
+          </a:xfrm>
+          <a:prstGeom prst="rect">
+            <a:avLst/>
+          </a:prstGeom>
+          <a:noFill/>
+        </p:spPr>
+        <p:txBody>
+          <a:bodyPr wrap="none" anchor="t" lIns="0" rIns="0" tIns="0" bIns="0">
+            <a:noAutofit/>
+          </a:bodyPr>
+          <a:lstStyle/>
+          <a:p>
+            <a:pPr algn="r">
+              <a:lnSpc>
+                <a:spcPct val="114000"/>
+              </a:lnSpc>
+              <a:spcBef>
+                <a:spcPts val="0"/>
+              </a:spcBef>
+              <a:spcAft>
+                <a:spcPts val="0"/>
+              </a:spcAft>
+            </a:pPr>
+            <a:r>
+              <a:rPr sz="1200" b="0" lang="en-US">
+                <a:solidFill>
+                  <a:srgbClr val="FFFFFF"/>
+                </a:solidFill>
+                <a:latin typeface="Pretendard"/>
+                <a:ea typeface="Pretendard"/>
+                <a:cs typeface="Pretendard"/>
+              </a:rPr>
+              <a:t>03   6</a:t>
+            </a:r>
+          </a:p>
+        </p:txBody>
+      </p:sp>
     </p:spTree>
   </p:cSld>
   <p:clrMapOvr>
@@ -6999,30 +12429,654 @@
         <p:nvPr/>
       </p:nvGrpSpPr>
       <p:grpSpPr/>
+      <p:sp>
+        <p:nvSpPr>
+          <p:cNvPr id="2" name="TextBox 1"/>
+          <p:cNvSpPr txBox="1"/>
+          <p:nvPr/>
+        </p:nvSpPr>
+        <p:spPr>
+          <a:xfrm>
+            <a:off x="548640" y="301752"/>
+            <a:ext cx="11064240" cy="521207"/>
+          </a:xfrm>
+          <a:prstGeom prst="rect">
+            <a:avLst/>
+          </a:prstGeom>
+          <a:noFill/>
+        </p:spPr>
+        <p:txBody>
+          <a:bodyPr wrap="none" anchor="t" lIns="0" rIns="0" tIns="0" bIns="0">
+            <a:noAutofit/>
+          </a:bodyPr>
+          <a:lstStyle/>
+          <a:p>
+            <a:pPr algn="l">
+              <a:lnSpc>
+                <a:spcPct val="114000"/>
+              </a:lnSpc>
+              <a:spcBef>
+                <a:spcPts val="0"/>
+              </a:spcBef>
+              <a:spcAft>
+                <a:spcPts val="0"/>
+              </a:spcAft>
+            </a:pPr>
+            <a:r>
+              <a:rPr sz="3000" b="1" lang="en-US">
+                <a:solidFill>
+                  <a:srgbClr val="00306C"/>
+                </a:solidFill>
+                <a:latin typeface="Pretendard"/>
+                <a:ea typeface="Pretendard"/>
+                <a:cs typeface="Pretendard"/>
+              </a:rPr>
+              <a:t>Completed cumulative study · Quality versus labels</a:t>
+            </a:r>
+          </a:p>
+        </p:txBody>
+      </p:sp>
+      <p:sp>
+        <p:nvSpPr>
+          <p:cNvPr id="3" name="TextBox 2"/>
+          <p:cNvSpPr txBox="1"/>
+          <p:nvPr/>
+        </p:nvSpPr>
+        <p:spPr>
+          <a:xfrm>
+            <a:off x="566928" y="1005840"/>
+            <a:ext cx="10972800" cy="338328"/>
+          </a:xfrm>
+          <a:prstGeom prst="rect">
+            <a:avLst/>
+          </a:prstGeom>
+          <a:noFill/>
+        </p:spPr>
+        <p:txBody>
+          <a:bodyPr wrap="none" anchor="t" lIns="0" rIns="0" tIns="0" bIns="0">
+            <a:noAutofit/>
+          </a:bodyPr>
+          <a:lstStyle/>
+          <a:p>
+            <a:pPr algn="l">
+              <a:lnSpc>
+                <a:spcPct val="114000"/>
+              </a:lnSpc>
+              <a:spcBef>
+                <a:spcPts val="0"/>
+              </a:spcBef>
+              <a:spcAft>
+                <a:spcPts val="0"/>
+              </a:spcAft>
+            </a:pPr>
+            <a:r>
+              <a:rPr sz="1800" b="0" lang="en-US">
+                <a:solidFill>
+                  <a:srgbClr val="617080"/>
+                </a:solidFill>
+                <a:latin typeface="Pretendard"/>
+                <a:ea typeface="Pretendard"/>
+                <a:cs typeface="Pretendard"/>
+              </a:rPr>
+              <a:t>Initial 1,000 · 10 to 400 labels/new class · Cumulative data · Final model on full test</a:t>
+            </a:r>
+          </a:p>
+        </p:txBody>
+      </p:sp>
       <p:pic>
         <p:nvPicPr>
-          <p:cNvPr id="2" name="Picture 1" descr="original-6.png"/>
+          <p:cNvPr id="4" name="Picture 3" descr="original-5.png"/>
           <p:cNvPicPr>
             <a:picLocks noChangeAspect="1"/>
           </p:cNvPicPr>
           <p:nvPr/>
         </p:nvPicPr>
         <p:blipFill>
-          <a:blip r:embed="rId2"/>
+          <a:blip r:embed="rId3"/>
+          <a:srcRect l="1700" t="28600" r="1700" b="17100"/>
           <a:stretch>
             <a:fillRect/>
           </a:stretch>
         </p:blipFill>
         <p:spPr>
           <a:xfrm>
-            <a:off x="0" y="0"/>
-            <a:ext cx="12191999" cy="6858000"/>
+            <a:off x="201168" y="1645920"/>
+            <a:ext cx="11786616" cy="3721608"/>
           </a:xfrm>
           <a:prstGeom prst="rect">
             <a:avLst/>
           </a:prstGeom>
         </p:spPr>
       </p:pic>
+      <p:sp>
+        <p:nvSpPr>
+          <p:cNvPr id="5" name="TextBox 4"/>
+          <p:cNvSpPr txBox="1"/>
+          <p:nvPr/>
+        </p:nvSpPr>
+        <p:spPr>
+          <a:xfrm>
+            <a:off x="594360" y="5605272"/>
+            <a:ext cx="10972800" cy="585216"/>
+          </a:xfrm>
+          <a:prstGeom prst="rect">
+            <a:avLst/>
+          </a:prstGeom>
+          <a:noFill/>
+        </p:spPr>
+        <p:txBody>
+          <a:bodyPr wrap="none" anchor="t" lIns="0" rIns="0" tIns="0" bIns="0">
+            <a:noAutofit/>
+          </a:bodyPr>
+          <a:lstStyle/>
+          <a:p>
+            <a:pPr algn="l">
+              <a:lnSpc>
+                <a:spcPct val="114000"/>
+              </a:lnSpc>
+              <a:spcBef>
+                <a:spcPts val="0"/>
+              </a:spcBef>
+              <a:spcAft>
+                <a:spcPts val="0"/>
+              </a:spcAft>
+            </a:pPr>
+            <a:r>
+              <a:rPr sz="1900" b="0" lang="en-US">
+                <a:solidFill>
+                  <a:srgbClr val="20262E"/>
+                </a:solidFill>
+                <a:latin typeface="Pretendard"/>
+                <a:ea typeface="Pretendard"/>
+                <a:cs typeface="Pretendard"/>
+              </a:rPr>
+              <a:t>Overall quality as the number of available labels changes</a:t>
+            </a:r>
+          </a:p>
+          <a:p>
+            <a:pPr algn="l">
+              <a:lnSpc>
+                <a:spcPct val="114000"/>
+              </a:lnSpc>
+              <a:spcBef>
+                <a:spcPts val="0"/>
+              </a:spcBef>
+              <a:spcAft>
+                <a:spcPts val="0"/>
+              </a:spcAft>
+            </a:pPr>
+            <a:r>
+              <a:rPr sz="1900" b="0" lang="en-US">
+                <a:solidFill>
+                  <a:srgbClr val="20262E"/>
+                </a:solidFill>
+                <a:latin typeface="Pretendard"/>
+                <a:ea typeface="Pretendard"/>
+                <a:cs typeface="Pretendard"/>
+              </a:rPr>
+              <a:t>New-attack detection and before/after retention require separate measurements</a:t>
+            </a:r>
+          </a:p>
+        </p:txBody>
+      </p:sp>
+      <p:sp>
+        <p:nvSpPr>
+          <p:cNvPr id="6" name="Rectangle 5"/>
+          <p:cNvSpPr/>
+          <p:nvPr/>
+        </p:nvSpPr>
+        <p:spPr>
+          <a:xfrm>
+            <a:off x="0" y="6446520"/>
+            <a:ext cx="12191999" cy="411480"/>
+          </a:xfrm>
+          <a:prstGeom prst="rect">
+            <a:avLst/>
+          </a:prstGeom>
+          <a:solidFill>
+            <a:srgbClr val="00306C"/>
+          </a:solidFill>
+          <a:ln>
+            <a:noFill/>
+          </a:ln>
+        </p:spPr>
+        <p:style>
+          <a:lnRef idx="1">
+            <a:schemeClr val="accent1"/>
+          </a:lnRef>
+          <a:fillRef idx="3">
+            <a:schemeClr val="accent1"/>
+          </a:fillRef>
+          <a:effectRef idx="2">
+            <a:schemeClr val="accent1"/>
+          </a:effectRef>
+          <a:fontRef idx="minor">
+            <a:schemeClr val="lt1"/>
+          </a:fontRef>
+        </p:style>
+        <p:txBody>
+          <a:bodyPr rtlCol="0" anchor="ctr"/>
+          <a:lstStyle/>
+          <a:p>
+            <a:pPr algn="ctr"/>
+          </a:p>
+        </p:txBody>
+      </p:sp>
+      <p:sp>
+        <p:nvSpPr>
+          <p:cNvPr id="7" name="TextBox 6"/>
+          <p:cNvSpPr txBox="1"/>
+          <p:nvPr/>
+        </p:nvSpPr>
+        <p:spPr>
+          <a:xfrm>
+            <a:off x="566928" y="6528816"/>
+            <a:ext cx="9738360" cy="214853"/>
+          </a:xfrm>
+          <a:prstGeom prst="rect">
+            <a:avLst/>
+          </a:prstGeom>
+          <a:noFill/>
+        </p:spPr>
+        <p:txBody>
+          <a:bodyPr wrap="none" anchor="t" lIns="0" rIns="0" tIns="0" bIns="0">
+            <a:noAutofit/>
+          </a:bodyPr>
+          <a:lstStyle/>
+          <a:p>
+            <a:pPr algn="l">
+              <a:lnSpc>
+                <a:spcPct val="114000"/>
+              </a:lnSpc>
+              <a:spcBef>
+                <a:spcPts val="0"/>
+              </a:spcBef>
+              <a:spcAft>
+                <a:spcPts val="0"/>
+              </a:spcAft>
+            </a:pPr>
+            <a:r>
+              <a:rPr sz="1400" b="0" lang="en-US">
+                <a:solidFill>
+                  <a:srgbClr val="FFFFFF"/>
+                </a:solidFill>
+                <a:latin typeface="Pretendard"/>
+                <a:ea typeface="Pretendard"/>
+                <a:cs typeface="Pretendard"/>
+              </a:rPr>
+              <a:t>Planned buffer comparison: supply all 5, 10, 20, 30 or 50 new examples per class</a:t>
+            </a:r>
+          </a:p>
+        </p:txBody>
+      </p:sp>
+      <p:sp>
+        <p:nvSpPr>
+          <p:cNvPr id="8" name="TextBox 7"/>
+          <p:cNvSpPr txBox="1"/>
+          <p:nvPr/>
+        </p:nvSpPr>
+        <p:spPr>
+          <a:xfrm>
+            <a:off x="10469880" y="6537960"/>
+            <a:ext cx="1143000" cy="201168"/>
+          </a:xfrm>
+          <a:prstGeom prst="rect">
+            <a:avLst/>
+          </a:prstGeom>
+          <a:noFill/>
+        </p:spPr>
+        <p:txBody>
+          <a:bodyPr wrap="none" anchor="t" lIns="0" rIns="0" tIns="0" bIns="0">
+            <a:noAutofit/>
+          </a:bodyPr>
+          <a:lstStyle/>
+          <a:p>
+            <a:pPr algn="r">
+              <a:lnSpc>
+                <a:spcPct val="114000"/>
+              </a:lnSpc>
+              <a:spcBef>
+                <a:spcPts val="0"/>
+              </a:spcBef>
+              <a:spcAft>
+                <a:spcPts val="0"/>
+              </a:spcAft>
+            </a:pPr>
+            <a:r>
+              <a:rPr sz="1200" b="0" lang="en-US">
+                <a:solidFill>
+                  <a:srgbClr val="FFFFFF"/>
+                </a:solidFill>
+                <a:latin typeface="Pretendard"/>
+                <a:ea typeface="Pretendard"/>
+                <a:cs typeface="Pretendard"/>
+              </a:rPr>
+              <a:t>04   7</a:t>
+            </a:r>
+          </a:p>
+        </p:txBody>
+      </p:sp>
+    </p:spTree>
+  </p:cSld>
+  <p:clrMapOvr>
+    <a:masterClrMapping/>
+  </p:clrMapOvr>
+</p:sld>
+</file>
+
+<file path=ppt/slides/slide8.xml><?xml version="1.0" encoding="utf-8"?>
+<p:sld xmlns:a="http://schemas.openxmlformats.org/drawingml/2006/main" xmlns:p="http://schemas.openxmlformats.org/presentationml/2006/main" xmlns:r="http://schemas.openxmlformats.org/officeDocument/2006/relationships">
+  <p:cSld>
+    <p:spTree>
+      <p:nvGrpSpPr>
+        <p:cNvPr id="1" name=""/>
+        <p:cNvGrpSpPr/>
+        <p:nvPr/>
+      </p:nvGrpSpPr>
+      <p:grpSpPr/>
+      <p:sp>
+        <p:nvSpPr>
+          <p:cNvPr id="2" name="TextBox 1"/>
+          <p:cNvSpPr txBox="1"/>
+          <p:nvPr/>
+        </p:nvSpPr>
+        <p:spPr>
+          <a:xfrm>
+            <a:off x="548640" y="301752"/>
+            <a:ext cx="11064240" cy="521207"/>
+          </a:xfrm>
+          <a:prstGeom prst="rect">
+            <a:avLst/>
+          </a:prstGeom>
+          <a:noFill/>
+        </p:spPr>
+        <p:txBody>
+          <a:bodyPr wrap="none" anchor="t" lIns="0" rIns="0" tIns="0" bIns="0">
+            <a:noAutofit/>
+          </a:bodyPr>
+          <a:lstStyle/>
+          <a:p>
+            <a:pPr algn="l">
+              <a:lnSpc>
+                <a:spcPct val="114000"/>
+              </a:lnSpc>
+              <a:spcBef>
+                <a:spcPts val="0"/>
+              </a:spcBef>
+              <a:spcAft>
+                <a:spcPts val="0"/>
+              </a:spcAft>
+            </a:pPr>
+            <a:r>
+              <a:rPr sz="3000" b="1" lang="en-US">
+                <a:solidFill>
+                  <a:srgbClr val="00306C"/>
+                </a:solidFill>
+                <a:latin typeface="Pretendard"/>
+                <a:ea typeface="Pretendard"/>
+                <a:cs typeface="Pretendard"/>
+              </a:rPr>
+              <a:t>Completed cumulative experiment · Quality and update cost</a:t>
+            </a:r>
+          </a:p>
+        </p:txBody>
+      </p:sp>
+      <p:sp>
+        <p:nvSpPr>
+          <p:cNvPr id="3" name="TextBox 2"/>
+          <p:cNvSpPr txBox="1"/>
+          <p:nvPr/>
+        </p:nvSpPr>
+        <p:spPr>
+          <a:xfrm>
+            <a:off x="566928" y="1005840"/>
+            <a:ext cx="10972800" cy="329184"/>
+          </a:xfrm>
+          <a:prstGeom prst="rect">
+            <a:avLst/>
+          </a:prstGeom>
+          <a:noFill/>
+        </p:spPr>
+        <p:txBody>
+          <a:bodyPr wrap="none" anchor="t" lIns="0" rIns="0" tIns="0" bIns="0">
+            <a:noAutofit/>
+          </a:bodyPr>
+          <a:lstStyle/>
+          <a:p>
+            <a:pPr algn="l">
+              <a:lnSpc>
+                <a:spcPct val="114000"/>
+              </a:lnSpc>
+              <a:spcBef>
+                <a:spcPts val="0"/>
+              </a:spcBef>
+              <a:spcAft>
+                <a:spcPts val="0"/>
+              </a:spcAft>
+            </a:pPr>
+            <a:r>
+              <a:rPr sz="1800" b="0" lang="en-US">
+                <a:solidFill>
+                  <a:srgbClr val="617080"/>
+                </a:solidFill>
+                <a:latin typeface="Pretendard"/>
+                <a:ea typeface="Pretendard"/>
+                <a:cs typeface="Pretendard"/>
+              </a:rPr>
+              <a:t>Illustrative n = 100 · XGB cumulative refit / PFN cumulative context · No IDS fine-tuning</a:t>
+            </a:r>
+          </a:p>
+        </p:txBody>
+      </p:sp>
+      <p:sp>
+        <p:nvSpPr>
+          <p:cNvPr id="4" name="TextBox 3"/>
+          <p:cNvSpPr txBox="1"/>
+          <p:nvPr/>
+        </p:nvSpPr>
+        <p:spPr>
+          <a:xfrm>
+            <a:off x="566928" y="1490472"/>
+            <a:ext cx="10972800" cy="320040"/>
+          </a:xfrm>
+          <a:prstGeom prst="rect">
+            <a:avLst/>
+          </a:prstGeom>
+          <a:noFill/>
+        </p:spPr>
+        <p:txBody>
+          <a:bodyPr wrap="none" anchor="t" lIns="0" rIns="0" tIns="0" bIns="0">
+            <a:noAutofit/>
+          </a:bodyPr>
+          <a:lstStyle/>
+          <a:p>
+            <a:pPr algn="l">
+              <a:lnSpc>
+                <a:spcPct val="114000"/>
+              </a:lnSpc>
+              <a:spcBef>
+                <a:spcPts val="0"/>
+              </a:spcBef>
+              <a:spcAft>
+                <a:spcPts val="0"/>
+              </a:spcAft>
+            </a:pPr>
+            <a:r>
+              <a:rPr sz="1800" b="1" lang="en-US">
+                <a:solidFill>
+                  <a:srgbClr val="00306C"/>
+                </a:solidFill>
+                <a:latin typeface="Pretendard"/>
+                <a:ea typeface="Pretendard"/>
+                <a:cs typeface="Pretendard"/>
+              </a:rPr>
+              <a:t>Update cost = sum over stages after stage 1; initial preparation and inference excluded</a:t>
+            </a:r>
+          </a:p>
+        </p:txBody>
+      </p:sp>
+      <p:pic>
+        <p:nvPicPr>
+          <p:cNvPr id="5" name="Picture 4" descr="original-6.png"/>
+          <p:cNvPicPr>
+            <a:picLocks noChangeAspect="1"/>
+          </p:cNvPicPr>
+          <p:nvPr/>
+        </p:nvPicPr>
+        <p:blipFill>
+          <a:blip r:embed="rId3"/>
+          <a:srcRect l="1350" t="29700" r="1350" b="500"/>
+          <a:stretch>
+            <a:fillRect/>
+          </a:stretch>
+        </p:blipFill>
+        <p:spPr>
+          <a:xfrm>
+            <a:off x="822960" y="1947672"/>
+            <a:ext cx="10543032" cy="4251960"/>
+          </a:xfrm>
+          <a:prstGeom prst="rect">
+            <a:avLst/>
+          </a:prstGeom>
+        </p:spPr>
+      </p:pic>
+      <p:sp>
+        <p:nvSpPr>
+          <p:cNvPr id="6" name="Rectangle 5"/>
+          <p:cNvSpPr/>
+          <p:nvPr/>
+        </p:nvSpPr>
+        <p:spPr>
+          <a:xfrm>
+            <a:off x="0" y="6446520"/>
+            <a:ext cx="12191999" cy="411480"/>
+          </a:xfrm>
+          <a:prstGeom prst="rect">
+            <a:avLst/>
+          </a:prstGeom>
+          <a:solidFill>
+            <a:srgbClr val="00306C"/>
+          </a:solidFill>
+          <a:ln>
+            <a:noFill/>
+          </a:ln>
+        </p:spPr>
+        <p:style>
+          <a:lnRef idx="1">
+            <a:schemeClr val="accent1"/>
+          </a:lnRef>
+          <a:fillRef idx="3">
+            <a:schemeClr val="accent1"/>
+          </a:fillRef>
+          <a:effectRef idx="2">
+            <a:schemeClr val="accent1"/>
+          </a:effectRef>
+          <a:fontRef idx="minor">
+            <a:schemeClr val="lt1"/>
+          </a:fontRef>
+        </p:style>
+        <p:txBody>
+          <a:bodyPr rtlCol="0" anchor="ctr"/>
+          <a:lstStyle/>
+          <a:p>
+            <a:pPr algn="ctr"/>
+          </a:p>
+        </p:txBody>
+      </p:sp>
+      <p:sp>
+        <p:nvSpPr>
+          <p:cNvPr id="7" name="TextBox 6"/>
+          <p:cNvSpPr txBox="1"/>
+          <p:nvPr/>
+        </p:nvSpPr>
+        <p:spPr>
+          <a:xfrm>
+            <a:off x="566928" y="6528816"/>
+            <a:ext cx="9738360" cy="214853"/>
+          </a:xfrm>
+          <a:prstGeom prst="rect">
+            <a:avLst/>
+          </a:prstGeom>
+          <a:noFill/>
+        </p:spPr>
+        <p:txBody>
+          <a:bodyPr wrap="none" anchor="t" lIns="0" rIns="0" tIns="0" bIns="0">
+            <a:noAutofit/>
+          </a:bodyPr>
+          <a:lstStyle/>
+          <a:p>
+            <a:pPr algn="l">
+              <a:lnSpc>
+                <a:spcPct val="114000"/>
+              </a:lnSpc>
+              <a:spcBef>
+                <a:spcPts val="0"/>
+              </a:spcBef>
+              <a:spcAft>
+                <a:spcPts val="0"/>
+              </a:spcAft>
+            </a:pPr>
+            <a:r>
+              <a:rPr sz="1400" b="0" lang="en-US">
+                <a:solidFill>
+                  <a:srgbClr val="FFFFFF"/>
+                </a:solidFill>
+                <a:latin typeface="Pretendard"/>
+                <a:ea typeface="Pretendard"/>
+                <a:cs typeface="Pretendard"/>
+              </a:rPr>
+              <a:t>Measured costs for this small cumulative setting; fixed-buffer retention remains to be tested</a:t>
+            </a:r>
+          </a:p>
+        </p:txBody>
+      </p:sp>
+      <p:sp>
+        <p:nvSpPr>
+          <p:cNvPr id="8" name="TextBox 7"/>
+          <p:cNvSpPr txBox="1"/>
+          <p:nvPr/>
+        </p:nvSpPr>
+        <p:spPr>
+          <a:xfrm>
+            <a:off x="10469880" y="6537960"/>
+            <a:ext cx="1143000" cy="201168"/>
+          </a:xfrm>
+          <a:prstGeom prst="rect">
+            <a:avLst/>
+          </a:prstGeom>
+          <a:noFill/>
+        </p:spPr>
+        <p:txBody>
+          <a:bodyPr wrap="none" anchor="t" lIns="0" rIns="0" tIns="0" bIns="0">
+            <a:noAutofit/>
+          </a:bodyPr>
+          <a:lstStyle/>
+          <a:p>
+            <a:pPr algn="r">
+              <a:lnSpc>
+                <a:spcPct val="114000"/>
+              </a:lnSpc>
+              <a:spcBef>
+                <a:spcPts val="0"/>
+              </a:spcBef>
+              <a:spcAft>
+                <a:spcPts val="0"/>
+              </a:spcAft>
+            </a:pPr>
+            <a:r>
+              <a:rPr sz="1200" b="0" lang="en-US">
+                <a:solidFill>
+                  <a:srgbClr val="FFFFFF"/>
+                </a:solidFill>
+                <a:latin typeface="Pretendard"/>
+                <a:ea typeface="Pretendard"/>
+                <a:cs typeface="Pretendard"/>
+              </a:rPr>
+              <a:t>04   8</a:t>
+            </a:r>
+          </a:p>
+        </p:txBody>
+      </p:sp>
     </p:spTree>
   </p:cSld>
   <p:clrMapOvr>
